--- a/docs/entregas/Apresentacao_QuatroNorte_Fase2.pptx
+++ b/docs/entregas/Apresentacao_QuatroNorte_Fase2.pptx
@@ -42,18 +42,17 @@
     <p:sldId id="286" r:id="rId33"/>
     <p:sldId id="277" r:id="rId34"/>
     <p:sldId id="296" r:id="rId35"/>
-    <p:sldId id="303" r:id="rId47"/>
+    <p:sldId id="304" r:id="rId48"/>
     <p:sldId id="297" r:id="rId41"/>
     <p:sldId id="298" r:id="rId42"/>
     <p:sldId id="299" r:id="rId43"/>
     <p:sldId id="300" r:id="rId44"/>
-    <p:sldId id="304" r:id="rId48"/>
+    <p:sldId id="301" r:id="rId45"/>
     <p:sldId id="305" r:id="rId49"/>
+    <p:sldId id="302" r:id="rId46"/>
     <p:sldId id="306" r:id="rId50"/>
-    <p:sldId id="301" r:id="rId45"/>
     <p:sldId id="307" r:id="rId51"/>
-    <p:sldId id="308" r:id="rId52"/>
-    <p:sldId id="302" r:id="rId46"/>
+    <p:sldId id="303" r:id="rId47"/>
   </p:sldIdLst>
   <p:sldSz cx="12192000" cy="6858000"/>
   <p:notesSz cx="6858000" cy="9144000"/>
@@ -22040,7 +22039,7 @@
                             <a:srgbClr val="1C2433"/>
                           </a:solidFill>
                         </a:rPr>
-                        <a:t>tipo_manutencao_ano</a:t>
+                        <a:t>populacao_maint_flag</a:t>
                       </a:r>
                       <a:endParaRPr lang="pt-BR" sz="900" noProof="0" dirty="0">
                         <a:solidFill>
@@ -22067,7 +22066,7 @@
                             <a:srgbClr val="1C2433"/>
                           </a:solidFill>
                         </a:rPr>
-                        <a:t>removida do modelo</a:t>
+                        <a:t>removida</a:t>
                       </a:r>
                     </a:p>
                   </a:txBody>
@@ -22096,7 +22095,7 @@
                             <a:srgbClr val="1C2433"/>
                           </a:solidFill>
                         </a:rPr>
-                        <a:t>tempo_contrato_meses_inicio_ano</a:t>
+                        <a:t>tipo_manutencao_ano</a:t>
                       </a:r>
                       <a:endParaRPr lang="pt-BR" sz="900" noProof="0" dirty="0">
                         <a:solidFill>
@@ -22123,7 +22122,7 @@
                             <a:srgbClr val="1C2433"/>
                           </a:solidFill>
                         </a:rPr>
-                        <a:t>mantida</a:t>
+                        <a:t>mantida (DUMMY)</a:t>
                       </a:r>
                     </a:p>
                   </a:txBody>
@@ -22152,7 +22151,7 @@
                             <a:srgbClr val="1C2433"/>
                           </a:solidFill>
                         </a:rPr>
-                        <a:t>tempo_contrato_meses_fim_ano</a:t>
+                        <a:t>share_maint_ano</a:t>
                       </a:r>
                       <a:endParaRPr lang="pt-BR" sz="900" noProof="0" dirty="0">
                         <a:solidFill>
@@ -22208,7 +22207,7 @@
                             <a:srgbClr val="1C2433"/>
                           </a:solidFill>
                         </a:rPr>
-                        <a:t>share_maint_ano</a:t>
+                        <a:t>tempo_contrato_meses_inicio_ano</a:t>
                       </a:r>
                     </a:p>
                   </a:txBody>
@@ -22230,7 +22229,7 @@
                             <a:srgbClr val="1C2433"/>
                           </a:solidFill>
                         </a:rPr>
-                        <a:t>mantida (só explicativo)</a:t>
+                        <a:t>mantida</a:t>
                       </a:r>
                     </a:p>
                   </a:txBody>
@@ -22259,7 +22258,7 @@
                             <a:srgbClr val="1C2433"/>
                           </a:solidFill>
                         </a:rPr>
-                        <a:t>n_clientes_ano</a:t>
+                        <a:t>tempo_contrato_meses_fim_ano</a:t>
                       </a:r>
                     </a:p>
                   </a:txBody>
@@ -22310,7 +22309,7 @@
                             <a:srgbClr val="1C2433"/>
                           </a:solidFill>
                         </a:rPr>
-                        <a:t>trocou_contrato_ano</a:t>
+                        <a:t>n_clientes_ano</a:t>
                       </a:r>
                     </a:p>
                   </a:txBody>
@@ -22361,7 +22360,7 @@
                             <a:srgbClr val="1C2433"/>
                           </a:solidFill>
                         </a:rPr>
-                        <a:t>n_os_ano</a:t>
+                        <a:t>trocou_contrato_ano</a:t>
                       </a:r>
                       <a:endParaRPr lang="pt-BR" sz="900" noProof="0" dirty="0">
                         <a:solidFill>
@@ -22388,7 +22387,7 @@
                             <a:srgbClr val="1C2433"/>
                           </a:solidFill>
                         </a:rPr>
-                        <a:t>removida</a:t>
+                        <a:t>mantida (só explicativo)</a:t>
                       </a:r>
                     </a:p>
                   </a:txBody>
@@ -22417,7 +22416,7 @@
                             <a:srgbClr val="1C2433"/>
                           </a:solidFill>
                         </a:rPr>
-                        <a:t>custo_medio_por_os_ano</a:t>
+                        <a:t>n_os_ano</a:t>
                       </a:r>
                       <a:endParaRPr lang="pt-BR" sz="900" noProof="0" dirty="0">
                         <a:solidFill>
@@ -22444,7 +22443,7 @@
                             <a:srgbClr val="1C2433"/>
                           </a:solidFill>
                         </a:rPr>
-                        <a:t>removida</a:t>
+                        <a:t>ALVO Y2</a:t>
                       </a:r>
                     </a:p>
                   </a:txBody>
@@ -22473,7 +22472,7 @@
                             <a:srgbClr val="1C2433"/>
                           </a:solidFill>
                         </a:rPr>
-                        <a:t>descricao_carreta</a:t>
+                        <a:t>custo_medio_por_os_ano</a:t>
                       </a:r>
                       <a:endParaRPr lang="pt-BR" sz="900" noProof="0" dirty="0">
                         <a:solidFill>
@@ -22500,7 +22499,7 @@
                             <a:srgbClr val="1C2433"/>
                           </a:solidFill>
                         </a:rPr>
-                        <a:t>removida</a:t>
+                        <a:t>ALVO Y3</a:t>
                       </a:r>
                     </a:p>
                   </a:txBody>
@@ -22529,7 +22528,7 @@
                             <a:srgbClr val="1C2433"/>
                           </a:solidFill>
                         </a:rPr>
-                        <a:t>ano_modelo</a:t>
+                        <a:t>descricao_carreta</a:t>
                       </a:r>
                       <a:endParaRPr lang="pt-BR" sz="900" noProof="0" dirty="0">
                         <a:solidFill>
@@ -22556,7 +22555,7 @@
                             <a:srgbClr val="1C2433"/>
                           </a:solidFill>
                         </a:rPr>
-                        <a:t>condicional</a:t>
+                        <a:t>mantida (DUMMY)</a:t>
                       </a:r>
                     </a:p>
                   </a:txBody>
@@ -22585,7 +22584,7 @@
                             <a:srgbClr val="1C2433"/>
                           </a:solidFill>
                         </a:rPr>
-                        <a:t>idade_carreta</a:t>
+                        <a:t>unit_subtype</a:t>
                       </a:r>
                       <a:endParaRPr lang="pt-BR" sz="900" noProof="0" dirty="0">
                         <a:solidFill>
@@ -22612,7 +22611,7 @@
                             <a:srgbClr val="1C2433"/>
                           </a:solidFill>
                         </a:rPr>
-                        <a:t>mantida</a:t>
+                        <a:t>mantida (DUMMY)</a:t>
                       </a:r>
                     </a:p>
                   </a:txBody>
@@ -22641,7 +22640,7 @@
                             <a:srgbClr val="1C2433"/>
                           </a:solidFill>
                         </a:rPr>
-                        <a:t>eixos</a:t>
+                        <a:t>flag_refrigerado</a:t>
                       </a:r>
                       <a:endParaRPr lang="pt-BR" sz="900" noProof="0" dirty="0">
                         <a:solidFill>
@@ -22668,7 +22667,7 @@
                             <a:srgbClr val="1C2433"/>
                           </a:solidFill>
                         </a:rPr>
-                        <a:t>mantida</a:t>
+                        <a:t>mantida (DUMMY)</a:t>
                       </a:r>
                     </a:p>
                   </a:txBody>
@@ -22697,7 +22696,7 @@
                             <a:srgbClr val="1C2433"/>
                           </a:solidFill>
                         </a:rPr>
-                        <a:t>comprimento</a:t>
+                        <a:t>vmrs_predominante_ano</a:t>
                       </a:r>
                       <a:endParaRPr lang="pt-BR" sz="900" noProof="0" dirty="0">
                         <a:solidFill>
@@ -22724,7 +22723,7 @@
                             <a:srgbClr val="1C2433"/>
                           </a:solidFill>
                         </a:rPr>
-                        <a:t>mantida</a:t>
+                        <a:t>mantida (DUMMY, so explicativo)</a:t>
                       </a:r>
                     </a:p>
                   </a:txBody>
@@ -22753,7 +22752,7 @@
                             <a:srgbClr val="1C2433"/>
                           </a:solidFill>
                         </a:rPr>
-                        <a:t>flag_refrigerado</a:t>
+                        <a:t>n_sistemas_vmrs_distintos_ano</a:t>
                       </a:r>
                       <a:endParaRPr lang="pt-BR" sz="900" noProof="0" dirty="0">
                         <a:solidFill>
@@ -22780,7 +22779,63 @@
                             <a:srgbClr val="1C2433"/>
                           </a:solidFill>
                         </a:rPr>
-                        <a:t>mantida</a:t>
+                        <a:t>mantida (só explicativo)</a:t>
+                      </a:r>
+                    </a:p>
+                  </a:txBody>
+                  <a:tcPr anchor="ctr">
+                    <a:solidFill>
+                      <a:srgbClr val="FFFFFF"/>
+                    </a:solidFill>
+                  </a:tcPr>
+                </a:tc>
+                <a:extLst>
+                  <a:ext uri="{0D108BD9-81ED-4DB2-BD59-A6C34878D82A}">
+                    <a16:rowId xmlns:a16="http://schemas.microsoft.com/office/drawing/2014/main" val="10001"/>
+                  </a:ext>
+                </a:extLst>
+              </a:tr>
+              <a:tr h="298704">
+                <a:tc>
+                  <a:txBody>
+                    <a:bodyPr/>
+                    <a:lstStyle/>
+                    <a:p>
+                      <a:pPr algn="ctr"/>
+                      <a:r>
+                        <a:rPr lang="pt-BR" sz="900" noProof="0" dirty="0" err="1">
+                          <a:solidFill>
+                            <a:srgbClr val="1C2433"/>
+                          </a:solidFill>
+                        </a:rPr>
+                        <a:t>vmrs_dist_media_5a</a:t>
+                      </a:r>
+                      <a:endParaRPr lang="pt-BR" sz="900" noProof="0" dirty="0">
+                        <a:solidFill>
+                          <a:srgbClr val="1C2433"/>
+                        </a:solidFill>
+                      </a:endParaRPr>
+                    </a:p>
+                  </a:txBody>
+                  <a:tcPr anchor="ctr">
+                    <a:solidFill>
+                      <a:srgbClr val="FFFFFF"/>
+                    </a:solidFill>
+                  </a:tcPr>
+                </a:tc>
+                <a:tc>
+                  <a:txBody>
+                    <a:bodyPr/>
+                    <a:lstStyle/>
+                    <a:p>
+                      <a:pPr algn="ctr"/>
+                      <a:r>
+                        <a:rPr lang="pt-BR" sz="900" noProof="0" dirty="0">
+                          <a:solidFill>
+                            <a:srgbClr val="1C2433"/>
+                          </a:solidFill>
+                        </a:rPr>
+                        <a:t>mantida (preditivo)</a:t>
                       </a:r>
                     </a:p>
                   </a:txBody>
@@ -22904,7 +22959,7 @@
                             <a:srgbClr val="1C2433"/>
                           </a:solidFill>
                         </a:rPr>
-                        <a:t>unit_subtype</a:t>
+                        <a:t>km_rodado_ano</a:t>
                       </a:r>
                       <a:endParaRPr lang="pt-BR" sz="900" noProof="0" dirty="0">
                         <a:solidFill>
@@ -22931,7 +22986,7 @@
                             <a:srgbClr val="1C2433"/>
                           </a:solidFill>
                         </a:rPr>
-                        <a:t>mantida</a:t>
+                        <a:t>mantida (só explicativo)</a:t>
                       </a:r>
                     </a:p>
                   </a:txBody>
@@ -22960,7 +23015,7 @@
                             <a:srgbClr val="1C2433"/>
                           </a:solidFill>
                         </a:rPr>
-                        <a:t>tire_size</a:t>
+                        <a:t>km_acumulado_fim_ano</a:t>
                       </a:r>
                       <a:endParaRPr lang="pt-BR" sz="900" noProof="0" dirty="0">
                         <a:solidFill>
@@ -22987,7 +23042,7 @@
                             <a:srgbClr val="1C2433"/>
                           </a:solidFill>
                         </a:rPr>
-                        <a:t>mantida</a:t>
+                        <a:t>explicativo / início de ano no preditivo</a:t>
                       </a:r>
                     </a:p>
                   </a:txBody>
@@ -23016,7 +23071,7 @@
                             <a:srgbClr val="1C2433"/>
                           </a:solidFill>
                         </a:rPr>
-                        <a:t>suspension_type</a:t>
+                        <a:t>n_os_ano_anterior</a:t>
                       </a:r>
                       <a:endParaRPr lang="pt-BR" sz="900" noProof="0" dirty="0">
                         <a:solidFill>
@@ -23072,7 +23127,7 @@
                             <a:srgbClr val="1C2433"/>
                           </a:solidFill>
                         </a:rPr>
-                        <a:t>new_used_indicator</a:t>
+                        <a:t>custo_ano_anterior</a:t>
                       </a:r>
                       <a:endParaRPr lang="pt-BR" sz="900" noProof="0" dirty="0">
                         <a:solidFill>
@@ -23128,7 +23183,7 @@
                             <a:srgbClr val="1C2433"/>
                           </a:solidFill>
                         </a:rPr>
-                        <a:t>cod_montadora</a:t>
+                        <a:t>n_os_acum_ate_ano_anterior</a:t>
                       </a:r>
                       <a:endParaRPr lang="pt-BR" sz="900" noProof="0" dirty="0">
                         <a:solidFill>
@@ -23184,7 +23239,7 @@
                             <a:srgbClr val="1C2433"/>
                           </a:solidFill>
                         </a:rPr>
-                        <a:t>regiao_operacao</a:t>
+                        <a:t>custo_acum_ate_ano_anterior</a:t>
                       </a:r>
                       <a:endParaRPr lang="pt-BR" sz="900" noProof="0" dirty="0">
                         <a:solidFill>
@@ -23240,7 +23295,7 @@
                             <a:srgbClr val="1C2433"/>
                           </a:solidFill>
                         </a:rPr>
-                        <a:t>provincia_estado</a:t>
+                        <a:t>anos_ativo_ate_ano_anterior</a:t>
                       </a:r>
                       <a:endParaRPr lang="pt-BR" sz="900" noProof="0" dirty="0">
                         <a:solidFill>
@@ -23312,7 +23367,7 @@
                             <a:srgbClr val="1C2433"/>
                           </a:solidFill>
                         </a:rPr>
-                        <a:t>vmrs_predominante_ano</a:t>
+                        <a:t>idade_carreta</a:t>
                       </a:r>
                       <a:endParaRPr lang="pt-BR" sz="900" noProof="0" dirty="0">
                         <a:solidFill>
@@ -23339,7 +23394,7 @@
                             <a:srgbClr val="1C2433"/>
                           </a:solidFill>
                         </a:rPr>
-                        <a:t>mantida (só explicativo)</a:t>
+                        <a:t>mantida</a:t>
                       </a:r>
                     </a:p>
                   </a:txBody>
@@ -23368,7 +23423,7 @@
                             <a:srgbClr val="1C2433"/>
                           </a:solidFill>
                         </a:rPr>
-                        <a:t>km_rodado_ano</a:t>
+                        <a:t>eixos</a:t>
                       </a:r>
                       <a:endParaRPr lang="pt-BR" sz="900" noProof="0" dirty="0">
                         <a:solidFill>
@@ -23395,7 +23450,7 @@
                             <a:srgbClr val="1C2433"/>
                           </a:solidFill>
                         </a:rPr>
-                        <a:t>mantida (só explicativo)</a:t>
+                        <a:t>mantida</a:t>
                       </a:r>
                     </a:p>
                   </a:txBody>
@@ -23424,7 +23479,7 @@
                             <a:srgbClr val="1C2433"/>
                           </a:solidFill>
                         </a:rPr>
-                        <a:t>n_sistemas_vmrs_distintos_ano</a:t>
+                        <a:t>regiao_operacao</a:t>
                       </a:r>
                       <a:endParaRPr lang="pt-BR" sz="900" noProof="0" dirty="0">
                         <a:solidFill>
@@ -23451,7 +23506,7 @@
                             <a:srgbClr val="1C2433"/>
                           </a:solidFill>
                         </a:rPr>
-                        <a:t>mantida (só explicativo)</a:t>
+                        <a:t>removida</a:t>
                       </a:r>
                     </a:p>
                   </a:txBody>
@@ -23480,7 +23535,7 @@
                             <a:srgbClr val="1C2433"/>
                           </a:solidFill>
                         </a:rPr>
-                        <a:t>share_pm_ano</a:t>
+                        <a:t>provincia_estado</a:t>
                       </a:r>
                       <a:endParaRPr lang="pt-BR" sz="900" noProof="0" dirty="0">
                         <a:solidFill>
@@ -23507,7 +23562,7 @@
                             <a:srgbClr val="1C2433"/>
                           </a:solidFill>
                         </a:rPr>
-                        <a:t>mantida (só explicativo)</a:t>
+                        <a:t>removida</a:t>
                       </a:r>
                     </a:p>
                   </a:txBody>
@@ -23536,7 +23591,7 @@
                             <a:srgbClr val="1C2433"/>
                           </a:solidFill>
                         </a:rPr>
-                        <a:t>km_acumulado_fim_ano</a:t>
+                        <a:t>cod_montadora</a:t>
                       </a:r>
                       <a:endParaRPr lang="pt-BR" sz="900" noProof="0" dirty="0">
                         <a:solidFill>
@@ -23563,7 +23618,7 @@
                             <a:srgbClr val="1C2433"/>
                           </a:solidFill>
                         </a:rPr>
-                        <a:t>explicativo / início de ano no preditivo</a:t>
+                        <a:t>removida</a:t>
                       </a:r>
                     </a:p>
                   </a:txBody>
@@ -23592,7 +23647,7 @@
                             <a:srgbClr val="1C2433"/>
                           </a:solidFill>
                         </a:rPr>
-                        <a:t>n_os_ano_anterior</a:t>
+                        <a:t>suspension_type</a:t>
                       </a:r>
                       <a:endParaRPr lang="pt-BR" sz="900" noProof="0" dirty="0">
                         <a:solidFill>
@@ -23619,7 +23674,7 @@
                             <a:srgbClr val="1C2433"/>
                           </a:solidFill>
                         </a:rPr>
-                        <a:t>mantida</a:t>
+                        <a:t>removida</a:t>
                       </a:r>
                     </a:p>
                   </a:txBody>
@@ -23648,7 +23703,7 @@
                             <a:srgbClr val="1C2433"/>
                           </a:solidFill>
                         </a:rPr>
-                        <a:t>custo_ano_anterior</a:t>
+                        <a:t>new_used_indicator</a:t>
                       </a:r>
                       <a:endParaRPr lang="pt-BR" sz="900" noProof="0" dirty="0">
                         <a:solidFill>
@@ -23675,7 +23730,7 @@
                             <a:srgbClr val="1C2433"/>
                           </a:solidFill>
                         </a:rPr>
-                        <a:t>mantida</a:t>
+                        <a:t>removida</a:t>
                       </a:r>
                     </a:p>
                   </a:txBody>
@@ -23704,7 +23759,7 @@
                             <a:srgbClr val="1C2433"/>
                           </a:solidFill>
                         </a:rPr>
-                        <a:t>n_os_acum_ate_ano_anterior</a:t>
+                        <a:t>tire_size</a:t>
                       </a:r>
                       <a:endParaRPr lang="pt-BR" sz="900" noProof="0" dirty="0">
                         <a:solidFill>
@@ -23731,7 +23786,7 @@
                             <a:srgbClr val="1C2433"/>
                           </a:solidFill>
                         </a:rPr>
-                        <a:t>mantida</a:t>
+                        <a:t>removida (PENDENTE)</a:t>
                       </a:r>
                     </a:p>
                   </a:txBody>
@@ -23760,7 +23815,7 @@
                             <a:srgbClr val="1C2433"/>
                           </a:solidFill>
                         </a:rPr>
-                        <a:t>custo_acum_ate_ano_anterior</a:t>
+                        <a:t>ano_modelo</a:t>
                       </a:r>
                       <a:endParaRPr lang="pt-BR" sz="900" noProof="0" dirty="0">
                         <a:solidFill>
@@ -23787,7 +23842,7 @@
                             <a:srgbClr val="1C2433"/>
                           </a:solidFill>
                         </a:rPr>
-                        <a:t>mantida</a:t>
+                        <a:t>removida</a:t>
                       </a:r>
                     </a:p>
                   </a:txBody>
@@ -23816,7 +23871,7 @@
                             <a:srgbClr val="1C2433"/>
                           </a:solidFill>
                         </a:rPr>
-                        <a:t>anos_ativo_ate_ano_anterior</a:t>
+                        <a:t>comprimento</a:t>
                       </a:r>
                       <a:endParaRPr lang="pt-BR" sz="900" noProof="0" dirty="0">
                         <a:solidFill>
@@ -23843,7 +23898,63 @@
                             <a:srgbClr val="1C2433"/>
                           </a:solidFill>
                         </a:rPr>
-                        <a:t>mantida</a:t>
+                        <a:t>removida</a:t>
+                      </a:r>
+                    </a:p>
+                  </a:txBody>
+                  <a:tcPr anchor="ctr">
+                    <a:solidFill>
+                      <a:srgbClr val="FFFFFF"/>
+                    </a:solidFill>
+                  </a:tcPr>
+                </a:tc>
+                <a:extLst>
+                  <a:ext uri="{0D108BD9-81ED-4DB2-BD59-A6C34878D82A}">
+                    <a16:rowId xmlns:a16="http://schemas.microsoft.com/office/drawing/2014/main" val="10001"/>
+                  </a:ext>
+                </a:extLst>
+              </a:tr>
+              <a:tr h="344658">
+                <a:tc>
+                  <a:txBody>
+                    <a:bodyPr/>
+                    <a:lstStyle/>
+                    <a:p>
+                      <a:pPr algn="ctr"/>
+                      <a:r>
+                        <a:rPr lang="pt-BR" sz="900" noProof="0" dirty="0" err="1">
+                          <a:solidFill>
+                            <a:srgbClr val="1C2433"/>
+                          </a:solidFill>
+                        </a:rPr>
+                        <a:t>share_pm_ano</a:t>
+                      </a:r>
+                      <a:endParaRPr lang="pt-BR" sz="900" noProof="0" dirty="0">
+                        <a:solidFill>
+                          <a:srgbClr val="1C2433"/>
+                        </a:solidFill>
+                      </a:endParaRPr>
+                    </a:p>
+                  </a:txBody>
+                  <a:tcPr anchor="ctr">
+                    <a:solidFill>
+                      <a:srgbClr val="FFFFFF"/>
+                    </a:solidFill>
+                  </a:tcPr>
+                </a:tc>
+                <a:tc>
+                  <a:txBody>
+                    <a:bodyPr/>
+                    <a:lstStyle/>
+                    <a:p>
+                      <a:pPr algn="ctr"/>
+                      <a:r>
+                        <a:rPr lang="pt-BR" sz="900" noProof="0" dirty="0">
+                          <a:solidFill>
+                            <a:srgbClr val="1C2433"/>
+                          </a:solidFill>
+                        </a:rPr>
+                        <a:t>removida</a:t>
                       </a:r>
                     </a:p>
                   </a:txBody>
@@ -23893,7 +24004,7 @@
                 </a:solidFill>
                 <a:latin typeface="Calibri"/>
               </a:rPr>
-              <a:t>Critérios: ranking, VIF, redundância, vazamento temporal e coerência de domínio.</a:t>
+              <a:t>Seleção conforme a curadoria de variáveis do Grupo (02/set), confrontada com a evidência: ranking de associação, VIF, redundância, vazamento temporal e coerência de domínio.</a:t>
             </a:r>
           </a:p>
         </p:txBody>
@@ -26412,7 +26523,7 @@
                             <a:srgbClr val="1C2433"/>
                           </a:solidFill>
                         </a:rPr>
-                        <a:t>0.0356</a:t>
+                        <a:t>-0.1149</a:t>
                       </a:r>
                     </a:p>
                   </a:txBody>
@@ -26434,7 +26545,7 @@
                             <a:srgbClr val="1C2433"/>
                           </a:solidFill>
                         </a:rPr>
-                        <a:t>2663.4</a:t>
+                        <a:t>2838.7</a:t>
                       </a:r>
                     </a:p>
                   </a:txBody>
@@ -26456,7 +26567,7 @@
                             <a:srgbClr val="1C2433"/>
                           </a:solidFill>
                         </a:rPr>
-                        <a:t>1165.5</a:t>
+                        <a:t>1191.9</a:t>
                       </a:r>
                     </a:p>
                   </a:txBody>
@@ -26534,7 +26645,7 @@
                             <a:srgbClr val="1C2433"/>
                           </a:solidFill>
                         </a:rPr>
-                        <a:t>0.0256</a:t>
+                        <a:t>-0.1179</a:t>
                       </a:r>
                     </a:p>
                   </a:txBody>
@@ -26556,7 +26667,7 @@
                             <a:srgbClr val="1C2433"/>
                           </a:solidFill>
                         </a:rPr>
-                        <a:t>2677.2</a:t>
+                        <a:t>2842.6</a:t>
                       </a:r>
                     </a:p>
                   </a:txBody>
@@ -26578,7 +26689,7 @@
                             <a:srgbClr val="1C2433"/>
                           </a:solidFill>
                         </a:rPr>
-                        <a:t>1166.9</a:t>
+                        <a:t>1193.4</a:t>
                       </a:r>
                     </a:p>
                   </a:txBody>
@@ -26656,7 +26767,7 @@
                             <a:srgbClr val="1C2433"/>
                           </a:solidFill>
                         </a:rPr>
-                        <a:t>0.5315</a:t>
+                        <a:t>0.5099</a:t>
                       </a:r>
                     </a:p>
                   </a:txBody>
@@ -26678,7 +26789,7 @@
                             <a:srgbClr val="1C2433"/>
                           </a:solidFill>
                         </a:rPr>
-                        <a:t>1856.5</a:t>
+                        <a:t>1882.1</a:t>
                       </a:r>
                     </a:p>
                   </a:txBody>
@@ -26700,7 +26811,7 @@
                             <a:srgbClr val="1C2433"/>
                           </a:solidFill>
                         </a:rPr>
-                        <a:t>959.8</a:t>
+                        <a:t>958.0</a:t>
                       </a:r>
                     </a:p>
                   </a:txBody>
@@ -26778,7 +26889,7 @@
                             <a:srgbClr val="1C2433"/>
                           </a:solidFill>
                         </a:rPr>
-                        <a:t>0.5734</a:t>
+                        <a:t>0.5654</a:t>
                       </a:r>
                     </a:p>
                   </a:txBody>
@@ -26800,7 +26911,7 @@
                             <a:srgbClr val="1C2433"/>
                           </a:solidFill>
                         </a:rPr>
-                        <a:t>1771.5</a:t>
+                        <a:t>1772.5</a:t>
                       </a:r>
                     </a:p>
                   </a:txBody>
@@ -26822,7 +26933,7 @@
                             <a:srgbClr val="1C2433"/>
                           </a:solidFill>
                         </a:rPr>
-                        <a:t>915.5</a:t>
+                        <a:t>907.0</a:t>
                       </a:r>
                     </a:p>
                   </a:txBody>
@@ -26900,7 +27011,7 @@
                             <a:srgbClr val="1C2433"/>
                           </a:solidFill>
                         </a:rPr>
-                        <a:t>0.5854</a:t>
+                        <a:t>0.5776</a:t>
                       </a:r>
                     </a:p>
                   </a:txBody>
@@ -26922,7 +27033,7 @@
                             <a:srgbClr val="1C2433"/>
                           </a:solidFill>
                         </a:rPr>
-                        <a:t>1746.4</a:t>
+                        <a:t>1747.4</a:t>
                       </a:r>
                     </a:p>
                   </a:txBody>
@@ -26944,7 +27055,7 @@
                             <a:srgbClr val="1C2433"/>
                           </a:solidFill>
                         </a:rPr>
-                        <a:t>907.5</a:t>
+                        <a:t>912.5</a:t>
                       </a:r>
                     </a:p>
                   </a:txBody>
@@ -27022,7 +27133,7 @@
                             <a:srgbClr val="1C2433"/>
                           </a:solidFill>
                         </a:rPr>
-                        <a:t>0.5289</a:t>
+                        <a:t>0.5198</a:t>
                       </a:r>
                     </a:p>
                   </a:txBody>
@@ -27044,7 +27155,7 @@
                             <a:srgbClr val="1C2433"/>
                           </a:solidFill>
                         </a:rPr>
-                        <a:t>1861.6</a:t>
+                        <a:t>1863.1</a:t>
                       </a:r>
                     </a:p>
                   </a:txBody>
@@ -27066,7 +27177,7 @@
                             <a:srgbClr val="1C2433"/>
                           </a:solidFill>
                         </a:rPr>
-                        <a:t>986.1</a:t>
+                        <a:t>958.2</a:t>
                       </a:r>
                     </a:p>
                   </a:txBody>
@@ -27139,7 +27250,7 @@
                             <a:srgbClr val="1C2433"/>
                           </a:solidFill>
                         </a:rPr>
-                        <a:t>0.3876</a:t>
+                        <a:t>-9.7209</a:t>
                       </a:r>
                     </a:p>
                   </a:txBody>
@@ -27161,7 +27272,7 @@
                             <a:srgbClr val="1C2433"/>
                           </a:solidFill>
                         </a:rPr>
-                        <a:t>2122.4</a:t>
+                        <a:t>8802.9</a:t>
                       </a:r>
                     </a:p>
                   </a:txBody>
@@ -27183,7 +27294,7 @@
                             <a:srgbClr val="1C2433"/>
                           </a:solidFill>
                         </a:rPr>
-                        <a:t>1079.1</a:t>
+                        <a:t>1696.6</a:t>
                       </a:r>
                     </a:p>
                   </a:txBody>
@@ -27261,7 +27372,7 @@
                             <a:srgbClr val="1C2433"/>
                           </a:solidFill>
                         </a:rPr>
-                        <a:t>0.2719</a:t>
+                        <a:t>0.3118</a:t>
                       </a:r>
                     </a:p>
                   </a:txBody>
@@ -27283,7 +27394,7 @@
                             <a:srgbClr val="1C2433"/>
                           </a:solidFill>
                         </a:rPr>
-                        <a:t>2314.2</a:t>
+                        <a:t>2230.4</a:t>
                       </a:r>
                     </a:p>
                   </a:txBody>
@@ -27305,7 +27416,7 @@
                             <a:srgbClr val="1C2433"/>
                           </a:solidFill>
                         </a:rPr>
-                        <a:t>1202.0</a:t>
+                        <a:t>1183.1</a:t>
                       </a:r>
                     </a:p>
                   </a:txBody>
@@ -27383,7 +27494,7 @@
                             <a:srgbClr val="1C2433"/>
                           </a:solidFill>
                         </a:rPr>
-                        <a:t>0.2665</a:t>
+                        <a:t>0.3148</a:t>
                       </a:r>
                     </a:p>
                   </a:txBody>
@@ -27405,7 +27516,7 @@
                             <a:srgbClr val="1C2433"/>
                           </a:solidFill>
                         </a:rPr>
-                        <a:t>2322.8</a:t>
+                        <a:t>2225.5</a:t>
                       </a:r>
                     </a:p>
                   </a:txBody>
@@ -27427,7 +27538,7 @@
                             <a:srgbClr val="1C2433"/>
                           </a:solidFill>
                         </a:rPr>
-                        <a:t>1202.7</a:t>
+                        <a:t>1181.9</a:t>
                       </a:r>
                     </a:p>
                   </a:txBody>
@@ -27505,7 +27616,7 @@
                             <a:srgbClr val="1C2433"/>
                           </a:solidFill>
                         </a:rPr>
-                        <a:t>0.4124</a:t>
+                        <a:t>0.3944</a:t>
                       </a:r>
                     </a:p>
                   </a:txBody>
@@ -27527,7 +27638,7 @@
                             <a:srgbClr val="1C2433"/>
                           </a:solidFill>
                         </a:rPr>
-                        <a:t>2079.1</a:t>
+                        <a:t>2092.2</a:t>
                       </a:r>
                     </a:p>
                   </a:txBody>
@@ -27549,7 +27660,7 @@
                             <a:srgbClr val="1C2433"/>
                           </a:solidFill>
                         </a:rPr>
-                        <a:t>1128.2</a:t>
+                        <a:t>1128.6</a:t>
                       </a:r>
                     </a:p>
                   </a:txBody>
@@ -27627,7 +27738,7 @@
                             <a:srgbClr val="1C2433"/>
                           </a:solidFill>
                         </a:rPr>
-                        <a:t>0.4486</a:t>
+                        <a:t>0.4359</a:t>
                       </a:r>
                     </a:p>
                   </a:txBody>
@@ -27649,7 +27760,7 @@
                             <a:srgbClr val="1C2433"/>
                           </a:solidFill>
                         </a:rPr>
-                        <a:t>2013.9</a:t>
+                        <a:t>2019.3</a:t>
                       </a:r>
                     </a:p>
                   </a:txBody>
@@ -27671,7 +27782,7 @@
                             <a:srgbClr val="1C2433"/>
                           </a:solidFill>
                         </a:rPr>
-                        <a:t>1088.6</a:t>
+                        <a:t>1069.3</a:t>
                       </a:r>
                     </a:p>
                   </a:txBody>
@@ -27749,7 +27860,7 @@
                             <a:srgbClr val="1C2433"/>
                           </a:solidFill>
                         </a:rPr>
-                        <a:t>0.4549</a:t>
+                        <a:t>0.4418</a:t>
                       </a:r>
                     </a:p>
                   </a:txBody>
@@ -27771,7 +27882,7 @@
                             <a:srgbClr val="1C2433"/>
                           </a:solidFill>
                         </a:rPr>
-                        <a:t>2002.4</a:t>
+                        <a:t>2008.7</a:t>
                       </a:r>
                     </a:p>
                   </a:txBody>
@@ -27793,7 +27904,7 @@
                             <a:srgbClr val="1C2433"/>
                           </a:solidFill>
                         </a:rPr>
-                        <a:t>1092.7</a:t>
+                        <a:t>1074.3</a:t>
                       </a:r>
                     </a:p>
                   </a:txBody>
@@ -27871,7 +27982,7 @@
                             <a:srgbClr val="1C2433"/>
                           </a:solidFill>
                         </a:rPr>
-                        <a:t>0.4487</a:t>
+                        <a:t>0.4317</a:t>
                       </a:r>
                     </a:p>
                   </a:txBody>
@@ -27893,7 +28004,7 @@
                             <a:srgbClr val="1C2433"/>
                           </a:solidFill>
                         </a:rPr>
-                        <a:t>2013.8</a:t>
+                        <a:t>2026.8</a:t>
                       </a:r>
                     </a:p>
                   </a:txBody>
@@ -27915,7 +28026,7 @@
                             <a:srgbClr val="1C2433"/>
                           </a:solidFill>
                         </a:rPr>
-                        <a:t>1099.0</a:t>
+                        <a:t>1080.4</a:t>
                       </a:r>
                     </a:p>
                   </a:txBody>
@@ -27988,7 +28099,7 @@
                             <a:srgbClr val="1C2433"/>
                           </a:solidFill>
                         </a:rPr>
-                        <a:t>0.2723</a:t>
+                        <a:t>-46170.7899</a:t>
                       </a:r>
                     </a:p>
                   </a:txBody>
@@ -28010,7 +28121,7 @@
                             <a:srgbClr val="1C2433"/>
                           </a:solidFill>
                         </a:rPr>
-                        <a:t>2313.6</a:t>
+                        <a:t>577691.3</a:t>
                       </a:r>
                     </a:p>
                   </a:txBody>
@@ -28032,7 +28143,7 @@
                             <a:srgbClr val="1C2433"/>
                           </a:solidFill>
                         </a:rPr>
-                        <a:t>1258.1</a:t>
+                        <a:t>7572.7</a:t>
                       </a:r>
                     </a:p>
                   </a:txBody>
@@ -28112,7 +28223,7 @@
                 </a:solidFill>
                 <a:latin typeface="Calibri"/>
               </a:rPr>
-              <a:t>•  R² = 0.4549 · RMSE = 2002.4</a:t>
+              <a:t>•  R² = 0.4418 · RMSE = 2008.7</a:t>
             </a:r>
           </a:p>
           <a:p>
@@ -28123,7 +28234,7 @@
                 </a:solidFill>
                 <a:latin typeface="Calibri"/>
               </a:rPr>
-              <a:t>•  MAE = 1092.7 CAD/ano</a:t>
+              <a:t>•  MAE = 1074.3 CAD/ano</a:t>
             </a:r>
           </a:p>
           <a:p>
@@ -28134,7 +28245,7 @@
                 </a:solidFill>
                 <a:latin typeface="Calibri"/>
               </a:rPr>
-              <a:t>•  Explicativo (melhor): R² = 0.5854</a:t>
+              <a:t>•  Explicativo (melhor): R² = 0.5776</a:t>
             </a:r>
           </a:p>
           <a:p>
@@ -28156,7 +28267,7 @@
                 </a:solidFill>
                 <a:latin typeface="Calibri"/>
               </a:rPr>
-              <a:t>•  Efeito do filtro MAINT: +0.0193 de R².</a:t>
+              <a:t>•  Efeito das variáveis de contrato: +0,0359 de R².</a:t>
             </a:r>
           </a:p>
           <a:p>
@@ -28167,7 +28278,7 @@
                 </a:solidFill>
                 <a:latin typeface="Calibri"/>
               </a:rPr>
-              <a:t>•  Efeito do contrato: +0.0033 de R² — praticamente nulo.</a:t>
+              <a:t>•  Caminho decomposto (nº de OS × custo médio): R² = 0,4713.</a:t>
             </a:r>
           </a:p>
         </p:txBody>
@@ -28483,7 +28594,7 @@
                             <a:srgbClr val="1C2433"/>
                           </a:solidFill>
                         </a:rPr>
-                        <a:t>0.1693</a:t>
+                        <a:t>0.2089</a:t>
                       </a:r>
                     </a:p>
                   </a:txBody>
@@ -28512,7 +28623,7 @@
                             <a:srgbClr val="1C2433"/>
                           </a:solidFill>
                         </a:rPr>
-                        <a:t>n_os_ano_anterior</a:t>
+                        <a:t>custo_acum_ate_ano_anterior</a:t>
                       </a:r>
                       <a:endParaRPr lang="pt-BR" sz="1000" noProof="0" dirty="0">
                         <a:solidFill>
@@ -28539,7 +28650,7 @@
                             <a:srgbClr val="1C2433"/>
                           </a:solidFill>
                         </a:rPr>
-                        <a:t>0.0967</a:t>
+                        <a:t>0.1002</a:t>
                       </a:r>
                     </a:p>
                   </a:txBody>
@@ -28568,7 +28679,7 @@
                             <a:srgbClr val="1C2433"/>
                           </a:solidFill>
                         </a:rPr>
-                        <a:t>custo_acum_ate_ano_anterior</a:t>
+                        <a:t>n_os_ano_anterior</a:t>
                       </a:r>
                       <a:endParaRPr lang="pt-BR" sz="1000" noProof="0" dirty="0">
                         <a:solidFill>
@@ -28595,7 +28706,7 @@
                             <a:srgbClr val="1C2433"/>
                           </a:solidFill>
                         </a:rPr>
-                        <a:t>0.0804</a:t>
+                        <a:t>0.0923</a:t>
                       </a:r>
                     </a:p>
                   </a:txBody>
@@ -28624,7 +28735,7 @@
                             <a:srgbClr val="1C2433"/>
                           </a:solidFill>
                         </a:rPr>
-                        <a:t>km_acumulado_inicio_ano</a:t>
+                        <a:t>tipo_manutencao_ano</a:t>
                       </a:r>
                       <a:endParaRPr lang="pt-BR" sz="1000" noProof="0" dirty="0">
                         <a:solidFill>
@@ -28651,7 +28762,7 @@
                             <a:srgbClr val="1C2433"/>
                           </a:solidFill>
                         </a:rPr>
-                        <a:t>0.0791</a:t>
+                        <a:t>0.0583</a:t>
                       </a:r>
                     </a:p>
                   </a:txBody>
@@ -28680,7 +28791,7 @@
                             <a:srgbClr val="1C2433"/>
                           </a:solidFill>
                         </a:rPr>
-                        <a:t>unit_subtype</a:t>
+                        <a:t>km_acumulado_inicio_ano</a:t>
                       </a:r>
                       <a:endParaRPr lang="pt-BR" sz="1000" noProof="0" dirty="0">
                         <a:solidFill>
@@ -28707,7 +28818,7 @@
                             <a:srgbClr val="1C2433"/>
                           </a:solidFill>
                         </a:rPr>
-                        <a:t>0.0574</a:t>
+                        <a:t>0.056</a:t>
                       </a:r>
                     </a:p>
                   </a:txBody>
@@ -28736,7 +28847,7 @@
                             <a:srgbClr val="1C2433"/>
                           </a:solidFill>
                         </a:rPr>
-                        <a:t>n_os_acum_ate_ano_anterior</a:t>
+                        <a:t>idade_carreta</a:t>
                       </a:r>
                       <a:endParaRPr lang="pt-BR" sz="1000" noProof="0" dirty="0">
                         <a:solidFill>
@@ -28763,7 +28874,7 @@
                             <a:srgbClr val="1C2433"/>
                           </a:solidFill>
                         </a:rPr>
-                        <a:t>0.04</a:t>
+                        <a:t>0.0393</a:t>
                       </a:r>
                     </a:p>
                   </a:txBody>
@@ -28792,7 +28903,7 @@
                             <a:srgbClr val="1C2433"/>
                           </a:solidFill>
                         </a:rPr>
-                        <a:t>comprimento</a:t>
+                        <a:t>descricao_carreta</a:t>
                       </a:r>
                       <a:endParaRPr lang="pt-BR" sz="1000" noProof="0" dirty="0">
                         <a:solidFill>
@@ -28819,7 +28930,7 @@
                             <a:srgbClr val="1C2433"/>
                           </a:solidFill>
                         </a:rPr>
-                        <a:t>0.0395</a:t>
+                        <a:t>0.0389</a:t>
                       </a:r>
                     </a:p>
                   </a:txBody>
@@ -28848,7 +28959,7 @@
                             <a:srgbClr val="1C2433"/>
                           </a:solidFill>
                         </a:rPr>
-                        <a:t>provincia_estado</a:t>
+                        <a:t>n_os_acum_ate_ano_anterior</a:t>
                       </a:r>
                       <a:endParaRPr lang="pt-BR" sz="1000" noProof="0" dirty="0">
                         <a:solidFill>
@@ -28875,7 +28986,7 @@
                             <a:srgbClr val="1C2433"/>
                           </a:solidFill>
                         </a:rPr>
-                        <a:t>0.0367</a:t>
+                        <a:t>0.0338</a:t>
                       </a:r>
                     </a:p>
                   </a:txBody>
@@ -28904,7 +29015,7 @@
                             <a:srgbClr val="1C2433"/>
                           </a:solidFill>
                         </a:rPr>
-                        <a:t>idade_carreta</a:t>
+                        <a:t>custo_ano_anterior</a:t>
                       </a:r>
                     </a:p>
                   </a:txBody>
@@ -28926,7 +29037,7 @@
                             <a:srgbClr val="1C2433"/>
                           </a:solidFill>
                         </a:rPr>
-                        <a:t>0.0167</a:t>
+                        <a:t>0.0211</a:t>
                       </a:r>
                     </a:p>
                   </a:txBody>
@@ -29247,7 +29358,7 @@
                 </a:solidFill>
                 <a:latin typeface="Calibri"/>
               </a:rPr>
-              <a:t>R² 0.45 (preditivo) a 0.59 (explicativo) no teste 2025; regressões lineares ficam muito atrás (R² ~ 0,27).</a:t>
+              <a:t>R² 0.44 (preditivo) a 0.58 (explicativo) no teste 2025; regressões lineares ficam muito atrás (R² ~ 0,27).</a:t>
             </a:r>
           </a:p>
           <a:p>
@@ -29506,7 +29617,7 @@
                 </a:solidFill>
                 <a:latin typeface="Calibri"/>
               </a:rPr>
-              <a:t>Refrigeração é a variável nº 1 do modelo: embaralhar seus valores reduz o R² em 0,17 (importância por permutação). Isso mede a dependência do modelo ajustado — não equivale a retreinar sem a variável.</a:t>
+              <a:t>Refrigeração é a variável nº 1 do modelo: embaralhar seus valores reduz o R² em 0,21 (importância por permutação) — mais que todas as outras somadas. Isso mede a dependência do modelo ajustado, não equivale a retreinar sem a variável.</a:t>
             </a:r>
             <a:r>
               <a:rPr lang="pt-BR" sz="1200" b="0" i="0" noProof="0" dirty="0">
@@ -29531,7 +29642,7 @@
                 </a:solidFill>
                 <a:latin typeface="Calibri"/>
               </a:rPr>
-              <a:t>→ a relevância da refrigeração motivou testar modelos por grupo; o ganho, porém, não se mostrou estável entre os anos.</a:t>
+              <a:t>→ a refrigeração é a variável nº 1 do modelo; ela entra como atributo, não como critério de separação da frota.</a:t>
             </a:r>
           </a:p>
         </p:txBody>
@@ -29613,7 +29724,7 @@
                 </a:solidFill>
                 <a:latin typeface="Calibri"/>
               </a:rPr>
-              <a:t>ao remover variáveis do próprio ano e testar em 2025, o R² cai de 0.59 para 0.45.</a:t>
+              <a:t>ao remover variáveis do próprio ano e testar em 2025, o R² cai de 0.58 para 0.44.</a:t>
             </a:r>
           </a:p>
           <a:p>
@@ -29974,7 +30085,7 @@
                 </a:solidFill>
                 <a:latin typeface="Calibri"/>
               </a:rPr>
-              <a:t>•  Escopo do custo: todo o custo interno absorvido pela empresa (preventiva + corretiva). População de modelagem: as carretas sob contrato com manutenção inclusa (MAINT) — 41.739 dos 47.715 carreta-anos.</a:t>
+              <a:t>•  Escopo do custo: todo o custo interno absorvido pela empresa (preventiva + corretiva). População de modelagem: a frota completa — 47.715 carreta-anos. O tipo de contrato entra como variável do modelo, e não como recorte da amostra.</a:t>
             </a:r>
           </a:p>
           <a:p>
@@ -30599,7 +30710,7 @@
                 </a:solidFill>
                 <a:latin typeface="Calibri"/>
               </a:rPr>
-              <a:t>Base carreta × ano — alvo Y = custo anual por carreta (47.715 linhas; 41.739 na população MAINT). São 6 anos de dados, mas só 5 modeláveis: 2020 não tem ano anterior para as variáveis defasadas.</a:t>
+              <a:t>Base carreta × ano — alvos Y1 = custo anual por carreta e Y2 = nº de OS no ano (47.715 linhas). São 6 anos de dados, mas só 5 modeláveis: 2020 não tem ano anterior para as variáveis defasadas.</a:t>
             </a:r>
             <a:r>
               <a:rPr lang="pt-BR" sz="1150" b="0" i="0" dirty="0">
@@ -31550,7 +31661,7 @@
           <a:p>
             <a:r>
               <a:rPr lang="pt-BR" noProof="0" dirty="0"/>
-              <a:t>•  População principal: contrato com manutenção inclusa (MAINT), aplicada como flag; o cenário sem filtro é mantido como baseline de comparação.</a:t>
+              <a:t>•  População: a frota completa (47.715 carreta-anos). O regime de manutenção entra como variável do modelo; o recorte por MAINT foi testado e mantido apenas como comparação.</a:t>
             </a:r>
           </a:p>
           <a:p>
@@ -32159,7 +32270,7 @@
                 </a:solidFill>
                 <a:latin typeface="Calibri"/>
               </a:rPr>
-              <a:t>•  População restrita a MAINT: o ganho de R² do filtro reflete amostra mais homogênea, não melhora de previsão.</a:t>
+              <a:t>•  População: a frota completa. Restringir ao regime MAINT foi testado e alterou o R² em apenas +0,0017 — amostra mais homogênea, não previsão melhor.</a:t>
             </a:r>
           </a:p>
           <a:p>
@@ -33139,7 +33250,7 @@
                 </a:solidFill>
                 <a:latin typeface="Calibri"/>
               </a:rPr>
-              <a:t>Gradient Boosting: R² 0.4549 (preditivo) e 0.5854 (explicativo) no teste temporal de 2025.</a:t>
+              <a:t>Y1 (custo anual): R² 0,4713 pelo caminho decomposto e 0,5776 explicativo. Y2 (nº de OS): R² 0,6080. Teste 2025.</a:t>
             </a:r>
           </a:p>
           <a:p>
@@ -33327,7 +33438,7 @@
                 </a:solidFill>
                 <a:latin typeface="Calibri"/>
               </a:rPr>
-              <a:t>Contrato incorporado e testado: H6a e H6b com efeito fraco (+0.0033 de R²).</a:t>
+              <a:t>Contrato incorporado e testado: o TIPO importa (4ª variável mais importante); a duração, não (+0.0359 de R² no bloco).</a:t>
             </a:r>
           </a:p>
           <a:p>
@@ -33369,7 +33480,7 @@
                 </a:solidFill>
                 <a:latin typeface="Calibri"/>
               </a:rPr>
-              <a:t>PENDENTE: MERF e modelos hierárquicos — a divisão manual por grupo foi testada e não se sustentou.</a:t>
+              <a:t>PENDENTE: MERF, modelos hierárquicos e a previsão de 2026.</a:t>
             </a:r>
           </a:p>
         </p:txBody>
@@ -34115,7 +34226,7 @@
                           </a:solidFill>
                           <a:latin typeface="Calibri"/>
                         </a:rPr>
-                        <a:t>define a população; H6b na EDA</a:t>
+                        <a:t>variável do modelo (dummy); testa H6b</a:t>
                       </a:r>
                     </a:p>
                   </a:txBody>
@@ -34376,7 +34487,7 @@
                 </a:solidFill>
                 <a:latin typeface="Calibri"/>
               </a:rPr>
-              <a:t>•  Retomamos o filtro MAINT do desenho original, agora como flag: a base guarda tudo e a modelagem seleciona.</a:t>
+              <a:t>•  O regime de manutenção entrou como VARIÁVEL do modelo, e não como recorte da amostra: a frota completa é a população.</a:t>
             </a:r>
           </a:p>
         </p:txBody>
@@ -34915,7 +35026,7 @@
                 </a:solidFill>
                 <a:latin typeface="Calibri"/>
               </a:rPr>
-              <a:t>•  Avaliado sobre a base COMPLETA: dentro da população MAINT a variável é constante.</a:t>
+              <a:t>•  O tipo de contrato deixou de recortar a amostra e passou a ser VARIÁVEL do modelo — é assim que H6b é testada.</a:t>
             </a:r>
           </a:p>
           <a:p>
@@ -35071,7 +35182,7 @@
                 </a:solidFill>
                 <a:latin typeface="Calibri"/>
               </a:rPr>
-              <a:t>FASE 2 · DESENHO DA MODELAGEM</a:t>
+              <a:t>FASE 2 · CURADORIA DE VARIÁVEIS</a:t>
             </a:r>
           </a:p>
         </p:txBody>
@@ -35105,7 +35216,7 @@
                 </a:solidFill>
                 <a:latin typeface="Calibri"/>
               </a:rPr>
-              <a:t>Como isolamos o efeito de cada mudança</a:t>
+              <a:t>As 40 variáveis revisadas uma a uma (02/set)</a:t>
             </a:r>
           </a:p>
         </p:txBody>
@@ -35118,8 +35229,8 @@
         </p:nvSpPr>
         <p:spPr>
           <a:xfrm>
-            <a:off x="822960" y="1536192"/>
-            <a:ext cx="10607040" cy="365760"/>
+            <a:off x="822960" y="1517904"/>
+            <a:ext cx="10607040" cy="384048"/>
           </a:xfrm>
           <a:prstGeom prst="rect">
             <a:avLst/>
@@ -35139,409 +35250,21 @@
                 </a:solidFill>
                 <a:latin typeface="Calibri"/>
               </a:rPr>
-              <a:t>A base foi reextraída E ganhou contrato na mesma rodada. Sem separar as causas, qualquer ganho de R² seria ambíguo.</a:t>
+              <a:t>O Grupo revisou cada variável desenhada na fase anterior — manter, remover ou transformar em dummy — e a EDA foi refeita para confrontar cada decisão com a evidência.</a:t>
             </a:r>
           </a:p>
         </p:txBody>
       </p:sp>
-      <p:graphicFrame>
-        <p:nvGraphicFramePr>
-          <p:cNvPr id="7" name="Table 6"/>
-          <p:cNvGraphicFramePr>
-            <a:graphicFrameLocks noGrp="1"/>
-          </p:cNvGraphicFramePr>
-          <p:nvPr/>
-        </p:nvGraphicFramePr>
-        <p:xfrm>
-          <a:off x="822960" y="2011680"/>
-          <a:ext cx="10607040" cy="1554480"/>
-        </p:xfrm>
-        <a:graphic>
-          <a:graphicData uri="http://schemas.openxmlformats.org/drawingml/2006/table">
-            <a:tbl>
-              <a:tblPr firstRow="1" bandRow="1">
-                <a:tableStyleId>{5C22544A-7EE6-4342-B048-85BDC9FD1C3A}</a:tableStyleId>
-              </a:tblPr>
-              <a:tblGrid>
-                <a:gridCol w="2651760"/>
-                <a:gridCol w="2651760"/>
-                <a:gridCol w="2651760"/>
-                <a:gridCol w="2651760"/>
-              </a:tblGrid>
-              <a:tr h="388620">
-                <a:tc>
-                  <a:txBody>
-                    <a:bodyPr/>
-                    <a:lstStyle/>
-                    <a:p>
-                      <a:r>
-                        <a:rPr sz="1200" b="1">
-                          <a:solidFill>
-                            <a:srgbClr val="FFFFFF"/>
-                          </a:solidFill>
-                          <a:latin typeface="Calibri"/>
-                        </a:rPr>
-                        <a:t>configuração</a:t>
-                      </a:r>
-                    </a:p>
-                  </a:txBody>
-                  <a:tcPr>
-                    <a:solidFill>
-                      <a:srgbClr val="142B45"/>
-                    </a:solidFill>
-                  </a:tcPr>
-                </a:tc>
-                <a:tc>
-                  <a:txBody>
-                    <a:bodyPr/>
-                    <a:lstStyle/>
-                    <a:p>
-                      <a:r>
-                        <a:rPr sz="1200" b="1">
-                          <a:solidFill>
-                            <a:srgbClr val="FFFFFF"/>
-                          </a:solidFill>
-                          <a:latin typeface="Calibri"/>
-                        </a:rPr>
-                        <a:t>população</a:t>
-                      </a:r>
-                    </a:p>
-                  </a:txBody>
-                  <a:tcPr>
-                    <a:solidFill>
-                      <a:srgbClr val="142B45"/>
-                    </a:solidFill>
-                  </a:tcPr>
-                </a:tc>
-                <a:tc>
-                  <a:txBody>
-                    <a:bodyPr/>
-                    <a:lstStyle/>
-                    <a:p>
-                      <a:r>
-                        <a:rPr sz="1200" b="1">
-                          <a:solidFill>
-                            <a:srgbClr val="FFFFFF"/>
-                          </a:solidFill>
-                          <a:latin typeface="Calibri"/>
-                        </a:rPr>
-                        <a:t>variáveis</a:t>
-                      </a:r>
-                    </a:p>
-                  </a:txBody>
-                  <a:tcPr>
-                    <a:solidFill>
-                      <a:srgbClr val="142B45"/>
-                    </a:solidFill>
-                  </a:tcPr>
-                </a:tc>
-                <a:tc>
-                  <a:txBody>
-                    <a:bodyPr/>
-                    <a:lstStyle/>
-                    <a:p>
-                      <a:r>
-                        <a:rPr sz="1200" b="1">
-                          <a:solidFill>
-                            <a:srgbClr val="FFFFFF"/>
-                          </a:solidFill>
-                          <a:latin typeface="Calibri"/>
-                        </a:rPr>
-                        <a:t>responde</a:t>
-                      </a:r>
-                    </a:p>
-                  </a:txBody>
-                  <a:tcPr>
-                    <a:solidFill>
-                      <a:srgbClr val="142B45"/>
-                    </a:solidFill>
-                  </a:tcPr>
-                </a:tc>
-              </a:tr>
-              <a:tr h="388620">
-                <a:tc>
-                  <a:txBody>
-                    <a:bodyPr/>
-                    <a:lstStyle/>
-                    <a:p>
-                      <a:r>
-                        <a:rPr sz="1200">
-                          <a:solidFill>
-                            <a:srgbClr val="1C2433"/>
-                          </a:solidFill>
-                          <a:latin typeface="Calibri"/>
-                        </a:rPr>
-                        <a:t>A — baseline</a:t>
-                      </a:r>
-                    </a:p>
-                  </a:txBody>
-                  <a:tcPr>
-                    <a:solidFill>
-                      <a:srgbClr val="FFFFFF"/>
-                    </a:solidFill>
-                  </a:tcPr>
-                </a:tc>
-                <a:tc>
-                  <a:txBody>
-                    <a:bodyPr/>
-                    <a:lstStyle/>
-                    <a:p>
-                      <a:r>
-                        <a:rPr sz="1200">
-                          <a:solidFill>
-                            <a:srgbClr val="1C2433"/>
-                          </a:solidFill>
-                          <a:latin typeface="Calibri"/>
-                        </a:rPr>
-                        <a:t>todas as carretas</a:t>
-                      </a:r>
-                    </a:p>
-                  </a:txBody>
-                  <a:tcPr>
-                    <a:solidFill>
-                      <a:srgbClr val="FFFFFF"/>
-                    </a:solidFill>
-                  </a:tcPr>
-                </a:tc>
-                <a:tc>
-                  <a:txBody>
-                    <a:bodyPr/>
-                    <a:lstStyle/>
-                    <a:p>
-                      <a:r>
-                        <a:rPr sz="1200">
-                          <a:solidFill>
-                            <a:srgbClr val="1C2433"/>
-                          </a:solidFill>
-                          <a:latin typeface="Calibri"/>
-                        </a:rPr>
-                        <a:t>sem contrato</a:t>
-                      </a:r>
-                    </a:p>
-                  </a:txBody>
-                  <a:tcPr>
-                    <a:solidFill>
-                      <a:srgbClr val="FFFFFF"/>
-                    </a:solidFill>
-                  </a:tcPr>
-                </a:tc>
-                <a:tc>
-                  <a:txBody>
-                    <a:bodyPr/>
-                    <a:lstStyle/>
-                    <a:p>
-                      <a:r>
-                        <a:rPr sz="1200">
-                          <a:solidFill>
-                            <a:srgbClr val="1C2433"/>
-                          </a:solidFill>
-                          <a:latin typeface="Calibri"/>
-                        </a:rPr>
-                        <a:t>efeito da nova extração</a:t>
-                      </a:r>
-                    </a:p>
-                  </a:txBody>
-                  <a:tcPr>
-                    <a:solidFill>
-                      <a:srgbClr val="FFFFFF"/>
-                    </a:solidFill>
-                  </a:tcPr>
-                </a:tc>
-              </a:tr>
-              <a:tr h="388620">
-                <a:tc>
-                  <a:txBody>
-                    <a:bodyPr/>
-                    <a:lstStyle/>
-                    <a:p>
-                      <a:r>
-                        <a:rPr sz="1200">
-                          <a:solidFill>
-                            <a:srgbClr val="1C2433"/>
-                          </a:solidFill>
-                          <a:latin typeface="Calibri"/>
-                        </a:rPr>
-                        <a:t>B — filtro</a:t>
-                      </a:r>
-                    </a:p>
-                  </a:txBody>
-                  <a:tcPr>
-                    <a:solidFill>
-                      <a:srgbClr val="EEEADE"/>
-                    </a:solidFill>
-                  </a:tcPr>
-                </a:tc>
-                <a:tc>
-                  <a:txBody>
-                    <a:bodyPr/>
-                    <a:lstStyle/>
-                    <a:p>
-                      <a:r>
-                        <a:rPr sz="1200">
-                          <a:solidFill>
-                            <a:srgbClr val="1C2433"/>
-                          </a:solidFill>
-                          <a:latin typeface="Calibri"/>
-                        </a:rPr>
-                        <a:t>somente MAINT</a:t>
-                      </a:r>
-                    </a:p>
-                  </a:txBody>
-                  <a:tcPr>
-                    <a:solidFill>
-                      <a:srgbClr val="EEEADE"/>
-                    </a:solidFill>
-                  </a:tcPr>
-                </a:tc>
-                <a:tc>
-                  <a:txBody>
-                    <a:bodyPr/>
-                    <a:lstStyle/>
-                    <a:p>
-                      <a:r>
-                        <a:rPr sz="1200">
-                          <a:solidFill>
-                            <a:srgbClr val="1C2433"/>
-                          </a:solidFill>
-                          <a:latin typeface="Calibri"/>
-                        </a:rPr>
-                        <a:t>sem contrato</a:t>
-                      </a:r>
-                    </a:p>
-                  </a:txBody>
-                  <a:tcPr>
-                    <a:solidFill>
-                      <a:srgbClr val="EEEADE"/>
-                    </a:solidFill>
-                  </a:tcPr>
-                </a:tc>
-                <a:tc>
-                  <a:txBody>
-                    <a:bodyPr/>
-                    <a:lstStyle/>
-                    <a:p>
-                      <a:r>
-                        <a:rPr sz="1200">
-                          <a:solidFill>
-                            <a:srgbClr val="1C2433"/>
-                          </a:solidFill>
-                          <a:latin typeface="Calibri"/>
-                        </a:rPr>
-                        <a:t>efeito do filtro de contrato</a:t>
-                      </a:r>
-                    </a:p>
-                  </a:txBody>
-                  <a:tcPr>
-                    <a:solidFill>
-                      <a:srgbClr val="EEEADE"/>
-                    </a:solidFill>
-                  </a:tcPr>
-                </a:tc>
-              </a:tr>
-              <a:tr h="388620">
-                <a:tc>
-                  <a:txBody>
-                    <a:bodyPr/>
-                    <a:lstStyle/>
-                    <a:p>
-                      <a:r>
-                        <a:rPr sz="1200">
-                          <a:solidFill>
-                            <a:srgbClr val="1C2433"/>
-                          </a:solidFill>
-                          <a:latin typeface="Calibri"/>
-                        </a:rPr>
-                        <a:t>C — completa</a:t>
-                      </a:r>
-                    </a:p>
-                  </a:txBody>
-                  <a:tcPr>
-                    <a:solidFill>
-                      <a:srgbClr val="FFFFFF"/>
-                    </a:solidFill>
-                  </a:tcPr>
-                </a:tc>
-                <a:tc>
-                  <a:txBody>
-                    <a:bodyPr/>
-                    <a:lstStyle/>
-                    <a:p>
-                      <a:r>
-                        <a:rPr sz="1200">
-                          <a:solidFill>
-                            <a:srgbClr val="1C2433"/>
-                          </a:solidFill>
-                          <a:latin typeface="Calibri"/>
-                        </a:rPr>
-                        <a:t>somente MAINT</a:t>
-                      </a:r>
-                    </a:p>
-                  </a:txBody>
-                  <a:tcPr>
-                    <a:solidFill>
-                      <a:srgbClr val="FFFFFF"/>
-                    </a:solidFill>
-                  </a:tcPr>
-                </a:tc>
-                <a:tc>
-                  <a:txBody>
-                    <a:bodyPr/>
-                    <a:lstStyle/>
-                    <a:p>
-                      <a:r>
-                        <a:rPr sz="1200">
-                          <a:solidFill>
-                            <a:srgbClr val="1C2433"/>
-                          </a:solidFill>
-                          <a:latin typeface="Calibri"/>
-                        </a:rPr>
-                        <a:t>com contrato</a:t>
-                      </a:r>
-                    </a:p>
-                  </a:txBody>
-                  <a:tcPr>
-                    <a:solidFill>
-                      <a:srgbClr val="FFFFFF"/>
-                    </a:solidFill>
-                  </a:tcPr>
-                </a:tc>
-                <a:tc>
-                  <a:txBody>
-                    <a:bodyPr/>
-                    <a:lstStyle/>
-                    <a:p>
-                      <a:r>
-                        <a:rPr sz="1200">
-                          <a:solidFill>
-                            <a:srgbClr val="1C2433"/>
-                          </a:solidFill>
-                          <a:latin typeface="Calibri"/>
-                        </a:rPr>
-                        <a:t>efeito das variáveis novas</a:t>
-                      </a:r>
-                    </a:p>
-                  </a:txBody>
-                  <a:tcPr>
-                    <a:solidFill>
-                      <a:srgbClr val="FFFFFF"/>
-                    </a:solidFill>
-                  </a:tcPr>
-                </a:tc>
-              </a:tr>
-            </a:tbl>
-          </a:graphicData>
-        </a:graphic>
-      </p:graphicFrame>
       <p:sp>
         <p:nvSpPr>
-          <p:cNvPr id="8" name="Rectangle 7"/>
+          <p:cNvPr id="7" name="Rectangle 6"/>
           <p:cNvSpPr/>
           <p:nvPr/>
         </p:nvSpPr>
         <p:spPr>
           <a:xfrm>
-            <a:off x="822960" y="3931920"/>
-            <a:ext cx="3200400" cy="1051560"/>
+            <a:off x="822960" y="2057400"/>
+            <a:ext cx="3200400" cy="960120"/>
           </a:xfrm>
           <a:prstGeom prst="rect">
             <a:avLst/>
@@ -35580,13 +35303,13 @@
       </p:sp>
       <p:sp>
         <p:nvSpPr>
-          <p:cNvPr id="9" name="TextBox 8"/>
+          <p:cNvPr id="8" name="TextBox 7"/>
           <p:cNvSpPr txBox="1"/>
           <p:nvPr/>
         </p:nvSpPr>
         <p:spPr>
           <a:xfrm>
-            <a:off x="1005840" y="4005072"/>
+            <a:off x="1005840" y="2130552"/>
             <a:ext cx="2834640" cy="411480"/>
           </a:xfrm>
           <a:prstGeom prst="rect">
@@ -35603,24 +35326,24 @@
             <a:r>
               <a:rPr sz="2200" b="1">
                 <a:solidFill>
-                  <a:srgbClr val="142B45"/>
-                </a:solidFill>
-                <a:latin typeface="Calibri"/>
-              </a:rPr>
-              <a:t>0.4323</a:t>
+                  <a:srgbClr val="E8713A"/>
+                </a:solidFill>
+                <a:latin typeface="Calibri"/>
+              </a:rPr>
+              <a:t>23</a:t>
             </a:r>
           </a:p>
         </p:txBody>
       </p:sp>
       <p:sp>
         <p:nvSpPr>
-          <p:cNvPr id="10" name="TextBox 9"/>
+          <p:cNvPr id="9" name="TextBox 8"/>
           <p:cNvSpPr txBox="1"/>
           <p:nvPr/>
         </p:nvSpPr>
         <p:spPr>
           <a:xfrm>
-            <a:off x="1005840" y="4462272"/>
+            <a:off x="1005840" y="2587752"/>
             <a:ext cx="2834640" cy="274320"/>
           </a:xfrm>
           <a:prstGeom prst="rect">
@@ -35641,21 +35364,21 @@
                 </a:solidFill>
                 <a:latin typeface="Calibri"/>
               </a:rPr>
-              <a:t>A · R² preditivo</a:t>
+              <a:t>variáveis no modelo</a:t>
             </a:r>
           </a:p>
         </p:txBody>
       </p:sp>
       <p:sp>
         <p:nvSpPr>
-          <p:cNvPr id="11" name="Rectangle 10"/>
+          <p:cNvPr id="10" name="Rectangle 9"/>
           <p:cNvSpPr/>
           <p:nvPr/>
         </p:nvSpPr>
         <p:spPr>
           <a:xfrm>
-            <a:off x="4389120" y="3931920"/>
-            <a:ext cx="3200400" cy="1051560"/>
+            <a:off x="4389120" y="2057400"/>
+            <a:ext cx="3200400" cy="960120"/>
           </a:xfrm>
           <a:prstGeom prst="rect">
             <a:avLst/>
@@ -35694,13 +35417,13 @@
       </p:sp>
       <p:sp>
         <p:nvSpPr>
-          <p:cNvPr id="12" name="TextBox 11"/>
+          <p:cNvPr id="11" name="TextBox 10"/>
           <p:cNvSpPr txBox="1"/>
           <p:nvPr/>
         </p:nvSpPr>
         <p:spPr>
           <a:xfrm>
-            <a:off x="4572000" y="4005072"/>
+            <a:off x="4572000" y="2130552"/>
             <a:ext cx="2834640" cy="411480"/>
           </a:xfrm>
           <a:prstGeom prst="rect">
@@ -35721,20 +35444,20 @@
                 </a:solidFill>
                 <a:latin typeface="Calibri"/>
               </a:rPr>
-              <a:t>0.4516</a:t>
+              <a:t>17</a:t>
             </a:r>
           </a:p>
         </p:txBody>
       </p:sp>
       <p:sp>
         <p:nvSpPr>
-          <p:cNvPr id="13" name="TextBox 12"/>
+          <p:cNvPr id="12" name="TextBox 11"/>
           <p:cNvSpPr txBox="1"/>
           <p:nvPr/>
         </p:nvSpPr>
         <p:spPr>
           <a:xfrm>
-            <a:off x="4572000" y="4462272"/>
+            <a:off x="4572000" y="2587752"/>
             <a:ext cx="2834640" cy="274320"/>
           </a:xfrm>
           <a:prstGeom prst="rect">
@@ -35755,21 +35478,21 @@
                 </a:solidFill>
                 <a:latin typeface="Calibri"/>
               </a:rPr>
-              <a:t>B · R² preditivo (MAINT)</a:t>
+              <a:t>retiradas ou promovidas a alvo</a:t>
             </a:r>
           </a:p>
         </p:txBody>
       </p:sp>
       <p:sp>
         <p:nvSpPr>
-          <p:cNvPr id="14" name="Rectangle 13"/>
+          <p:cNvPr id="13" name="Rectangle 12"/>
           <p:cNvSpPr/>
           <p:nvPr/>
         </p:nvSpPr>
         <p:spPr>
           <a:xfrm>
-            <a:off x="7955279" y="3931920"/>
-            <a:ext cx="3200400" cy="1051560"/>
+            <a:off x="7955279" y="2057400"/>
+            <a:ext cx="3200400" cy="960120"/>
           </a:xfrm>
           <a:prstGeom prst="rect">
             <a:avLst/>
@@ -35808,13 +35531,13 @@
       </p:sp>
       <p:sp>
         <p:nvSpPr>
-          <p:cNvPr id="15" name="TextBox 14"/>
+          <p:cNvPr id="14" name="TextBox 13"/>
           <p:cNvSpPr txBox="1"/>
           <p:nvPr/>
         </p:nvSpPr>
         <p:spPr>
           <a:xfrm>
-            <a:off x="8138159" y="4005072"/>
+            <a:off x="8138159" y="2130552"/>
             <a:ext cx="2834640" cy="411480"/>
           </a:xfrm>
           <a:prstGeom prst="rect">
@@ -35831,24 +35554,24 @@
             <a:r>
               <a:rPr sz="2200" b="1">
                 <a:solidFill>
-                  <a:srgbClr val="E8713A"/>
-                </a:solidFill>
-                <a:latin typeface="Calibri"/>
-              </a:rPr>
-              <a:t>0.4549</a:t>
+                  <a:srgbClr val="142B45"/>
+                </a:solidFill>
+                <a:latin typeface="Calibri"/>
+              </a:rPr>
+              <a:t>42</a:t>
             </a:r>
           </a:p>
         </p:txBody>
       </p:sp>
       <p:sp>
         <p:nvSpPr>
-          <p:cNvPr id="16" name="TextBox 15"/>
+          <p:cNvPr id="15" name="TextBox 14"/>
           <p:cNvSpPr txBox="1"/>
           <p:nvPr/>
         </p:nvSpPr>
         <p:spPr>
           <a:xfrm>
-            <a:off x="8138159" y="4462272"/>
+            <a:off x="8138159" y="2587752"/>
             <a:ext cx="2834640" cy="274320"/>
           </a:xfrm>
           <a:prstGeom prst="rect">
@@ -35869,11 +35592,514 @@
                 </a:solidFill>
                 <a:latin typeface="Calibri"/>
               </a:rPr>
-              <a:t>C · R² preditivo (+ contrato)</a:t>
+              <a:t>colunas dummy, de 5 variáveis</a:t>
             </a:r>
           </a:p>
         </p:txBody>
       </p:sp>
+      <p:graphicFrame>
+        <p:nvGraphicFramePr>
+          <p:cNvPr id="16" name="Table 15"/>
+          <p:cNvGraphicFramePr>
+            <a:graphicFrameLocks noGrp="1"/>
+          </p:cNvGraphicFramePr>
+          <p:nvPr/>
+        </p:nvGraphicFramePr>
+        <p:xfrm>
+          <a:off x="640080" y="3246120"/>
+          <a:ext cx="10972800" cy="2148840"/>
+        </p:xfrm>
+        <a:graphic>
+          <a:graphicData uri="http://schemas.openxmlformats.org/drawingml/2006/table">
+            <a:tbl>
+              <a:tblPr firstRow="1" bandRow="1">
+                <a:tableStyleId>{5C22544A-7EE6-4342-B048-85BDC9FD1C3A}</a:tableStyleId>
+              </a:tblPr>
+              <a:tblGrid>
+                <a:gridCol w="3657600"/>
+                <a:gridCol w="3657600"/>
+                <a:gridCol w="3657600"/>
+              </a:tblGrid>
+              <a:tr h="306977">
+                <a:tc>
+                  <a:txBody>
+                    <a:bodyPr/>
+                    <a:lstStyle/>
+                    <a:p>
+                      <a:r>
+                        <a:rPr sz="1000" b="1">
+                          <a:solidFill>
+                            <a:srgbClr val="FFFFFF"/>
+                          </a:solidFill>
+                          <a:latin typeface="Calibri"/>
+                        </a:rPr>
+                        <a:t>decisão</a:t>
+                      </a:r>
+                    </a:p>
+                  </a:txBody>
+                  <a:tcPr>
+                    <a:solidFill>
+                      <a:srgbClr val="142B45"/>
+                    </a:solidFill>
+                  </a:tcPr>
+                </a:tc>
+                <a:tc>
+                  <a:txBody>
+                    <a:bodyPr/>
+                    <a:lstStyle/>
+                    <a:p>
+                      <a:r>
+                        <a:rPr sz="1000" b="1">
+                          <a:solidFill>
+                            <a:srgbClr val="FFFFFF"/>
+                          </a:solidFill>
+                          <a:latin typeface="Calibri"/>
+                        </a:rPr>
+                        <a:t>variáveis</a:t>
+                      </a:r>
+                    </a:p>
+                  </a:txBody>
+                  <a:tcPr>
+                    <a:solidFill>
+                      <a:srgbClr val="142B45"/>
+                    </a:solidFill>
+                  </a:tcPr>
+                </a:tc>
+                <a:tc>
+                  <a:txBody>
+                    <a:bodyPr/>
+                    <a:lstStyle/>
+                    <a:p>
+                      <a:r>
+                        <a:rPr sz="1000" b="1">
+                          <a:solidFill>
+                            <a:srgbClr val="FFFFFF"/>
+                          </a:solidFill>
+                          <a:latin typeface="Calibri"/>
+                        </a:rPr>
+                        <a:t>evidência</a:t>
+                      </a:r>
+                    </a:p>
+                  </a:txBody>
+                  <a:tcPr>
+                    <a:solidFill>
+                      <a:srgbClr val="142B45"/>
+                    </a:solidFill>
+                  </a:tcPr>
+                </a:tc>
+              </a:tr>
+              <a:tr h="306977">
+                <a:tc>
+                  <a:txBody>
+                    <a:bodyPr/>
+                    <a:lstStyle/>
+                    <a:p>
+                      <a:r>
+                        <a:rPr sz="1000">
+                          <a:solidFill>
+                            <a:srgbClr val="1C2433"/>
+                          </a:solidFill>
+                          <a:latin typeface="Calibri"/>
+                        </a:rPr>
+                        <a:t>DUMMY (one-hot)</a:t>
+                      </a:r>
+                    </a:p>
+                  </a:txBody>
+                  <a:tcPr>
+                    <a:solidFill>
+                      <a:srgbClr val="FFFFFF"/>
+                    </a:solidFill>
+                  </a:tcPr>
+                </a:tc>
+                <a:tc>
+                  <a:txBody>
+                    <a:bodyPr/>
+                    <a:lstStyle/>
+                    <a:p>
+                      <a:r>
+                        <a:rPr sz="1000">
+                          <a:solidFill>
+                            <a:srgbClr val="1C2433"/>
+                          </a:solidFill>
+                          <a:latin typeface="Calibri"/>
+                        </a:rPr>
+                        <a:t>descricao_carreta · unit_subtype · flag_refrigerado · tipo_manutencao_ano · vmrs_predominante_ano</a:t>
+                      </a:r>
+                    </a:p>
+                  </a:txBody>
+                  <a:tcPr>
+                    <a:solidFill>
+                      <a:srgbClr val="FFFFFF"/>
+                    </a:solidFill>
+                  </a:tcPr>
+                </a:tc>
+                <a:tc>
+                  <a:txBody>
+                    <a:bodyPr/>
+                    <a:lstStyle/>
+                    <a:p>
+                      <a:r>
+                        <a:rPr sz="1000">
+                          <a:solidFill>
+                            <a:srgbClr val="1C2433"/>
+                          </a:solidFill>
+                          <a:latin typeface="Calibri"/>
+                        </a:rPr>
+                        <a:t>η de 0,18 a 0,59</a:t>
+                      </a:r>
+                    </a:p>
+                  </a:txBody>
+                  <a:tcPr>
+                    <a:solidFill>
+                      <a:srgbClr val="FFFFFF"/>
+                    </a:solidFill>
+                  </a:tcPr>
+                </a:tc>
+              </a:tr>
+              <a:tr h="306977">
+                <a:tc>
+                  <a:txBody>
+                    <a:bodyPr/>
+                    <a:lstStyle/>
+                    <a:p>
+                      <a:r>
+                        <a:rPr sz="1000">
+                          <a:solidFill>
+                            <a:srgbClr val="1C2433"/>
+                          </a:solidFill>
+                          <a:latin typeface="Calibri"/>
+                        </a:rPr>
+                        <a:t>MANTER — histórico defasado</a:t>
+                      </a:r>
+                    </a:p>
+                  </a:txBody>
+                  <a:tcPr>
+                    <a:solidFill>
+                      <a:srgbClr val="EEEADE"/>
+                    </a:solidFill>
+                  </a:tcPr>
+                </a:tc>
+                <a:tc>
+                  <a:txBody>
+                    <a:bodyPr/>
+                    <a:lstStyle/>
+                    <a:p>
+                      <a:r>
+                        <a:rPr sz="1000">
+                          <a:solidFill>
+                            <a:srgbClr val="1C2433"/>
+                          </a:solidFill>
+                          <a:latin typeface="Calibri"/>
+                        </a:rPr>
+                        <a:t>nº de OS e custo do ano anterior e acumulados · anos ativos</a:t>
+                      </a:r>
+                    </a:p>
+                  </a:txBody>
+                  <a:tcPr>
+                    <a:solidFill>
+                      <a:srgbClr val="EEEADE"/>
+                    </a:solidFill>
+                  </a:tcPr>
+                </a:tc>
+                <a:tc>
+                  <a:txBody>
+                    <a:bodyPr/>
+                    <a:lstStyle/>
+                    <a:p>
+                      <a:r>
+                        <a:rPr sz="1000">
+                          <a:solidFill>
+                            <a:srgbClr val="1C2433"/>
+                          </a:solidFill>
+                          <a:latin typeface="Calibri"/>
+                        </a:rPr>
+                        <a:t>ρ de 0,26 a 0,54</a:t>
+                      </a:r>
+                    </a:p>
+                  </a:txBody>
+                  <a:tcPr>
+                    <a:solidFill>
+                      <a:srgbClr val="EEEADE"/>
+                    </a:solidFill>
+                  </a:tcPr>
+                </a:tc>
+              </a:tr>
+              <a:tr h="306977">
+                <a:tc>
+                  <a:txBody>
+                    <a:bodyPr/>
+                    <a:lstStyle/>
+                    <a:p>
+                      <a:r>
+                        <a:rPr sz="1000">
+                          <a:solidFill>
+                            <a:srgbClr val="1C2433"/>
+                          </a:solidFill>
+                          <a:latin typeface="Calibri"/>
+                        </a:rPr>
+                        <a:t>REMOVER — geografia (H5 encerrada)</a:t>
+                      </a:r>
+                    </a:p>
+                  </a:txBody>
+                  <a:tcPr>
+                    <a:solidFill>
+                      <a:srgbClr val="FFFFFF"/>
+                    </a:solidFill>
+                  </a:tcPr>
+                </a:tc>
+                <a:tc>
+                  <a:txBody>
+                    <a:bodyPr/>
+                    <a:lstStyle/>
+                    <a:p>
+                      <a:r>
+                        <a:rPr sz="1000">
+                          <a:solidFill>
+                            <a:srgbClr val="1C2433"/>
+                          </a:solidFill>
+                          <a:latin typeface="Calibri"/>
+                        </a:rPr>
+                        <a:t>regiao_operacao · provincia_estado</a:t>
+                      </a:r>
+                    </a:p>
+                  </a:txBody>
+                  <a:tcPr>
+                    <a:solidFill>
+                      <a:srgbClr val="FFFFFF"/>
+                    </a:solidFill>
+                  </a:tcPr>
+                </a:tc>
+                <a:tc>
+                  <a:txBody>
+                    <a:bodyPr/>
+                    <a:lstStyle/>
+                    <a:p>
+                      <a:r>
+                        <a:rPr sz="1000">
+                          <a:solidFill>
+                            <a:srgbClr val="1C2433"/>
+                          </a:solidFill>
+                          <a:latin typeface="Calibri"/>
+                        </a:rPr>
+                        <a:t>η ≤ 0,14</a:t>
+                      </a:r>
+                    </a:p>
+                  </a:txBody>
+                  <a:tcPr>
+                    <a:solidFill>
+                      <a:srgbClr val="FFFFFF"/>
+                    </a:solidFill>
+                  </a:tcPr>
+                </a:tc>
+              </a:tr>
+              <a:tr h="306977">
+                <a:tc>
+                  <a:txBody>
+                    <a:bodyPr/>
+                    <a:lstStyle/>
+                    <a:p>
+                      <a:r>
+                        <a:rPr sz="1000">
+                          <a:solidFill>
+                            <a:srgbClr val="1C2433"/>
+                          </a:solidFill>
+                          <a:latin typeface="Calibri"/>
+                        </a:rPr>
+                        <a:t>REMOVER — atributos de efeito fraco</a:t>
+                      </a:r>
+                    </a:p>
+                  </a:txBody>
+                  <a:tcPr>
+                    <a:solidFill>
+                      <a:srgbClr val="EEEADE"/>
+                    </a:solidFill>
+                  </a:tcPr>
+                </a:tc>
+                <a:tc>
+                  <a:txBody>
+                    <a:bodyPr/>
+                    <a:lstStyle/>
+                    <a:p>
+                      <a:r>
+                        <a:rPr sz="1000">
+                          <a:solidFill>
+                            <a:srgbClr val="1C2433"/>
+                          </a:solidFill>
+                          <a:latin typeface="Calibri"/>
+                        </a:rPr>
+                        <a:t>cod_montadora · suspension_type · new_used_indicator · ano_modelo · comprimento · share_pm_ano</a:t>
+                      </a:r>
+                    </a:p>
+                  </a:txBody>
+                  <a:tcPr>
+                    <a:solidFill>
+                      <a:srgbClr val="EEEADE"/>
+                    </a:solidFill>
+                  </a:tcPr>
+                </a:tc>
+                <a:tc>
+                  <a:txBody>
+                    <a:bodyPr/>
+                    <a:lstStyle/>
+                    <a:p>
+                      <a:r>
+                        <a:rPr sz="1000">
+                          <a:solidFill>
+                            <a:srgbClr val="1C2433"/>
+                          </a:solidFill>
+                          <a:latin typeface="Calibri"/>
+                        </a:rPr>
+                        <a:t>η e ρ ≤ 0,23</a:t>
+                      </a:r>
+                    </a:p>
+                  </a:txBody>
+                  <a:tcPr>
+                    <a:solidFill>
+                      <a:srgbClr val="EEEADE"/>
+                    </a:solidFill>
+                  </a:tcPr>
+                </a:tc>
+              </a:tr>
+              <a:tr h="306977">
+                <a:tc>
+                  <a:txBody>
+                    <a:bodyPr/>
+                    <a:lstStyle/>
+                    <a:p>
+                      <a:r>
+                        <a:rPr sz="1000">
+                          <a:solidFill>
+                            <a:srgbClr val="1C2433"/>
+                          </a:solidFill>
+                          <a:latin typeface="Calibri"/>
+                        </a:rPr>
+                        <a:t>REMOVER — risco de memorização</a:t>
+                      </a:r>
+                    </a:p>
+                  </a:txBody>
+                  <a:tcPr>
+                    <a:solidFill>
+                      <a:srgbClr val="FFFFFF"/>
+                    </a:solidFill>
+                  </a:tcPr>
+                </a:tc>
+                <a:tc>
+                  <a:txBody>
+                    <a:bodyPr/>
+                    <a:lstStyle/>
+                    <a:p>
+                      <a:r>
+                        <a:rPr sz="1000">
+                          <a:solidFill>
+                            <a:srgbClr val="1C2433"/>
+                          </a:solidFill>
+                          <a:latin typeface="Calibri"/>
+                        </a:rPr>
+                        <a:t>cod_cliente_predominante_ano (597 categorias)</a:t>
+                      </a:r>
+                    </a:p>
+                  </a:txBody>
+                  <a:tcPr>
+                    <a:solidFill>
+                      <a:srgbClr val="FFFFFF"/>
+                    </a:solidFill>
+                  </a:tcPr>
+                </a:tc>
+                <a:tc>
+                  <a:txBody>
+                    <a:bodyPr/>
+                    <a:lstStyle/>
+                    <a:p>
+                      <a:r>
+                        <a:rPr sz="1000">
+                          <a:solidFill>
+                            <a:srgbClr val="1C2433"/>
+                          </a:solidFill>
+                          <a:latin typeface="Calibri"/>
+                        </a:rPr>
+                        <a:t>η 0,61, mas não generaliza</a:t>
+                      </a:r>
+                    </a:p>
+                  </a:txBody>
+                  <a:tcPr>
+                    <a:solidFill>
+                      <a:srgbClr val="FFFFFF"/>
+                    </a:solidFill>
+                  </a:tcPr>
+                </a:tc>
+              </a:tr>
+              <a:tr h="306978">
+                <a:tc>
+                  <a:txBody>
+                    <a:bodyPr/>
+                    <a:lstStyle/>
+                    <a:p>
+                      <a:r>
+                        <a:rPr sz="1000">
+                          <a:solidFill>
+                            <a:srgbClr val="1C2433"/>
+                          </a:solidFill>
+                          <a:latin typeface="Calibri"/>
+                        </a:rPr>
+                        <a:t>PROMOVER A ALVO</a:t>
+                      </a:r>
+                    </a:p>
+                  </a:txBody>
+                  <a:tcPr>
+                    <a:solidFill>
+                      <a:srgbClr val="EEEADE"/>
+                    </a:solidFill>
+                  </a:tcPr>
+                </a:tc>
+                <a:tc>
+                  <a:txBody>
+                    <a:bodyPr/>
+                    <a:lstStyle/>
+                    <a:p>
+                      <a:r>
+                        <a:rPr sz="1000">
+                          <a:solidFill>
+                            <a:srgbClr val="1C2433"/>
+                          </a:solidFill>
+                          <a:latin typeface="Calibri"/>
+                        </a:rPr>
+                        <a:t>n_os_ano (Y2) · custo_medio_por_os_ano</a:t>
+                      </a:r>
+                    </a:p>
+                  </a:txBody>
+                  <a:tcPr>
+                    <a:solidFill>
+                      <a:srgbClr val="EEEADE"/>
+                    </a:solidFill>
+                  </a:tcPr>
+                </a:tc>
+                <a:tc>
+                  <a:txBody>
+                    <a:bodyPr/>
+                    <a:lstStyle/>
+                    <a:p>
+                      <a:r>
+                        <a:rPr sz="1000">
+                          <a:solidFill>
+                            <a:srgbClr val="1C2433"/>
+                          </a:solidFill>
+                          <a:latin typeface="Calibri"/>
+                        </a:rPr>
+                        <a:t>são componentes de Y1</a:t>
+                      </a:r>
+                    </a:p>
+                  </a:txBody>
+                  <a:tcPr>
+                    <a:solidFill>
+                      <a:srgbClr val="EEEADE"/>
+                    </a:solidFill>
+                  </a:tcPr>
+                </a:tc>
+              </a:tr>
+            </a:tbl>
+          </a:graphicData>
+        </a:graphic>
+      </p:graphicFrame>
       <p:sp>
         <p:nvSpPr>
           <p:cNvPr id="17" name="TextBox 16"/>
@@ -35882,8 +36108,8 @@
         </p:nvSpPr>
         <p:spPr>
           <a:xfrm>
-            <a:off x="822960" y="5257800"/>
-            <a:ext cx="10607040" cy="457200"/>
+            <a:off x="822960" y="5504688"/>
+            <a:ext cx="10607040" cy="914400"/>
           </a:xfrm>
           <a:prstGeom prst="rect">
             <a:avLst/>
@@ -35896,59 +36122,35 @@
           </a:bodyPr>
           <a:lstStyle/>
           <a:p>
-            <a:r>
-              <a:rPr sz="1600" b="1">
-                <a:solidFill>
-                  <a:srgbClr val="142B45"/>
-                </a:solidFill>
-                <a:latin typeface="Calibri"/>
-              </a:rPr>
-              <a:t>Efeito do filtro MAINT: +0.0193 de R²         Efeito das variáveis de contrato: +0.0033 de R²</a:t>
-            </a:r>
-          </a:p>
-        </p:txBody>
-      </p:sp>
-      <p:sp>
-        <p:nvSpPr>
-          <p:cNvPr id="18" name="TextBox 17"/>
-          <p:cNvSpPr txBox="1"/>
-          <p:nvPr/>
-        </p:nvSpPr>
-        <p:spPr>
-          <a:xfrm>
-            <a:off x="822960" y="5806440"/>
-            <a:ext cx="10607040" cy="640080"/>
-          </a:xfrm>
-          <a:prstGeom prst="rect">
-            <a:avLst/>
-          </a:prstGeom>
-          <a:noFill/>
-        </p:spPr>
-        <p:txBody>
-          <a:bodyPr wrap="square">
-            <a:spAutoFit/>
-          </a:bodyPr>
-          <a:lstStyle/>
-          <a:p>
-            <a:r>
-              <a:rPr sz="1200" b="0">
-                <a:solidFill>
-                  <a:srgbClr val="5B636E"/>
-                </a:solidFill>
-                <a:latin typeface="Calibri"/>
-              </a:rPr>
-              <a:t>O ganho do filtro não é melhora de previsão: as carreta-anos excluídas têm custo médio bem menor e muitas têm custo zero.</a:t>
-            </a:r>
-          </a:p>
-          <a:p>
-            <a:r>
-              <a:rPr sz="1200" b="0">
-                <a:solidFill>
-                  <a:srgbClr val="5B636E"/>
-                </a:solidFill>
-                <a:latin typeface="Calibri"/>
-              </a:rPr>
-              <a:t>Amostra mais homogênea eleva o R² sem que o modelo preveja melhor.</a:t>
+            <a:pPr>
+              <a:spcAft>
+                <a:spcPts val="700"/>
+              </a:spcAft>
+            </a:pPr>
+            <a:r>
+              <a:rPr sz="1200">
+                <a:solidFill>
+                  <a:srgbClr val="1C2433"/>
+                </a:solidFill>
+                <a:latin typeface="Calibri"/>
+              </a:rPr>
+              <a:t>•  A premissa do Grupo para VMRS — média dos últimos 5 anos — foi testada contra três alternativas e VENCEU (ρ 0,474).</a:t>
+            </a:r>
+          </a:p>
+          <a:p>
+            <a:pPr>
+              <a:spcAft>
+                <a:spcPts val="700"/>
+              </a:spcAft>
+            </a:pPr>
+            <a:r>
+              <a:rPr sz="1200">
+                <a:solidFill>
+                  <a:srgbClr val="1C2433"/>
+                </a:solidFill>
+                <a:latin typeface="Calibri"/>
+              </a:rPr>
+              <a:t>•  Cinco variáveis fracas em Y1 mostraram-se relevantes em Y2: decisão em aberto para a próxima rodada.</a:t>
             </a:r>
           </a:p>
         </p:txBody>
@@ -36088,7 +36290,7 @@
                 </a:solidFill>
                 <a:latin typeface="Calibri"/>
               </a:rPr>
-              <a:t>ITEM 13 · IMPLICAÇÕES GERENCIAIS</a:t>
+              <a:t>FASE 2 · DESENHO DA MODELAGEM</a:t>
             </a:r>
           </a:p>
         </p:txBody>
@@ -36122,369 +36324,21 @@
                 </a:solidFill>
                 <a:latin typeface="Calibri"/>
               </a:rPr>
-              <a:t>O que a empresa faz com estes resultados</a:t>
+              <a:t>Y1 e Y2: o que o projeto prevê</a:t>
             </a:r>
           </a:p>
         </p:txBody>
       </p:sp>
-      <p:graphicFrame>
-        <p:nvGraphicFramePr>
-          <p:cNvPr id="6" name="Table 5"/>
-          <p:cNvGraphicFramePr>
-            <a:graphicFrameLocks noGrp="1"/>
-          </p:cNvGraphicFramePr>
-          <p:nvPr/>
-        </p:nvGraphicFramePr>
-        <p:xfrm>
-          <a:off x="640080" y="1737360"/>
-          <a:ext cx="10972800" cy="3840480"/>
-        </p:xfrm>
-        <a:graphic>
-          <a:graphicData uri="http://schemas.openxmlformats.org/drawingml/2006/table">
-            <a:tbl>
-              <a:tblPr firstRow="1" bandRow="1">
-                <a:tableStyleId>{5C22544A-7EE6-4342-B048-85BDC9FD1C3A}</a:tableStyleId>
-              </a:tblPr>
-              <a:tblGrid>
-                <a:gridCol w="5486400"/>
-                <a:gridCol w="5486400"/>
-              </a:tblGrid>
-              <a:tr h="548640">
-                <a:tc>
-                  <a:txBody>
-                    <a:bodyPr/>
-                    <a:lstStyle/>
-                    <a:p>
-                      <a:r>
-                        <a:rPr sz="1000" b="1">
-                          <a:solidFill>
-                            <a:srgbClr val="FFFFFF"/>
-                          </a:solidFill>
-                          <a:latin typeface="Calibri"/>
-                        </a:rPr>
-                        <a:t>tema</a:t>
-                      </a:r>
-                    </a:p>
-                  </a:txBody>
-                  <a:tcPr>
-                    <a:solidFill>
-                      <a:srgbClr val="142B45"/>
-                    </a:solidFill>
-                  </a:tcPr>
-                </a:tc>
-                <a:tc>
-                  <a:txBody>
-                    <a:bodyPr/>
-                    <a:lstStyle/>
-                    <a:p>
-                      <a:r>
-                        <a:rPr sz="1000" b="1">
-                          <a:solidFill>
-                            <a:srgbClr val="FFFFFF"/>
-                          </a:solidFill>
-                          <a:latin typeface="Calibri"/>
-                        </a:rPr>
-                        <a:t>recomendação</a:t>
-                      </a:r>
-                    </a:p>
-                  </a:txBody>
-                  <a:tcPr>
-                    <a:solidFill>
-                      <a:srgbClr val="142B45"/>
-                    </a:solidFill>
-                  </a:tcPr>
-                </a:tc>
-              </a:tr>
-              <a:tr h="548640">
-                <a:tc>
-                  <a:txBody>
-                    <a:bodyPr/>
-                    <a:lstStyle/>
-                    <a:p>
-                      <a:r>
-                        <a:rPr sz="1000">
-                          <a:solidFill>
-                            <a:srgbClr val="1C2433"/>
-                          </a:solidFill>
-                          <a:latin typeface="Calibri"/>
-                        </a:rPr>
-                        <a:t>Orçamento</a:t>
-                      </a:r>
-                    </a:p>
-                  </a:txBody>
-                  <a:tcPr>
-                    <a:solidFill>
-                      <a:srgbClr val="FFFFFF"/>
-                    </a:solidFill>
-                  </a:tcPr>
-                </a:tc>
-                <a:tc>
-                  <a:txBody>
-                    <a:bodyPr/>
-                    <a:lstStyle/>
-                    <a:p>
-                      <a:r>
-                        <a:rPr sz="1000">
-                          <a:solidFill>
-                            <a:srgbClr val="1C2433"/>
-                          </a:solidFill>
-                          <a:latin typeface="Calibri"/>
-                        </a:rPr>
-                        <a:t>Usar o custo anual real por carreta como base de orçamento; projetar com o modelo preditivo (histórico defasado + atributos).</a:t>
-                      </a:r>
-                    </a:p>
-                  </a:txBody>
-                  <a:tcPr>
-                    <a:solidFill>
-                      <a:srgbClr val="FFFFFF"/>
-                    </a:solidFill>
-                  </a:tcPr>
-                </a:tc>
-              </a:tr>
-              <a:tr h="548640">
-                <a:tc>
-                  <a:txBody>
-                    <a:bodyPr/>
-                    <a:lstStyle/>
-                    <a:p>
-                      <a:r>
-                        <a:rPr sz="1000">
-                          <a:solidFill>
-                            <a:srgbClr val="1C2433"/>
-                          </a:solidFill>
-                          <a:latin typeface="Calibri"/>
-                        </a:rPr>
-                        <a:t>Priorização de frota</a:t>
-                      </a:r>
-                    </a:p>
-                  </a:txBody>
-                  <a:tcPr>
-                    <a:solidFill>
-                      <a:srgbClr val="EEEADE"/>
-                    </a:solidFill>
-                  </a:tcPr>
-                </a:tc>
-                <a:tc>
-                  <a:txBody>
-                    <a:bodyPr/>
-                    <a:lstStyle/>
-                    <a:p>
-                      <a:r>
-                        <a:rPr sz="1000">
-                          <a:solidFill>
-                            <a:srgbClr val="1C2433"/>
-                          </a:solidFill>
-                          <a:latin typeface="Calibri"/>
-                        </a:rPr>
-                        <a:t>Priorizar carretas com alto custo/OS no ano anterior e histórico acumulado elevado (fatores de maior importância).</a:t>
-                      </a:r>
-                    </a:p>
-                  </a:txBody>
-                  <a:tcPr>
-                    <a:solidFill>
-                      <a:srgbClr val="EEEADE"/>
-                    </a:solidFill>
-                  </a:tcPr>
-                </a:tc>
-              </a:tr>
-              <a:tr h="548640">
-                <a:tc>
-                  <a:txBody>
-                    <a:bodyPr/>
-                    <a:lstStyle/>
-                    <a:p>
-                      <a:r>
-                        <a:rPr sz="1000">
-                          <a:solidFill>
-                            <a:srgbClr val="1C2433"/>
-                          </a:solidFill>
-                          <a:latin typeface="Calibri"/>
-                        </a:rPr>
-                        <a:t>Perfil de ativo</a:t>
-                      </a:r>
-                    </a:p>
-                  </a:txBody>
-                  <a:tcPr>
-                    <a:solidFill>
-                      <a:srgbClr val="FFFFFF"/>
-                    </a:solidFill>
-                  </a:tcPr>
-                </a:tc>
-                <a:tc>
-                  <a:txBody>
-                    <a:bodyPr/>
-                    <a:lstStyle/>
-                    <a:p>
-                      <a:r>
-                        <a:rPr sz="1000">
-                          <a:solidFill>
-                            <a:srgbClr val="1C2433"/>
-                          </a:solidFill>
-                          <a:latin typeface="Calibri"/>
-                        </a:rPr>
-                        <a:t>Monitorar subtipos e refrigeradas, que concentram custos anuais mais altos (maior eta).</a:t>
-                      </a:r>
-                    </a:p>
-                  </a:txBody>
-                  <a:tcPr>
-                    <a:solidFill>
-                      <a:srgbClr val="FFFFFF"/>
-                    </a:solidFill>
-                  </a:tcPr>
-                </a:tc>
-              </a:tr>
-              <a:tr h="548640">
-                <a:tc>
-                  <a:txBody>
-                    <a:bodyPr/>
-                    <a:lstStyle/>
-                    <a:p>
-                      <a:r>
-                        <a:rPr sz="1000">
-                          <a:solidFill>
-                            <a:srgbClr val="1C2433"/>
-                          </a:solidFill>
-                          <a:latin typeface="Calibri"/>
-                        </a:rPr>
-                        <a:t>Uso</a:t>
-                      </a:r>
-                    </a:p>
-                  </a:txBody>
-                  <a:tcPr>
-                    <a:solidFill>
-                      <a:srgbClr val="EEEADE"/>
-                    </a:solidFill>
-                  </a:tcPr>
-                </a:tc>
-                <a:tc>
-                  <a:txBody>
-                    <a:bodyPr/>
-                    <a:lstStyle/>
-                    <a:p>
-                      <a:r>
-                        <a:rPr sz="1000">
-                          <a:solidFill>
-                            <a:srgbClr val="1C2433"/>
-                          </a:solidFill>
-                          <a:latin typeface="Calibri"/>
-                        </a:rPr>
-                        <a:t>Incorporar quilometragem esperada ao planejamento: o uso é um dos maiores associados ao custo anual.</a:t>
-                      </a:r>
-                    </a:p>
-                  </a:txBody>
-                  <a:tcPr>
-                    <a:solidFill>
-                      <a:srgbClr val="EEEADE"/>
-                    </a:solidFill>
-                  </a:tcPr>
-                </a:tc>
-              </a:tr>
-              <a:tr h="548640">
-                <a:tc>
-                  <a:txBody>
-                    <a:bodyPr/>
-                    <a:lstStyle/>
-                    <a:p>
-                      <a:r>
-                        <a:rPr sz="1000">
-                          <a:solidFill>
-                            <a:srgbClr val="1C2433"/>
-                          </a:solidFill>
-                          <a:latin typeface="Calibri"/>
-                        </a:rPr>
-                        <a:t>Contrato</a:t>
-                      </a:r>
-                    </a:p>
-                  </a:txBody>
-                  <a:tcPr>
-                    <a:solidFill>
-                      <a:srgbClr val="FFFFFF"/>
-                    </a:solidFill>
-                  </a:tcPr>
-                </a:tc>
-                <a:tc>
-                  <a:txBody>
-                    <a:bodyPr/>
-                    <a:lstStyle/>
-                    <a:p>
-                      <a:r>
-                        <a:rPr sz="1000">
-                          <a:solidFill>
-                            <a:srgbClr val="1C2433"/>
-                          </a:solidFill>
-                          <a:latin typeface="Calibri"/>
-                        </a:rPr>
-                        <a:t>População de análise definida por contrato com manutenção inclusa (MAINT). Efeito das variáveis de contrato sobre o poder preditivo: +0.0033 de R² — usar como insumo de precificação apenas na medida desse ganho.</a:t>
-                      </a:r>
-                    </a:p>
-                  </a:txBody>
-                  <a:tcPr>
-                    <a:solidFill>
-                      <a:srgbClr val="FFFFFF"/>
-                    </a:solidFill>
-                  </a:tcPr>
-                </a:tc>
-              </a:tr>
-              <a:tr h="548640">
-                <a:tc>
-                  <a:txBody>
-                    <a:bodyPr/>
-                    <a:lstStyle/>
-                    <a:p>
-                      <a:r>
-                        <a:rPr sz="1000">
-                          <a:solidFill>
-                            <a:srgbClr val="1C2433"/>
-                          </a:solidFill>
-                          <a:latin typeface="Calibri"/>
-                        </a:rPr>
-                        <a:t>Dados</a:t>
-                      </a:r>
-                    </a:p>
-                  </a:txBody>
-                  <a:tcPr>
-                    <a:solidFill>
-                      <a:srgbClr val="EEEADE"/>
-                    </a:solidFill>
-                  </a:tcPr>
-                </a:tc>
-                <a:tc>
-                  <a:txBody>
-                    <a:bodyPr/>
-                    <a:lstStyle/>
-                    <a:p>
-                      <a:r>
-                        <a:rPr sz="1000">
-                          <a:solidFill>
-                            <a:srgbClr val="1C2433"/>
-                          </a:solidFill>
-                          <a:latin typeface="Calibri"/>
-                        </a:rPr>
-                        <a:t>Integrar mão de obra, peças e tipo_contrato (RENTAL/LEASE) em etapa futura; contrato de manutenção já foi incorporado.</a:t>
-                      </a:r>
-                    </a:p>
-                  </a:txBody>
-                  <a:tcPr>
-                    <a:solidFill>
-                      <a:srgbClr val="EEEADE"/>
-                    </a:solidFill>
-                  </a:tcPr>
-                </a:tc>
-              </a:tr>
-            </a:tbl>
-          </a:graphicData>
-        </a:graphic>
-      </p:graphicFrame>
       <p:sp>
         <p:nvSpPr>
-          <p:cNvPr id="7" name="TextBox 6"/>
+          <p:cNvPr id="6" name="TextBox 5"/>
           <p:cNvSpPr txBox="1"/>
           <p:nvPr/>
         </p:nvSpPr>
         <p:spPr>
           <a:xfrm>
-            <a:off x="640080" y="5806440"/>
-            <a:ext cx="10972800" cy="548640"/>
+            <a:off x="822960" y="1536192"/>
+            <a:ext cx="10607040" cy="365760"/>
           </a:xfrm>
           <a:prstGeom prst="rect">
             <a:avLst/>
@@ -36498,13 +36352,665 @@
           <a:lstStyle/>
           <a:p>
             <a:r>
-              <a:rPr sz="1300" b="1">
+              <a:rPr sz="1200" b="0">
+                <a:solidFill>
+                  <a:srgbClr val="5B636E"/>
+                </a:solidFill>
+                <a:latin typeface="Calibri"/>
+              </a:rPr>
+              <a:t>O custo anual é o produto de duas quantidades: quantas ordens de serviço a carreta gera e quanto custa cada uma. Prevemos as duas.</a:t>
+            </a:r>
+          </a:p>
+        </p:txBody>
+      </p:sp>
+      <p:graphicFrame>
+        <p:nvGraphicFramePr>
+          <p:cNvPr id="7" name="Table 6"/>
+          <p:cNvGraphicFramePr>
+            <a:graphicFrameLocks noGrp="1"/>
+          </p:cNvGraphicFramePr>
+          <p:nvPr/>
+        </p:nvGraphicFramePr>
+        <p:xfrm>
+          <a:off x="822960" y="2057400"/>
+          <a:ext cx="10607040" cy="1234440"/>
+        </p:xfrm>
+        <a:graphic>
+          <a:graphicData uri="http://schemas.openxmlformats.org/drawingml/2006/table">
+            <a:tbl>
+              <a:tblPr firstRow="1" bandRow="1">
+                <a:tableStyleId>{5C22544A-7EE6-4342-B048-85BDC9FD1C3A}</a:tableStyleId>
+              </a:tblPr>
+              <a:tblGrid>
+                <a:gridCol w="3535680"/>
+                <a:gridCol w="3535680"/>
+                <a:gridCol w="3535680"/>
+              </a:tblGrid>
+              <a:tr h="411480">
+                <a:tc>
+                  <a:txBody>
+                    <a:bodyPr/>
+                    <a:lstStyle/>
+                    <a:p>
+                      <a:r>
+                        <a:rPr sz="1200" b="1">
+                          <a:solidFill>
+                            <a:srgbClr val="FFFFFF"/>
+                          </a:solidFill>
+                          <a:latin typeface="Calibri"/>
+                        </a:rPr>
+                        <a:t>alvo</a:t>
+                      </a:r>
+                    </a:p>
+                  </a:txBody>
+                  <a:tcPr>
+                    <a:solidFill>
+                      <a:srgbClr val="142B45"/>
+                    </a:solidFill>
+                  </a:tcPr>
+                </a:tc>
+                <a:tc>
+                  <a:txBody>
+                    <a:bodyPr/>
+                    <a:lstStyle/>
+                    <a:p>
+                      <a:r>
+                        <a:rPr sz="1200" b="1">
+                          <a:solidFill>
+                            <a:srgbClr val="FFFFFF"/>
+                          </a:solidFill>
+                          <a:latin typeface="Calibri"/>
+                        </a:rPr>
+                        <a:t>o que prevê</a:t>
+                      </a:r>
+                    </a:p>
+                  </a:txBody>
+                  <a:tcPr>
+                    <a:solidFill>
+                      <a:srgbClr val="142B45"/>
+                    </a:solidFill>
+                  </a:tcPr>
+                </a:tc>
+                <a:tc>
+                  <a:txBody>
+                    <a:bodyPr/>
+                    <a:lstStyle/>
+                    <a:p>
+                      <a:r>
+                        <a:rPr sz="1200" b="1">
+                          <a:solidFill>
+                            <a:srgbClr val="FFFFFF"/>
+                          </a:solidFill>
+                          <a:latin typeface="Calibri"/>
+                        </a:rPr>
+                        <a:t>para que serve</a:t>
+                      </a:r>
+                    </a:p>
+                  </a:txBody>
+                  <a:tcPr>
+                    <a:solidFill>
+                      <a:srgbClr val="142B45"/>
+                    </a:solidFill>
+                  </a:tcPr>
+                </a:tc>
+              </a:tr>
+              <a:tr h="411480">
+                <a:tc>
+                  <a:txBody>
+                    <a:bodyPr/>
+                    <a:lstStyle/>
+                    <a:p>
+                      <a:r>
+                        <a:rPr sz="1200">
+                          <a:solidFill>
+                            <a:srgbClr val="1C2433"/>
+                          </a:solidFill>
+                          <a:latin typeface="Calibri"/>
+                        </a:rPr>
+                        <a:t>Y1 · custo_ano_real</a:t>
+                      </a:r>
+                    </a:p>
+                  </a:txBody>
+                  <a:tcPr>
+                    <a:solidFill>
+                      <a:srgbClr val="FFFFFF"/>
+                    </a:solidFill>
+                  </a:tcPr>
+                </a:tc>
+                <a:tc>
+                  <a:txBody>
+                    <a:bodyPr/>
+                    <a:lstStyle/>
+                    <a:p>
+                      <a:r>
+                        <a:rPr sz="1200">
+                          <a:solidFill>
+                            <a:srgbClr val="1C2433"/>
+                          </a:solidFill>
+                          <a:latin typeface="Calibri"/>
+                        </a:rPr>
+                        <a:t>custo anual de manutenção por carreta (CAD real)</a:t>
+                      </a:r>
+                    </a:p>
+                  </a:txBody>
+                  <a:tcPr>
+                    <a:solidFill>
+                      <a:srgbClr val="FFFFFF"/>
+                    </a:solidFill>
+                  </a:tcPr>
+                </a:tc>
+                <a:tc>
+                  <a:txBody>
+                    <a:bodyPr/>
+                    <a:lstStyle/>
+                    <a:p>
+                      <a:r>
+                        <a:rPr sz="1200">
+                          <a:solidFill>
+                            <a:srgbClr val="1C2433"/>
+                          </a:solidFill>
+                          <a:latin typeface="Calibri"/>
+                        </a:rPr>
+                        <a:t>base do orçamento e da provisão da frota</a:t>
+                      </a:r>
+                    </a:p>
+                  </a:txBody>
+                  <a:tcPr>
+                    <a:solidFill>
+                      <a:srgbClr val="FFFFFF"/>
+                    </a:solidFill>
+                  </a:tcPr>
+                </a:tc>
+              </a:tr>
+              <a:tr h="411480">
+                <a:tc>
+                  <a:txBody>
+                    <a:bodyPr/>
+                    <a:lstStyle/>
+                    <a:p>
+                      <a:r>
+                        <a:rPr sz="1200">
+                          <a:solidFill>
+                            <a:srgbClr val="1C2433"/>
+                          </a:solidFill>
+                          <a:latin typeface="Calibri"/>
+                        </a:rPr>
+                        <a:t>Y2 · n_os_ano</a:t>
+                      </a:r>
+                    </a:p>
+                  </a:txBody>
+                  <a:tcPr>
+                    <a:solidFill>
+                      <a:srgbClr val="EEEADE"/>
+                    </a:solidFill>
+                  </a:tcPr>
+                </a:tc>
+                <a:tc>
+                  <a:txBody>
+                    <a:bodyPr/>
+                    <a:lstStyle/>
+                    <a:p>
+                      <a:r>
+                        <a:rPr sz="1200">
+                          <a:solidFill>
+                            <a:srgbClr val="1C2433"/>
+                          </a:solidFill>
+                          <a:latin typeface="Calibri"/>
+                        </a:rPr>
+                        <a:t>quantidade de ordens de serviço no ano</a:t>
+                      </a:r>
+                    </a:p>
+                  </a:txBody>
+                  <a:tcPr>
+                    <a:solidFill>
+                      <a:srgbClr val="EEEADE"/>
+                    </a:solidFill>
+                  </a:tcPr>
+                </a:tc>
+                <a:tc>
+                  <a:txBody>
+                    <a:bodyPr/>
+                    <a:lstStyle/>
+                    <a:p>
+                      <a:r>
+                        <a:rPr sz="1200">
+                          <a:solidFill>
+                            <a:srgbClr val="1C2433"/>
+                          </a:solidFill>
+                          <a:latin typeface="Calibri"/>
+                        </a:rPr>
+                        <a:t>capacidade de oficina; é o componente que mais move o custo</a:t>
+                      </a:r>
+                    </a:p>
+                  </a:txBody>
+                  <a:tcPr>
+                    <a:solidFill>
+                      <a:srgbClr val="EEEADE"/>
+                    </a:solidFill>
+                  </a:tcPr>
+                </a:tc>
+              </a:tr>
+            </a:tbl>
+          </a:graphicData>
+        </a:graphic>
+      </p:graphicFrame>
+      <p:sp>
+        <p:nvSpPr>
+          <p:cNvPr id="8" name="Rectangle 7"/>
+          <p:cNvSpPr/>
+          <p:nvPr/>
+        </p:nvSpPr>
+        <p:spPr>
+          <a:xfrm>
+            <a:off x="822960" y="3657600"/>
+            <a:ext cx="3200400" cy="1051560"/>
+          </a:xfrm>
+          <a:prstGeom prst="rect">
+            <a:avLst/>
+          </a:prstGeom>
+          <a:solidFill>
+            <a:srgbClr val="FFFFFF"/>
+          </a:solidFill>
+          <a:ln>
+            <a:solidFill>
+              <a:srgbClr val="142B45"/>
+            </a:solidFill>
+          </a:ln>
+          <a:effectLst/>
+        </p:spPr>
+        <p:style>
+          <a:lnRef idx="1">
+            <a:schemeClr val="accent1"/>
+          </a:lnRef>
+          <a:fillRef idx="3">
+            <a:schemeClr val="accent1"/>
+          </a:fillRef>
+          <a:effectRef idx="2">
+            <a:schemeClr val="accent1"/>
+          </a:effectRef>
+          <a:fontRef idx="minor">
+            <a:schemeClr val="lt1"/>
+          </a:fontRef>
+        </p:style>
+        <p:txBody>
+          <a:bodyPr rtlCol="0" anchor="ctr"/>
+          <a:lstStyle/>
+          <a:p>
+            <a:pPr algn="ctr"/>
+          </a:p>
+        </p:txBody>
+      </p:sp>
+      <p:sp>
+        <p:nvSpPr>
+          <p:cNvPr id="9" name="TextBox 8"/>
+          <p:cNvSpPr txBox="1"/>
+          <p:nvPr/>
+        </p:nvSpPr>
+        <p:spPr>
+          <a:xfrm>
+            <a:off x="1005840" y="3730752"/>
+            <a:ext cx="2834640" cy="411480"/>
+          </a:xfrm>
+          <a:prstGeom prst="rect">
+            <a:avLst/>
+          </a:prstGeom>
+          <a:noFill/>
+        </p:spPr>
+        <p:txBody>
+          <a:bodyPr wrap="square">
+            <a:spAutoFit/>
+          </a:bodyPr>
+          <a:lstStyle/>
+          <a:p>
+            <a:r>
+              <a:rPr sz="2200" b="1">
                 <a:solidFill>
                   <a:srgbClr val="142B45"/>
                 </a:solidFill>
                 <a:latin typeface="Calibri"/>
               </a:rPr>
-              <a:t>MAE = CAD 1.093/ano por carreta — é o erro MÉDIO, não um limite: metade dos casos erra menos e a cauda erra muito mais. Equivale a ~51% do custo médio do ano de teste (CAD 2.151).</a:t>
+              <a:t>0,4418</a:t>
+            </a:r>
+          </a:p>
+        </p:txBody>
+      </p:sp>
+      <p:sp>
+        <p:nvSpPr>
+          <p:cNvPr id="10" name="TextBox 9"/>
+          <p:cNvSpPr txBox="1"/>
+          <p:nvPr/>
+        </p:nvSpPr>
+        <p:spPr>
+          <a:xfrm>
+            <a:off x="1005840" y="4187952"/>
+            <a:ext cx="2834640" cy="274320"/>
+          </a:xfrm>
+          <a:prstGeom prst="rect">
+            <a:avLst/>
+          </a:prstGeom>
+          <a:noFill/>
+        </p:spPr>
+        <p:txBody>
+          <a:bodyPr wrap="square">
+            <a:spAutoFit/>
+          </a:bodyPr>
+          <a:lstStyle/>
+          <a:p>
+            <a:r>
+              <a:rPr sz="1100" b="0">
+                <a:solidFill>
+                  <a:srgbClr val="5B636E"/>
+                </a:solidFill>
+                <a:latin typeface="Calibri"/>
+              </a:rPr>
+              <a:t>Y1 · direto</a:t>
+            </a:r>
+          </a:p>
+        </p:txBody>
+      </p:sp>
+      <p:sp>
+        <p:nvSpPr>
+          <p:cNvPr id="11" name="Rectangle 10"/>
+          <p:cNvSpPr/>
+          <p:nvPr/>
+        </p:nvSpPr>
+        <p:spPr>
+          <a:xfrm>
+            <a:off x="4389120" y="3657600"/>
+            <a:ext cx="3200400" cy="1051560"/>
+          </a:xfrm>
+          <a:prstGeom prst="rect">
+            <a:avLst/>
+          </a:prstGeom>
+          <a:solidFill>
+            <a:srgbClr val="FFFFFF"/>
+          </a:solidFill>
+          <a:ln>
+            <a:solidFill>
+              <a:srgbClr val="142B45"/>
+            </a:solidFill>
+          </a:ln>
+          <a:effectLst/>
+        </p:spPr>
+        <p:style>
+          <a:lnRef idx="1">
+            <a:schemeClr val="accent1"/>
+          </a:lnRef>
+          <a:fillRef idx="3">
+            <a:schemeClr val="accent1"/>
+          </a:fillRef>
+          <a:effectRef idx="2">
+            <a:schemeClr val="accent1"/>
+          </a:effectRef>
+          <a:fontRef idx="minor">
+            <a:schemeClr val="lt1"/>
+          </a:fontRef>
+        </p:style>
+        <p:txBody>
+          <a:bodyPr rtlCol="0" anchor="ctr"/>
+          <a:lstStyle/>
+          <a:p>
+            <a:pPr algn="ctr"/>
+          </a:p>
+        </p:txBody>
+      </p:sp>
+      <p:sp>
+        <p:nvSpPr>
+          <p:cNvPr id="12" name="TextBox 11"/>
+          <p:cNvSpPr txBox="1"/>
+          <p:nvPr/>
+        </p:nvSpPr>
+        <p:spPr>
+          <a:xfrm>
+            <a:off x="4572000" y="3730752"/>
+            <a:ext cx="2834640" cy="411480"/>
+          </a:xfrm>
+          <a:prstGeom prst="rect">
+            <a:avLst/>
+          </a:prstGeom>
+          <a:noFill/>
+        </p:spPr>
+        <p:txBody>
+          <a:bodyPr wrap="square">
+            <a:spAutoFit/>
+          </a:bodyPr>
+          <a:lstStyle/>
+          <a:p>
+            <a:r>
+              <a:rPr sz="2200" b="1">
+                <a:solidFill>
+                  <a:srgbClr val="E8713A"/>
+                </a:solidFill>
+                <a:latin typeface="Calibri"/>
+              </a:rPr>
+              <a:t>0,4713</a:t>
+            </a:r>
+          </a:p>
+        </p:txBody>
+      </p:sp>
+      <p:sp>
+        <p:nvSpPr>
+          <p:cNvPr id="13" name="TextBox 12"/>
+          <p:cNvSpPr txBox="1"/>
+          <p:nvPr/>
+        </p:nvSpPr>
+        <p:spPr>
+          <a:xfrm>
+            <a:off x="4572000" y="4187952"/>
+            <a:ext cx="2834640" cy="274320"/>
+          </a:xfrm>
+          <a:prstGeom prst="rect">
+            <a:avLst/>
+          </a:prstGeom>
+          <a:noFill/>
+        </p:spPr>
+        <p:txBody>
+          <a:bodyPr wrap="square">
+            <a:spAutoFit/>
+          </a:bodyPr>
+          <a:lstStyle/>
+          <a:p>
+            <a:r>
+              <a:rPr sz="1100" b="0">
+                <a:solidFill>
+                  <a:srgbClr val="5B636E"/>
+                </a:solidFill>
+                <a:latin typeface="Calibri"/>
+              </a:rPr>
+              <a:t>Y1 · decomposto</a:t>
+            </a:r>
+          </a:p>
+        </p:txBody>
+      </p:sp>
+      <p:sp>
+        <p:nvSpPr>
+          <p:cNvPr id="14" name="Rectangle 13"/>
+          <p:cNvSpPr/>
+          <p:nvPr/>
+        </p:nvSpPr>
+        <p:spPr>
+          <a:xfrm>
+            <a:off x="7955279" y="3657600"/>
+            <a:ext cx="3200400" cy="1051560"/>
+          </a:xfrm>
+          <a:prstGeom prst="rect">
+            <a:avLst/>
+          </a:prstGeom>
+          <a:solidFill>
+            <a:srgbClr val="FFFFFF"/>
+          </a:solidFill>
+          <a:ln>
+            <a:solidFill>
+              <a:srgbClr val="142B45"/>
+            </a:solidFill>
+          </a:ln>
+          <a:effectLst/>
+        </p:spPr>
+        <p:style>
+          <a:lnRef idx="1">
+            <a:schemeClr val="accent1"/>
+          </a:lnRef>
+          <a:fillRef idx="3">
+            <a:schemeClr val="accent1"/>
+          </a:fillRef>
+          <a:effectRef idx="2">
+            <a:schemeClr val="accent1"/>
+          </a:effectRef>
+          <a:fontRef idx="minor">
+            <a:schemeClr val="lt1"/>
+          </a:fontRef>
+        </p:style>
+        <p:txBody>
+          <a:bodyPr rtlCol="0" anchor="ctr"/>
+          <a:lstStyle/>
+          <a:p>
+            <a:pPr algn="ctr"/>
+          </a:p>
+        </p:txBody>
+      </p:sp>
+      <p:sp>
+        <p:nvSpPr>
+          <p:cNvPr id="15" name="TextBox 14"/>
+          <p:cNvSpPr txBox="1"/>
+          <p:nvPr/>
+        </p:nvSpPr>
+        <p:spPr>
+          <a:xfrm>
+            <a:off x="8138159" y="3730752"/>
+            <a:ext cx="2834640" cy="411480"/>
+          </a:xfrm>
+          <a:prstGeom prst="rect">
+            <a:avLst/>
+          </a:prstGeom>
+          <a:noFill/>
+        </p:spPr>
+        <p:txBody>
+          <a:bodyPr wrap="square">
+            <a:spAutoFit/>
+          </a:bodyPr>
+          <a:lstStyle/>
+          <a:p>
+            <a:r>
+              <a:rPr sz="2200" b="1">
+                <a:solidFill>
+                  <a:srgbClr val="E8713A"/>
+                </a:solidFill>
+                <a:latin typeface="Calibri"/>
+              </a:rPr>
+              <a:t>0,6080</a:t>
+            </a:r>
+          </a:p>
+        </p:txBody>
+      </p:sp>
+      <p:sp>
+        <p:nvSpPr>
+          <p:cNvPr id="16" name="TextBox 15"/>
+          <p:cNvSpPr txBox="1"/>
+          <p:nvPr/>
+        </p:nvSpPr>
+        <p:spPr>
+          <a:xfrm>
+            <a:off x="8138159" y="4187952"/>
+            <a:ext cx="2834640" cy="274320"/>
+          </a:xfrm>
+          <a:prstGeom prst="rect">
+            <a:avLst/>
+          </a:prstGeom>
+          <a:noFill/>
+        </p:spPr>
+        <p:txBody>
+          <a:bodyPr wrap="square">
+            <a:spAutoFit/>
+          </a:bodyPr>
+          <a:lstStyle/>
+          <a:p>
+            <a:r>
+              <a:rPr sz="1100" b="0">
+                <a:solidFill>
+                  <a:srgbClr val="5B636E"/>
+                </a:solidFill>
+                <a:latin typeface="Calibri"/>
+              </a:rPr>
+              <a:t>Y2 · nº de OS</a:t>
+            </a:r>
+          </a:p>
+        </p:txBody>
+      </p:sp>
+      <p:sp>
+        <p:nvSpPr>
+          <p:cNvPr id="17" name="TextBox 16"/>
+          <p:cNvSpPr txBox="1"/>
+          <p:nvPr/>
+        </p:nvSpPr>
+        <p:spPr>
+          <a:xfrm>
+            <a:off x="822960" y="4983480"/>
+            <a:ext cx="10607040" cy="457200"/>
+          </a:xfrm>
+          <a:prstGeom prst="rect">
+            <a:avLst/>
+          </a:prstGeom>
+          <a:noFill/>
+        </p:spPr>
+        <p:txBody>
+          <a:bodyPr wrap="square">
+            <a:spAutoFit/>
+          </a:bodyPr>
+          <a:lstStyle/>
+          <a:p>
+            <a:r>
+              <a:rPr sz="1600" b="1">
+                <a:solidFill>
+                  <a:srgbClr val="142B45"/>
+                </a:solidFill>
+                <a:latin typeface="Calibri"/>
+              </a:rPr>
+              <a:t>Prever as partes e multiplicar supera prever o total direto: 0,4418 → 0,4713 de R².</a:t>
+            </a:r>
+          </a:p>
+        </p:txBody>
+      </p:sp>
+      <p:sp>
+        <p:nvSpPr>
+          <p:cNvPr id="18" name="TextBox 17"/>
+          <p:cNvSpPr txBox="1"/>
+          <p:nvPr/>
+        </p:nvSpPr>
+        <p:spPr>
+          <a:xfrm>
+            <a:off x="822960" y="5532120"/>
+            <a:ext cx="10607040" cy="822960"/>
+          </a:xfrm>
+          <a:prstGeom prst="rect">
+            <a:avLst/>
+          </a:prstGeom>
+          <a:noFill/>
+        </p:spPr>
+        <p:txBody>
+          <a:bodyPr wrap="square">
+            <a:spAutoFit/>
+          </a:bodyPr>
+          <a:lstStyle/>
+          <a:p>
+            <a:r>
+              <a:rPr sz="1200" b="0">
+                <a:solidFill>
+                  <a:srgbClr val="5B636E"/>
+                </a:solidFill>
+                <a:latin typeface="Calibri"/>
+              </a:rPr>
+              <a:t>Y1 = nº de OS × custo médio por OS é identidade EXATA na base (diferença máxima de 0,00 CAD em 47.715 linhas).</a:t>
+            </a:r>
+          </a:p>
+          <a:p>
+            <a:r>
+              <a:rPr sz="1200" b="0">
+                <a:solidFill>
+                  <a:srgbClr val="5B636E"/>
+                </a:solidFill>
+                <a:latin typeface="Calibri"/>
+              </a:rPr>
+              <a:t>Por isso os componentes não entram como variáveis explicativas de Y1 — usá-los seria a conta de volta, com R² = 1,0. Eles são previstos a partir do histórico e multiplicados.</a:t>
             </a:r>
           </a:p>
         </p:txBody>
@@ -37021,7 +37527,7 @@
                 </a:solidFill>
                 <a:latin typeface="Calibri"/>
               </a:rPr>
-              <a:t>ITEM 16 · CONCLUSÕES</a:t>
+              <a:t>ITEM 13 · IMPLICAÇÕES GERENCIAIS</a:t>
             </a:r>
           </a:p>
         </p:txBody>
@@ -37055,55 +37561,451 @@
                 </a:solidFill>
                 <a:latin typeface="Calibri"/>
               </a:rPr>
-              <a:t>Resposta à pergunta de pesquisa</a:t>
+              <a:t>O que a empresa faz com estes resultados</a:t>
             </a:r>
           </a:p>
         </p:txBody>
       </p:sp>
-      <p:sp>
-        <p:nvSpPr>
-          <p:cNvPr id="6" name="Rectangle 5"/>
-          <p:cNvSpPr/>
+      <p:graphicFrame>
+        <p:nvGraphicFramePr>
+          <p:cNvPr id="6" name="Table 5"/>
+          <p:cNvGraphicFramePr>
+            <a:graphicFrameLocks noGrp="1"/>
+          </p:cNvGraphicFramePr>
           <p:nvPr/>
-        </p:nvSpPr>
-        <p:spPr>
-          <a:xfrm>
-            <a:off x="822960" y="1645920"/>
-            <a:ext cx="10515600" cy="1325880"/>
-          </a:xfrm>
-          <a:prstGeom prst="rect">
-            <a:avLst/>
-          </a:prstGeom>
-          <a:solidFill>
-            <a:srgbClr val="142B45"/>
-          </a:solidFill>
-          <a:ln>
-            <a:noFill/>
-          </a:ln>
-          <a:effectLst/>
-        </p:spPr>
-        <p:style>
-          <a:lnRef idx="1">
-            <a:schemeClr val="accent1"/>
-          </a:lnRef>
-          <a:fillRef idx="3">
-            <a:schemeClr val="accent1"/>
-          </a:fillRef>
-          <a:effectRef idx="2">
-            <a:schemeClr val="accent1"/>
-          </a:effectRef>
-          <a:fontRef idx="minor">
-            <a:schemeClr val="lt1"/>
-          </a:fontRef>
-        </p:style>
-        <p:txBody>
-          <a:bodyPr rtlCol="0" anchor="ctr"/>
-          <a:lstStyle/>
-          <a:p>
-            <a:pPr algn="ctr"/>
-          </a:p>
-        </p:txBody>
-      </p:sp>
+        </p:nvGraphicFramePr>
+        <p:xfrm>
+          <a:off x="640080" y="1737360"/>
+          <a:ext cx="10972800" cy="3840480"/>
+        </p:xfrm>
+        <a:graphic>
+          <a:graphicData uri="http://schemas.openxmlformats.org/drawingml/2006/table">
+            <a:tbl>
+              <a:tblPr firstRow="1" bandRow="1">
+                <a:tableStyleId>{5C22544A-7EE6-4342-B048-85BDC9FD1C3A}</a:tableStyleId>
+              </a:tblPr>
+              <a:tblGrid>
+                <a:gridCol w="5486400"/>
+                <a:gridCol w="5486400"/>
+              </a:tblGrid>
+              <a:tr h="426720">
+                <a:tc>
+                  <a:txBody>
+                    <a:bodyPr/>
+                    <a:lstStyle/>
+                    <a:p>
+                      <a:r>
+                        <a:rPr sz="1000" b="1">
+                          <a:solidFill>
+                            <a:srgbClr val="FFFFFF"/>
+                          </a:solidFill>
+                          <a:latin typeface="Calibri"/>
+                        </a:rPr>
+                        <a:t>tema</a:t>
+                      </a:r>
+                    </a:p>
+                  </a:txBody>
+                  <a:tcPr>
+                    <a:solidFill>
+                      <a:srgbClr val="142B45"/>
+                    </a:solidFill>
+                  </a:tcPr>
+                </a:tc>
+                <a:tc>
+                  <a:txBody>
+                    <a:bodyPr/>
+                    <a:lstStyle/>
+                    <a:p>
+                      <a:r>
+                        <a:rPr sz="1000" b="1">
+                          <a:solidFill>
+                            <a:srgbClr val="FFFFFF"/>
+                          </a:solidFill>
+                          <a:latin typeface="Calibri"/>
+                        </a:rPr>
+                        <a:t>recomendação</a:t>
+                      </a:r>
+                    </a:p>
+                  </a:txBody>
+                  <a:tcPr>
+                    <a:solidFill>
+                      <a:srgbClr val="142B45"/>
+                    </a:solidFill>
+                  </a:tcPr>
+                </a:tc>
+              </a:tr>
+              <a:tr h="426720">
+                <a:tc>
+                  <a:txBody>
+                    <a:bodyPr/>
+                    <a:lstStyle/>
+                    <a:p>
+                      <a:r>
+                        <a:rPr sz="1000">
+                          <a:solidFill>
+                            <a:srgbClr val="1C2433"/>
+                          </a:solidFill>
+                          <a:latin typeface="Calibri"/>
+                        </a:rPr>
+                        <a:t>Orçamento</a:t>
+                      </a:r>
+                    </a:p>
+                  </a:txBody>
+                  <a:tcPr>
+                    <a:solidFill>
+                      <a:srgbClr val="FFFFFF"/>
+                    </a:solidFill>
+                  </a:tcPr>
+                </a:tc>
+                <a:tc>
+                  <a:txBody>
+                    <a:bodyPr/>
+                    <a:lstStyle/>
+                    <a:p>
+                      <a:r>
+                        <a:rPr sz="1000">
+                          <a:solidFill>
+                            <a:srgbClr val="1C2433"/>
+                          </a:solidFill>
+                          <a:latin typeface="Calibri"/>
+                        </a:rPr>
+                        <a:t>Usar o custo anual real por carreta como base de orçamento; projetar com o modelo preditivo (histórico defasado + atributos).</a:t>
+                      </a:r>
+                    </a:p>
+                  </a:txBody>
+                  <a:tcPr>
+                    <a:solidFill>
+                      <a:srgbClr val="FFFFFF"/>
+                    </a:solidFill>
+                  </a:tcPr>
+                </a:tc>
+              </a:tr>
+              <a:tr h="426720">
+                <a:tc>
+                  <a:txBody>
+                    <a:bodyPr/>
+                    <a:lstStyle/>
+                    <a:p>
+                      <a:r>
+                        <a:rPr sz="1000">
+                          <a:solidFill>
+                            <a:srgbClr val="1C2433"/>
+                          </a:solidFill>
+                          <a:latin typeface="Calibri"/>
+                        </a:rPr>
+                        <a:t>Priorização de frota</a:t>
+                      </a:r>
+                    </a:p>
+                  </a:txBody>
+                  <a:tcPr>
+                    <a:solidFill>
+                      <a:srgbClr val="EEEADE"/>
+                    </a:solidFill>
+                  </a:tcPr>
+                </a:tc>
+                <a:tc>
+                  <a:txBody>
+                    <a:bodyPr/>
+                    <a:lstStyle/>
+                    <a:p>
+                      <a:r>
+                        <a:rPr sz="1000">
+                          <a:solidFill>
+                            <a:srgbClr val="1C2433"/>
+                          </a:solidFill>
+                          <a:latin typeface="Calibri"/>
+                        </a:rPr>
+                        <a:t>Priorizar carretas com alto custo/OS no ano anterior e histórico acumulado elevado (fatores de maior importância).</a:t>
+                      </a:r>
+                    </a:p>
+                  </a:txBody>
+                  <a:tcPr>
+                    <a:solidFill>
+                      <a:srgbClr val="EEEADE"/>
+                    </a:solidFill>
+                  </a:tcPr>
+                </a:tc>
+              </a:tr>
+              <a:tr h="426720">
+                <a:tc>
+                  <a:txBody>
+                    <a:bodyPr/>
+                    <a:lstStyle/>
+                    <a:p>
+                      <a:r>
+                        <a:rPr sz="1000">
+                          <a:solidFill>
+                            <a:srgbClr val="1C2433"/>
+                          </a:solidFill>
+                          <a:latin typeface="Calibri"/>
+                        </a:rPr>
+                        <a:t>Perfil de ativo</a:t>
+                      </a:r>
+                    </a:p>
+                  </a:txBody>
+                  <a:tcPr>
+                    <a:solidFill>
+                      <a:srgbClr val="FFFFFF"/>
+                    </a:solidFill>
+                  </a:tcPr>
+                </a:tc>
+                <a:tc>
+                  <a:txBody>
+                    <a:bodyPr/>
+                    <a:lstStyle/>
+                    <a:p>
+                      <a:r>
+                        <a:rPr sz="1000">
+                          <a:solidFill>
+                            <a:srgbClr val="1C2433"/>
+                          </a:solidFill>
+                          <a:latin typeface="Calibri"/>
+                        </a:rPr>
+                        <a:t>Monitorar subtipos e refrigeradas, que concentram custos anuais mais altos (maior eta).</a:t>
+                      </a:r>
+                    </a:p>
+                  </a:txBody>
+                  <a:tcPr>
+                    <a:solidFill>
+                      <a:srgbClr val="FFFFFF"/>
+                    </a:solidFill>
+                  </a:tcPr>
+                </a:tc>
+              </a:tr>
+              <a:tr h="426720">
+                <a:tc>
+                  <a:txBody>
+                    <a:bodyPr/>
+                    <a:lstStyle/>
+                    <a:p>
+                      <a:r>
+                        <a:rPr sz="1000">
+                          <a:solidFill>
+                            <a:srgbClr val="1C2433"/>
+                          </a:solidFill>
+                          <a:latin typeface="Calibri"/>
+                        </a:rPr>
+                        <a:t>Uso</a:t>
+                      </a:r>
+                    </a:p>
+                  </a:txBody>
+                  <a:tcPr>
+                    <a:solidFill>
+                      <a:srgbClr val="EEEADE"/>
+                    </a:solidFill>
+                  </a:tcPr>
+                </a:tc>
+                <a:tc>
+                  <a:txBody>
+                    <a:bodyPr/>
+                    <a:lstStyle/>
+                    <a:p>
+                      <a:r>
+                        <a:rPr sz="1000">
+                          <a:solidFill>
+                            <a:srgbClr val="1C2433"/>
+                          </a:solidFill>
+                          <a:latin typeface="Calibri"/>
+                        </a:rPr>
+                        <a:t>Incorporar quilometragem esperada ao planejamento: o uso é um dos maiores associados ao custo anual.</a:t>
+                      </a:r>
+                    </a:p>
+                  </a:txBody>
+                  <a:tcPr>
+                    <a:solidFill>
+                      <a:srgbClr val="EEEADE"/>
+                    </a:solidFill>
+                  </a:tcPr>
+                </a:tc>
+              </a:tr>
+              <a:tr h="426720">
+                <a:tc>
+                  <a:txBody>
+                    <a:bodyPr/>
+                    <a:lstStyle/>
+                    <a:p>
+                      <a:r>
+                        <a:rPr sz="1000">
+                          <a:solidFill>
+                            <a:srgbClr val="1C2433"/>
+                          </a:solidFill>
+                          <a:latin typeface="Calibri"/>
+                        </a:rPr>
+                        <a:t>Contrato</a:t>
+                      </a:r>
+                    </a:p>
+                  </a:txBody>
+                  <a:tcPr>
+                    <a:solidFill>
+                      <a:srgbClr val="FFFFFF"/>
+                    </a:solidFill>
+                  </a:tcPr>
+                </a:tc>
+                <a:tc>
+                  <a:txBody>
+                    <a:bodyPr/>
+                    <a:lstStyle/>
+                    <a:p>
+                      <a:r>
+                        <a:rPr sz="1000">
+                          <a:solidFill>
+                            <a:srgbClr val="1C2433"/>
+                          </a:solidFill>
+                          <a:latin typeface="Calibri"/>
+                        </a:rPr>
+                        <a:t>População de análise passa a ser a frota completa (D7, 2026-09-02): restringir a MAINT alterou o R² preditivo em apenas +0.0017, e a base completa permite testar o efeito do regime contratual dentro do modelo. Efeito das variáveis de contrato sobre o poder preditivo: +0.0359 de R² — usar como insumo de precificação apenas na medida desse ganho.</a:t>
+                      </a:r>
+                    </a:p>
+                  </a:txBody>
+                  <a:tcPr>
+                    <a:solidFill>
+                      <a:srgbClr val="FFFFFF"/>
+                    </a:solidFill>
+                  </a:tcPr>
+                </a:tc>
+              </a:tr>
+              <a:tr h="426720">
+                <a:tc>
+                  <a:txBody>
+                    <a:bodyPr/>
+                    <a:lstStyle/>
+                    <a:p>
+                      <a:r>
+                        <a:rPr sz="1000">
+                          <a:solidFill>
+                            <a:srgbClr val="1C2433"/>
+                          </a:solidFill>
+                          <a:latin typeface="Calibri"/>
+                        </a:rPr>
+                        <a:t>Previsão 2026</a:t>
+                      </a:r>
+                    </a:p>
+                  </a:txBody>
+                  <a:tcPr>
+                    <a:solidFill>
+                      <a:srgbClr val="EEEADE"/>
+                    </a:solidFill>
+                  </a:tcPr>
+                </a:tc>
+                <a:tc>
+                  <a:txBody>
+                    <a:bodyPr/>
+                    <a:lstStyle/>
+                    <a:p>
+                      <a:r>
+                        <a:rPr sz="1000">
+                          <a:solidFill>
+                            <a:srgbClr val="1C2433"/>
+                          </a:solidFill>
+                          <a:latin typeface="Calibri"/>
+                        </a:rPr>
+                        <a:t>Prever o custo por dois caminhos e usar o de menor erro: direto (Y1) ou decomposto (Y1 = nº de OS x custo médio por OS). Diferença medida no teste de 2025: +0.0295 de R² a favor do decomposto.</a:t>
+                      </a:r>
+                    </a:p>
+                  </a:txBody>
+                  <a:tcPr>
+                    <a:solidFill>
+                      <a:srgbClr val="EEEADE"/>
+                    </a:solidFill>
+                  </a:tcPr>
+                </a:tc>
+              </a:tr>
+              <a:tr h="426720">
+                <a:tc>
+                  <a:txBody>
+                    <a:bodyPr/>
+                    <a:lstStyle/>
+                    <a:p>
+                      <a:r>
+                        <a:rPr sz="1000">
+                          <a:solidFill>
+                            <a:srgbClr val="1C2433"/>
+                          </a:solidFill>
+                          <a:latin typeface="Calibri"/>
+                        </a:rPr>
+                        <a:t>Idade e contrato</a:t>
+                      </a:r>
+                    </a:p>
+                  </a:txBody>
+                  <a:tcPr>
+                    <a:solidFill>
+                      <a:srgbClr val="FFFFFF"/>
+                    </a:solidFill>
+                  </a:tcPr>
+                </a:tc>
+                <a:tc>
+                  <a:txBody>
+                    <a:bodyPr/>
+                    <a:lstStyle/>
+                    <a:p>
+                      <a:r>
+                        <a:rPr sz="1000">
+                          <a:solidFill>
+                            <a:srgbClr val="1C2433"/>
+                          </a:solidFill>
+                          <a:latin typeface="Calibri"/>
+                        </a:rPr>
+                        <a:t>Não usar idade da carreta nem tempo de contrato como critério de orçamento: medidos na base completa, quase não ordenam o custo anual (Spearman 0,03 e 0,12). O que ordena é histórico e uso.</a:t>
+                      </a:r>
+                    </a:p>
+                  </a:txBody>
+                  <a:tcPr>
+                    <a:solidFill>
+                      <a:srgbClr val="FFFFFF"/>
+                    </a:solidFill>
+                  </a:tcPr>
+                </a:tc>
+              </a:tr>
+              <a:tr h="426720">
+                <a:tc>
+                  <a:txBody>
+                    <a:bodyPr/>
+                    <a:lstStyle/>
+                    <a:p>
+                      <a:r>
+                        <a:rPr sz="1000">
+                          <a:solidFill>
+                            <a:srgbClr val="1C2433"/>
+                          </a:solidFill>
+                          <a:latin typeface="Calibri"/>
+                        </a:rPr>
+                        <a:t>Dados</a:t>
+                      </a:r>
+                    </a:p>
+                  </a:txBody>
+                  <a:tcPr>
+                    <a:solidFill>
+                      <a:srgbClr val="EEEADE"/>
+                    </a:solidFill>
+                  </a:tcPr>
+                </a:tc>
+                <a:tc>
+                  <a:txBody>
+                    <a:bodyPr/>
+                    <a:lstStyle/>
+                    <a:p>
+                      <a:r>
+                        <a:rPr sz="1000">
+                          <a:solidFill>
+                            <a:srgbClr val="1C2433"/>
+                          </a:solidFill>
+                          <a:latin typeface="Calibri"/>
+                        </a:rPr>
+                        <a:t>Integrar mão de obra, peças e tipo_contrato (RENTAL/LEASE) em etapa futura; contrato de manutenção já foi incorporado.</a:t>
+                      </a:r>
+                    </a:p>
+                  </a:txBody>
+                  <a:tcPr>
+                    <a:solidFill>
+                      <a:srgbClr val="EEEADE"/>
+                    </a:solidFill>
+                  </a:tcPr>
+                </a:tc>
+              </a:tr>
+            </a:tbl>
+          </a:graphicData>
+        </a:graphic>
+      </p:graphicFrame>
       <p:sp>
         <p:nvSpPr>
           <p:cNvPr id="7" name="TextBox 6"/>
@@ -37112,8 +38014,8 @@
         </p:nvSpPr>
         <p:spPr>
           <a:xfrm>
-            <a:off x="1097280" y="1783080"/>
-            <a:ext cx="10058400" cy="1143000"/>
+            <a:off x="640080" y="5806440"/>
+            <a:ext cx="10972800" cy="548640"/>
           </a:xfrm>
           <a:prstGeom prst="rect">
             <a:avLst/>
@@ -37127,127 +38029,13 @@
           <a:lstStyle/>
           <a:p>
             <a:r>
-              <a:rPr sz="1600" b="1">
-                <a:solidFill>
-                  <a:srgbClr val="FFFFFF"/>
-                </a:solidFill>
-                <a:latin typeface="Calibri"/>
-              </a:rPr>
-              <a:t>O custo anual real por carreta é explicado sobretudo por REFRIGERAÇÃO, HISTÓRICO DE MANUTENÇÃO e USO.</a:t>
-            </a:r>
-          </a:p>
-          <a:p>
-            <a:r>
-              <a:rPr sz="1600" b="1">
-                <a:solidFill>
-                  <a:srgbClr val="FFFFFF"/>
-                </a:solidFill>
-                <a:latin typeface="Calibri"/>
-              </a:rPr>
-              <a:t>O modelo gradient_boosting estima o custo do ano seguinte com R² = 0.4549 e erro médio de CAD $ 1092.7/ano.</a:t>
-            </a:r>
-          </a:p>
-        </p:txBody>
-      </p:sp>
-      <p:sp>
-        <p:nvSpPr>
-          <p:cNvPr id="8" name="TextBox 7"/>
-          <p:cNvSpPr txBox="1"/>
-          <p:nvPr/>
-        </p:nvSpPr>
-        <p:spPr>
-          <a:xfrm>
-            <a:off x="822960" y="3200400"/>
-            <a:ext cx="10607040" cy="3017520"/>
-          </a:xfrm>
-          <a:prstGeom prst="rect">
-            <a:avLst/>
-          </a:prstGeom>
-          <a:noFill/>
-        </p:spPr>
-        <p:txBody>
-          <a:bodyPr wrap="square">
-            <a:spAutoFit/>
-          </a:bodyPr>
-          <a:lstStyle/>
-          <a:p>
-            <a:pPr>
-              <a:spcAft>
-                <a:spcPts val="700"/>
-              </a:spcAft>
-            </a:pPr>
-            <a:r>
-              <a:rPr sz="1400">
-                <a:solidFill>
-                  <a:srgbClr val="1C2433"/>
-                </a:solidFill>
-                <a:latin typeface="Calibri"/>
-              </a:rPr>
-              <a:t>•  O grão anual reduziu a zero-inflação a 3.13%, deixando-a residual para a modelagem.</a:t>
-            </a:r>
-          </a:p>
-          <a:p>
-            <a:pPr>
-              <a:spcAft>
-                <a:spcPts val="700"/>
-              </a:spcAft>
-            </a:pPr>
-            <a:r>
-              <a:rPr sz="1400">
-                <a:solidFill>
-                  <a:srgbClr val="1C2433"/>
-                </a:solidFill>
-                <a:latin typeface="Calibri"/>
-              </a:rPr>
-              <a:t>•  A idade, isoladamente, tem associação fraca com o custo (ρ = 0,03) e baixa importância no modelo. Não testamos se o efeito da idade é mediado por histórico e uso — é hipótese, não resultado.</a:t>
-            </a:r>
-          </a:p>
-          <a:p>
-            <a:pPr>
-              <a:spcAft>
-                <a:spcPts val="700"/>
-              </a:spcAft>
-            </a:pPr>
-            <a:r>
-              <a:rPr sz="1400">
-                <a:solidFill>
-                  <a:srgbClr val="1C2433"/>
-                </a:solidFill>
-                <a:latin typeface="Calibri"/>
-              </a:rPr>
-              <a:t>•  As variáveis de contrato, incorporadas nesta fase, mostraram efeito fraco — hipótese testada, não assumida.</a:t>
-            </a:r>
-          </a:p>
-          <a:p>
-            <a:pPr>
-              <a:spcAft>
-                <a:spcPts val="700"/>
-              </a:spcAft>
-            </a:pPr>
-            <a:r>
-              <a:rPr sz="1400">
-                <a:solidFill>
-                  <a:srgbClr val="1C2433"/>
-                </a:solidFill>
-                <a:latin typeface="Calibri"/>
-              </a:rPr>
-              <a:t>•  O contrato serviu principalmente para DEFINIR a população de análise (MAINT), não para prever o custo.</a:t>
-            </a:r>
-          </a:p>
-          <a:p>
-            <a:pPr>
-              <a:spcAft>
-                <a:spcPts val="700"/>
-              </a:spcAft>
-            </a:pPr>
-            <a:r>
-              <a:rPr sz="1400">
-                <a:solidFill>
-                  <a:srgbClr val="1C2433"/>
-                </a:solidFill>
-                <a:latin typeface="Calibri"/>
-              </a:rPr>
-              <a:t>•  O erro médio (MAE) é de CAD 1.093/ano, cerca de 51% do custo médio do ano de teste: o modelo serve para PRIORIZAR carretas e para provisionar no agregado da frota, não para estimar o valor de um ativo isolado.</a:t>
+              <a:rPr sz="1300" b="1">
+                <a:solidFill>
+                  <a:srgbClr val="142B45"/>
+                </a:solidFill>
+                <a:latin typeface="Calibri"/>
+              </a:rPr>
+              <a:t>Erro médio do modelo recomendado (Y1 decomposto): CAD $ 1059/ano por carreta — margem a declarar ao usar a estimativa em orçamento.</a:t>
             </a:r>
           </a:p>
         </p:txBody>
@@ -37387,7 +38175,7 @@
                 </a:solidFill>
                 <a:latin typeface="Calibri"/>
               </a:rPr>
-              <a:t>FASE 2 · O QUE MUDOU</a:t>
+              <a:t>ITEM 16 · CONCLUSÕES</a:t>
             </a:r>
           </a:p>
         </p:txBody>
@@ -37421,21 +38209,65 @@
                 </a:solidFill>
                 <a:latin typeface="Calibri"/>
               </a:rPr>
-              <a:t>Linha do tempo desde a apresentação de agosto</a:t>
+              <a:t>Resposta à pergunta de pesquisa</a:t>
             </a:r>
           </a:p>
         </p:txBody>
       </p:sp>
       <p:sp>
         <p:nvSpPr>
-          <p:cNvPr id="6" name="TextBox 5"/>
+          <p:cNvPr id="6" name="Rectangle 5"/>
+          <p:cNvSpPr/>
+          <p:nvPr/>
+        </p:nvSpPr>
+        <p:spPr>
+          <a:xfrm>
+            <a:off x="822960" y="1645920"/>
+            <a:ext cx="10515600" cy="1325880"/>
+          </a:xfrm>
+          <a:prstGeom prst="rect">
+            <a:avLst/>
+          </a:prstGeom>
+          <a:solidFill>
+            <a:srgbClr val="142B45"/>
+          </a:solidFill>
+          <a:ln>
+            <a:noFill/>
+          </a:ln>
+          <a:effectLst/>
+        </p:spPr>
+        <p:style>
+          <a:lnRef idx="1">
+            <a:schemeClr val="accent1"/>
+          </a:lnRef>
+          <a:fillRef idx="3">
+            <a:schemeClr val="accent1"/>
+          </a:fillRef>
+          <a:effectRef idx="2">
+            <a:schemeClr val="accent1"/>
+          </a:effectRef>
+          <a:fontRef idx="minor">
+            <a:schemeClr val="lt1"/>
+          </a:fontRef>
+        </p:style>
+        <p:txBody>
+          <a:bodyPr rtlCol="0" anchor="ctr"/>
+          <a:lstStyle/>
+          <a:p>
+            <a:pPr algn="ctr"/>
+          </a:p>
+        </p:txBody>
+      </p:sp>
+      <p:sp>
+        <p:nvSpPr>
+          <p:cNvPr id="7" name="TextBox 6"/>
           <p:cNvSpPr txBox="1"/>
           <p:nvPr/>
         </p:nvSpPr>
         <p:spPr>
           <a:xfrm>
-            <a:off x="822960" y="1536192"/>
-            <a:ext cx="10607040" cy="365760"/>
+            <a:off x="1097280" y="1783080"/>
+            <a:ext cx="10058400" cy="1143000"/>
           </a:xfrm>
           <a:prstGeom prst="rect">
             <a:avLst/>
@@ -37449,452 +38281,28 @@
           <a:lstStyle/>
           <a:p>
             <a:r>
-              <a:rPr sz="1200" b="0">
-                <a:solidFill>
-                  <a:srgbClr val="5B636E"/>
-                </a:solidFill>
-                <a:latin typeface="Calibri"/>
-              </a:rPr>
-              <a:t>A Fase 1 encerrou na seleção de variáveis, com a modelagem marcada como Fase 2. Um dado novo mudou o que era possível testar.</a:t>
+              <a:rPr sz="1600" b="1">
+                <a:solidFill>
+                  <a:srgbClr val="FFFFFF"/>
+                </a:solidFill>
+                <a:latin typeface="Calibri"/>
+              </a:rPr>
+              <a:t>O custo anual real por carreta é explicado sobretudo por REFRIGERAÇÃO, HISTÓRICO DE MANUTENÇÃO e USO.</a:t>
+            </a:r>
+          </a:p>
+          <a:p>
+            <a:r>
+              <a:rPr sz="1600" b="1">
+                <a:solidFill>
+                  <a:srgbClr val="FFFFFF"/>
+                </a:solidFill>
+                <a:latin typeface="Calibri"/>
+              </a:rPr>
+              <a:t>Prevemos Y1 (custo anual) com R² = 0,4713 e erro médio de CAD $ 1059/ano, e Y2 (nº de OS no ano) com R² = 0,6080.</a:t>
             </a:r>
           </a:p>
         </p:txBody>
       </p:sp>
-      <p:graphicFrame>
-        <p:nvGraphicFramePr>
-          <p:cNvPr id="7" name="Table 6"/>
-          <p:cNvGraphicFramePr>
-            <a:graphicFrameLocks noGrp="1"/>
-          </p:cNvGraphicFramePr>
-          <p:nvPr/>
-        </p:nvGraphicFramePr>
-        <p:xfrm>
-          <a:off x="640080" y="2011680"/>
-          <a:ext cx="10972800" cy="2468880"/>
-        </p:xfrm>
-        <a:graphic>
-          <a:graphicData uri="http://schemas.openxmlformats.org/drawingml/2006/table">
-            <a:tbl>
-              <a:tblPr firstRow="1" bandRow="1">
-                <a:tableStyleId>{5C22544A-7EE6-4342-B048-85BDC9FD1C3A}</a:tableStyleId>
-              </a:tblPr>
-              <a:tblGrid>
-                <a:gridCol w="3657600"/>
-                <a:gridCol w="3657600"/>
-                <a:gridCol w="3657600"/>
-              </a:tblGrid>
-              <a:tr h="411480">
-                <a:tc>
-                  <a:txBody>
-                    <a:bodyPr/>
-                    <a:lstStyle/>
-                    <a:p>
-                      <a:r>
-                        <a:rPr sz="1100" b="1">
-                          <a:solidFill>
-                            <a:srgbClr val="FFFFFF"/>
-                          </a:solidFill>
-                          <a:latin typeface="Calibri"/>
-                        </a:rPr>
-                        <a:t>quando</a:t>
-                      </a:r>
-                    </a:p>
-                  </a:txBody>
-                  <a:tcPr>
-                    <a:solidFill>
-                      <a:srgbClr val="142B45"/>
-                    </a:solidFill>
-                  </a:tcPr>
-                </a:tc>
-                <a:tc>
-                  <a:txBody>
-                    <a:bodyPr/>
-                    <a:lstStyle/>
-                    <a:p>
-                      <a:r>
-                        <a:rPr sz="1100" b="1">
-                          <a:solidFill>
-                            <a:srgbClr val="FFFFFF"/>
-                          </a:solidFill>
-                          <a:latin typeface="Calibri"/>
-                        </a:rPr>
-                        <a:t>o que aconteceu</a:t>
-                      </a:r>
-                    </a:p>
-                  </a:txBody>
-                  <a:tcPr>
-                    <a:solidFill>
-                      <a:srgbClr val="142B45"/>
-                    </a:solidFill>
-                  </a:tcPr>
-                </a:tc>
-                <a:tc>
-                  <a:txBody>
-                    <a:bodyPr/>
-                    <a:lstStyle/>
-                    <a:p>
-                      <a:r>
-                        <a:rPr sz="1100" b="1">
-                          <a:solidFill>
-                            <a:srgbClr val="FFFFFF"/>
-                          </a:solidFill>
-                          <a:latin typeface="Calibri"/>
-                        </a:rPr>
-                        <a:t>situação</a:t>
-                      </a:r>
-                    </a:p>
-                  </a:txBody>
-                  <a:tcPr>
-                    <a:solidFill>
-                      <a:srgbClr val="142B45"/>
-                    </a:solidFill>
-                  </a:tcPr>
-                </a:tc>
-              </a:tr>
-              <a:tr h="411480">
-                <a:tc>
-                  <a:txBody>
-                    <a:bodyPr/>
-                    <a:lstStyle/>
-                    <a:p>
-                      <a:r>
-                        <a:rPr sz="1100">
-                          <a:solidFill>
-                            <a:srgbClr val="1C2433"/>
-                          </a:solidFill>
-                          <a:latin typeface="Calibri"/>
-                        </a:rPr>
-                        <a:t>05/ago</a:t>
-                      </a:r>
-                    </a:p>
-                  </a:txBody>
-                  <a:tcPr>
-                    <a:solidFill>
-                      <a:srgbClr val="FFFFFF"/>
-                    </a:solidFill>
-                  </a:tcPr>
-                </a:tc>
-                <a:tc>
-                  <a:txBody>
-                    <a:bodyPr/>
-                    <a:lstStyle/>
-                    <a:p>
-                      <a:r>
-                        <a:rPr sz="1100">
-                          <a:solidFill>
-                            <a:srgbClr val="1C2433"/>
-                          </a:solidFill>
-                          <a:latin typeface="Calibri"/>
-                        </a:rPr>
-                        <a:t>Apresentação da Fase 1 (28 slides)</a:t>
-                      </a:r>
-                    </a:p>
-                  </a:txBody>
-                  <a:tcPr>
-                    <a:solidFill>
-                      <a:srgbClr val="FFFFFF"/>
-                    </a:solidFill>
-                  </a:tcPr>
-                </a:tc>
-                <a:tc>
-                  <a:txBody>
-                    <a:bodyPr/>
-                    <a:lstStyle/>
-                    <a:p>
-                      <a:r>
-                        <a:rPr sz="1100">
-                          <a:solidFill>
-                            <a:srgbClr val="1C2433"/>
-                          </a:solidFill>
-                          <a:latin typeface="Calibri"/>
-                        </a:rPr>
-                        <a:t>H6 declarada, sem dados; Gate 4 em aberto</a:t>
-                      </a:r>
-                    </a:p>
-                  </a:txBody>
-                  <a:tcPr>
-                    <a:solidFill>
-                      <a:srgbClr val="FFFFFF"/>
-                    </a:solidFill>
-                  </a:tcPr>
-                </a:tc>
-              </a:tr>
-              <a:tr h="411480">
-                <a:tc>
-                  <a:txBody>
-                    <a:bodyPr/>
-                    <a:lstStyle/>
-                    <a:p>
-                      <a:r>
-                        <a:rPr sz="1100">
-                          <a:solidFill>
-                            <a:srgbClr val="1C2433"/>
-                          </a:solidFill>
-                          <a:latin typeface="Calibri"/>
-                        </a:rPr>
-                        <a:t>16/ago</a:t>
-                      </a:r>
-                    </a:p>
-                  </a:txBody>
-                  <a:tcPr>
-                    <a:solidFill>
-                      <a:srgbClr val="EEEADE"/>
-                    </a:solidFill>
-                  </a:tcPr>
-                </a:tc>
-                <a:tc>
-                  <a:txBody>
-                    <a:bodyPr/>
-                    <a:lstStyle/>
-                    <a:p>
-                      <a:r>
-                        <a:rPr sz="1100">
-                          <a:solidFill>
-                            <a:srgbClr val="1C2433"/>
-                          </a:solidFill>
-                          <a:latin typeface="Calibri"/>
-                        </a:rPr>
-                        <a:t>Base reextraída, com dados de contrato</a:t>
-                      </a:r>
-                    </a:p>
-                  </a:txBody>
-                  <a:tcPr>
-                    <a:solidFill>
-                      <a:srgbClr val="EEEADE"/>
-                    </a:solidFill>
-                  </a:tcPr>
-                </a:tc>
-                <a:tc>
-                  <a:txBody>
-                    <a:bodyPr/>
-                    <a:lstStyle/>
-                    <a:p>
-                      <a:r>
-                        <a:rPr sz="1100">
-                          <a:solidFill>
-                            <a:srgbClr val="1C2433"/>
-                          </a:solidFill>
-                          <a:latin typeface="Calibri"/>
-                        </a:rPr>
-                        <a:t>25 → 29 colunas · 223.590 → 217.217 OS · 9.859 → 9.585 carretas</a:t>
-                      </a:r>
-                    </a:p>
-                  </a:txBody>
-                  <a:tcPr>
-                    <a:solidFill>
-                      <a:srgbClr val="EEEADE"/>
-                    </a:solidFill>
-                  </a:tcPr>
-                </a:tc>
-              </a:tr>
-              <a:tr h="411480">
-                <a:tc>
-                  <a:txBody>
-                    <a:bodyPr/>
-                    <a:lstStyle/>
-                    <a:p>
-                      <a:r>
-                        <a:rPr sz="1100">
-                          <a:solidFill>
-                            <a:srgbClr val="1C2433"/>
-                          </a:solidFill>
-                          <a:latin typeface="Calibri"/>
-                        </a:rPr>
-                        <a:t>16/ago</a:t>
-                      </a:r>
-                    </a:p>
-                  </a:txBody>
-                  <a:tcPr>
-                    <a:solidFill>
-                      <a:srgbClr val="FFFFFF"/>
-                    </a:solidFill>
-                  </a:tcPr>
-                </a:tc>
-                <a:tc>
-                  <a:txBody>
-                    <a:bodyPr/>
-                    <a:lstStyle/>
-                    <a:p>
-                      <a:r>
-                        <a:rPr sz="1100">
-                          <a:solidFill>
-                            <a:srgbClr val="1C2433"/>
-                          </a:solidFill>
-                          <a:latin typeface="Calibri"/>
-                        </a:rPr>
-                        <a:t>População redefinida (retomada do filtro MAINT)</a:t>
-                      </a:r>
-                    </a:p>
-                  </a:txBody>
-                  <a:tcPr>
-                    <a:solidFill>
-                      <a:srgbClr val="FFFFFF"/>
-                    </a:solidFill>
-                  </a:tcPr>
-                </a:tc>
-                <a:tc>
-                  <a:txBody>
-                    <a:bodyPr/>
-                    <a:lstStyle/>
-                    <a:p>
-                      <a:r>
-                        <a:rPr sz="1100">
-                          <a:solidFill>
-                            <a:srgbClr val="1C2433"/>
-                          </a:solidFill>
-                          <a:latin typeface="Calibri"/>
-                        </a:rPr>
-                        <a:t>41739 carreta-anos sob contrato com manutenção inclusa</a:t>
-                      </a:r>
-                    </a:p>
-                  </a:txBody>
-                  <a:tcPr>
-                    <a:solidFill>
-                      <a:srgbClr val="FFFFFF"/>
-                    </a:solidFill>
-                  </a:tcPr>
-                </a:tc>
-              </a:tr>
-              <a:tr h="411480">
-                <a:tc>
-                  <a:txBody>
-                    <a:bodyPr/>
-                    <a:lstStyle/>
-                    <a:p>
-                      <a:r>
-                        <a:rPr sz="1100">
-                          <a:solidFill>
-                            <a:srgbClr val="1C2433"/>
-                          </a:solidFill>
-                          <a:latin typeface="Calibri"/>
-                        </a:rPr>
-                        <a:t>16/ago</a:t>
-                      </a:r>
-                    </a:p>
-                  </a:txBody>
-                  <a:tcPr>
-                    <a:solidFill>
-                      <a:srgbClr val="EEEADE"/>
-                    </a:solidFill>
-                  </a:tcPr>
-                </a:tc>
-                <a:tc>
-                  <a:txBody>
-                    <a:bodyPr/>
-                    <a:lstStyle/>
-                    <a:p>
-                      <a:r>
-                        <a:rPr sz="1100">
-                          <a:solidFill>
-                            <a:srgbClr val="1C2433"/>
-                          </a:solidFill>
-                          <a:latin typeface="Calibri"/>
-                        </a:rPr>
-                        <a:t>Modelagem executada em 3 configurações</a:t>
-                      </a:r>
-                    </a:p>
-                  </a:txBody>
-                  <a:tcPr>
-                    <a:solidFill>
-                      <a:srgbClr val="EEEADE"/>
-                    </a:solidFill>
-                  </a:tcPr>
-                </a:tc>
-                <a:tc>
-                  <a:txBody>
-                    <a:bodyPr/>
-                    <a:lstStyle/>
-                    <a:p>
-                      <a:r>
-                        <a:rPr sz="1100">
-                          <a:solidFill>
-                            <a:srgbClr val="1C2433"/>
-                          </a:solidFill>
-                          <a:latin typeface="Calibri"/>
-                        </a:rPr>
-                        <a:t>efeito do filtro +0,0193 de R²; efeito do contrato +0,0033</a:t>
-                      </a:r>
-                    </a:p>
-                  </a:txBody>
-                  <a:tcPr>
-                    <a:solidFill>
-                      <a:srgbClr val="EEEADE"/>
-                    </a:solidFill>
-                  </a:tcPr>
-                </a:tc>
-              </a:tr>
-              <a:tr h="411480">
-                <a:tc>
-                  <a:txBody>
-                    <a:bodyPr/>
-                    <a:lstStyle/>
-                    <a:p>
-                      <a:r>
-                        <a:rPr sz="1100">
-                          <a:solidFill>
-                            <a:srgbClr val="1C2433"/>
-                          </a:solidFill>
-                          <a:latin typeface="Calibri"/>
-                        </a:rPr>
-                        <a:t>16/ago</a:t>
-                      </a:r>
-                    </a:p>
-                  </a:txBody>
-                  <a:tcPr>
-                    <a:solidFill>
-                      <a:srgbClr val="FFFFFF"/>
-                    </a:solidFill>
-                  </a:tcPr>
-                </a:tc>
-                <a:tc>
-                  <a:txBody>
-                    <a:bodyPr/>
-                    <a:lstStyle/>
-                    <a:p>
-                      <a:r>
-                        <a:rPr sz="1100">
-                          <a:solidFill>
-                            <a:srgbClr val="1C2433"/>
-                          </a:solidFill>
-                          <a:latin typeface="Calibri"/>
-                        </a:rPr>
-                        <a:t>Experimento: modelo único × dividido por refrigeração</a:t>
-                      </a:r>
-                    </a:p>
-                  </a:txBody>
-                  <a:tcPr>
-                    <a:solidFill>
-                      <a:srgbClr val="FFFFFF"/>
-                    </a:solidFill>
-                  </a:tcPr>
-                </a:tc>
-                <a:tc>
-                  <a:txBody>
-                    <a:bodyPr/>
-                    <a:lstStyle/>
-                    <a:p>
-                      <a:r>
-                        <a:rPr sz="1100">
-                          <a:solidFill>
-                            <a:srgbClr val="1C2433"/>
-                          </a:solidFill>
-                          <a:latin typeface="Calibri"/>
-                        </a:rPr>
-                        <a:t>validado em 3 anos de teste (2023, 2024, 2025)</a:t>
-                      </a:r>
-                    </a:p>
-                  </a:txBody>
-                  <a:tcPr>
-                    <a:solidFill>
-                      <a:srgbClr val="FFFFFF"/>
-                    </a:solidFill>
-                  </a:tcPr>
-                </a:tc>
-              </a:tr>
-            </a:tbl>
-          </a:graphicData>
-        </a:graphic>
-      </p:graphicFrame>
       <p:sp>
         <p:nvSpPr>
           <p:cNvPr id="8" name="TextBox 7"/>
@@ -37903,8 +38311,8 @@
         </p:nvSpPr>
         <p:spPr>
           <a:xfrm>
-            <a:off x="822960" y="4846320"/>
-            <a:ext cx="10607040" cy="1463040"/>
+            <a:off x="822960" y="3200400"/>
+            <a:ext cx="10607040" cy="3017520"/>
           </a:xfrm>
           <a:prstGeom prst="rect">
             <a:avLst/>
@@ -37929,7 +38337,7 @@
                 </a:solidFill>
                 <a:latin typeface="Calibri"/>
               </a:rPr>
-              <a:t>•  A fonte permanece ÚNICA: o contrato veio dentro do próprio CSV consolidado, sem join novo.</a:t>
+              <a:t>•  O grão anual reduziu a zero-inflação a 3.13%, deixando-a residual para a modelagem.</a:t>
             </a:r>
           </a:p>
           <a:p>
@@ -37945,7 +38353,71 @@
                 </a:solidFill>
                 <a:latin typeface="Calibri"/>
               </a:rPr>
-              <a:t>•  Todos os slides da apresentação anterior foram mantidos, na mesma ordem — os números é que foram atualizados.</a:t>
+              <a:t>•  A idade, isoladamente, tem associação fraca com o custo (ρ = 0,03) e baixa importância no modelo. Não testamos se o efeito da idade é mediado por histórico e uso — é hipótese, não resultado.</a:t>
+            </a:r>
+          </a:p>
+          <a:p>
+            <a:pPr>
+              <a:spcAft>
+                <a:spcPts val="700"/>
+              </a:spcAft>
+            </a:pPr>
+            <a:r>
+              <a:rPr sz="1400">
+                <a:solidFill>
+                  <a:srgbClr val="1C2433"/>
+                </a:solidFill>
+                <a:latin typeface="Calibri"/>
+              </a:rPr>
+              <a:t>•  Prever as partes e multiplicar supera prever o total: R² 0,4418 → 0,4713.</a:t>
+            </a:r>
+          </a:p>
+          <a:p>
+            <a:pPr>
+              <a:spcAft>
+                <a:spcPts val="700"/>
+              </a:spcAft>
+            </a:pPr>
+            <a:r>
+              <a:rPr sz="1400">
+                <a:solidFill>
+                  <a:srgbClr val="1C2433"/>
+                </a:solidFill>
+                <a:latin typeface="Calibri"/>
+              </a:rPr>
+              <a:t>•  O nº de OS por ano é previsível (R² 0,608); o custo médio por OS é o elo fraco (R² 0,085).</a:t>
+            </a:r>
+          </a:p>
+          <a:p>
+            <a:pPr>
+              <a:spcAft>
+                <a:spcPts val="700"/>
+              </a:spcAft>
+            </a:pPr>
+            <a:r>
+              <a:rPr sz="1400">
+                <a:solidFill>
+                  <a:srgbClr val="1C2433"/>
+                </a:solidFill>
+                <a:latin typeface="Calibri"/>
+              </a:rPr>
+              <a:t>•  Do contrato, o que importa é o TIPO (4ª variável mais importante), não a duração — cuja contribuição é nula.</a:t>
+            </a:r>
+          </a:p>
+          <a:p>
+            <a:pPr>
+              <a:spcAft>
+                <a:spcPts val="700"/>
+              </a:spcAft>
+            </a:pPr>
+            <a:r>
+              <a:rPr sz="1400">
+                <a:solidFill>
+                  <a:srgbClr val="1C2433"/>
+                </a:solidFill>
+                <a:latin typeface="Calibri"/>
+              </a:rPr>
+              <a:t>•  O erro médio (MAE) é de CAD 1.059/ano, cerca de 52% do custo médio do ano de teste: o modelo serve para PRIORIZAR carretas e para provisionar no agregado da frota, não para estimar o valor de um ativo isolado.</a:t>
             </a:r>
           </a:p>
         </p:txBody>
@@ -38085,7 +38557,7 @@
                 </a:solidFill>
                 <a:latin typeface="Calibri"/>
               </a:rPr>
-              <a:t>ITEM 12 · RESULTADOS PRELIMINARES</a:t>
+              <a:t>FASE 2 · O QUE MUDOU</a:t>
             </a:r>
           </a:p>
         </p:txBody>
@@ -38119,7 +38591,7 @@
                 </a:solidFill>
                 <a:latin typeface="Calibri"/>
               </a:rPr>
-              <a:t>1ª tentativa — sem as variáveis de contrato</a:t>
+              <a:t>Linha do tempo desde a apresentação de agosto</a:t>
             </a:r>
           </a:p>
         </p:txBody>
@@ -38132,8 +38604,8 @@
         </p:nvSpPr>
         <p:spPr>
           <a:xfrm>
-            <a:off x="822960" y="1508760"/>
-            <a:ext cx="10607040" cy="411480"/>
+            <a:off x="822960" y="1536192"/>
+            <a:ext cx="10607040" cy="365760"/>
           </a:xfrm>
           <a:prstGeom prst="rect">
             <a:avLst/>
@@ -38153,7 +38625,7 @@
                 </a:solidFill>
                 <a:latin typeface="Calibri"/>
               </a:rPr>
-              <a:t>É o desenho da apresentação anterior: um modelo único, sem qualquer informação de contrato. Recalculado sobre a base reextraída.</a:t>
+              <a:t>A Fase 1 encerrou na seleção de variáveis, com a modelagem marcada como Fase 2. Um dado novo mudou o que era possível testar.</a:t>
             </a:r>
           </a:p>
         </p:txBody>
@@ -38168,7 +38640,7 @@
         </p:nvGraphicFramePr>
         <p:xfrm>
           <a:off x="640080" y="2011680"/>
-          <a:ext cx="6858000" cy="3931920"/>
+          <a:ext cx="10972800" cy="2651760"/>
         </p:xfrm>
         <a:graphic>
           <a:graphicData uri="http://schemas.openxmlformats.org/drawingml/2006/table">
@@ -38177,26 +38649,24 @@
                 <a:tableStyleId>{5C22544A-7EE6-4342-B048-85BDC9FD1C3A}</a:tableStyleId>
               </a:tblPr>
               <a:tblGrid>
-                <a:gridCol w="1371600"/>
-                <a:gridCol w="1371600"/>
-                <a:gridCol w="1371600"/>
-                <a:gridCol w="1371600"/>
-                <a:gridCol w="1371600"/>
+                <a:gridCol w="3657600"/>
+                <a:gridCol w="3657600"/>
+                <a:gridCol w="3657600"/>
               </a:tblGrid>
-              <a:tr h="262128">
-                <a:tc>
-                  <a:txBody>
-                    <a:bodyPr/>
-                    <a:lstStyle/>
-                    <a:p>
-                      <a:r>
-                        <a:rPr sz="900" b="1">
+              <a:tr h="441960">
+                <a:tc>
+                  <a:txBody>
+                    <a:bodyPr/>
+                    <a:lstStyle/>
+                    <a:p>
+                      <a:r>
+                        <a:rPr sz="1000" b="1">
                           <a:solidFill>
                             <a:srgbClr val="FFFFFF"/>
                           </a:solidFill>
                           <a:latin typeface="Calibri"/>
                         </a:rPr>
-                        <a:t>cenário</a:t>
+                        <a:t>quando</a:t>
                       </a:r>
                     </a:p>
                   </a:txBody>
@@ -38212,13 +38682,13 @@
                     <a:lstStyle/>
                     <a:p>
                       <a:r>
-                        <a:rPr sz="900" b="1">
+                        <a:rPr sz="1000" b="1">
                           <a:solidFill>
                             <a:srgbClr val="FFFFFF"/>
                           </a:solidFill>
                           <a:latin typeface="Calibri"/>
                         </a:rPr>
-                        <a:t>modelo</a:t>
+                        <a:t>o que aconteceu</a:t>
                       </a:r>
                     </a:p>
                   </a:txBody>
@@ -38234,13 +38704,13 @@
                     <a:lstStyle/>
                     <a:p>
                       <a:r>
-                        <a:rPr sz="900" b="1">
+                        <a:rPr sz="1000" b="1">
                           <a:solidFill>
                             <a:srgbClr val="FFFFFF"/>
                           </a:solidFill>
                           <a:latin typeface="Calibri"/>
                         </a:rPr>
-                        <a:t>R²</a:t>
+                        <a:t>situação</a:t>
                       </a:r>
                     </a:p>
                   </a:txBody>
@@ -38250,70 +38720,162 @@
                     </a:solidFill>
                   </a:tcPr>
                 </a:tc>
-                <a:tc>
-                  <a:txBody>
-                    <a:bodyPr/>
-                    <a:lstStyle/>
-                    <a:p>
-                      <a:r>
-                        <a:rPr sz="900" b="1">
-                          <a:solidFill>
-                            <a:srgbClr val="FFFFFF"/>
+              </a:tr>
+              <a:tr h="441960">
+                <a:tc>
+                  <a:txBody>
+                    <a:bodyPr/>
+                    <a:lstStyle/>
+                    <a:p>
+                      <a:r>
+                        <a:rPr sz="1000">
+                          <a:solidFill>
+                            <a:srgbClr val="1C2433"/>
                           </a:solidFill>
                           <a:latin typeface="Calibri"/>
                         </a:rPr>
-                        <a:t>RMSE</a:t>
+                        <a:t>05/ago</a:t>
                       </a:r>
                     </a:p>
                   </a:txBody>
                   <a:tcPr>
                     <a:solidFill>
-                      <a:srgbClr val="142B45"/>
-                    </a:solidFill>
-                  </a:tcPr>
-                </a:tc>
-                <a:tc>
-                  <a:txBody>
-                    <a:bodyPr/>
-                    <a:lstStyle/>
-                    <a:p>
-                      <a:r>
-                        <a:rPr sz="900" b="1">
-                          <a:solidFill>
-                            <a:srgbClr val="FFFFFF"/>
+                      <a:srgbClr val="FFFFFF"/>
+                    </a:solidFill>
+                  </a:tcPr>
+                </a:tc>
+                <a:tc>
+                  <a:txBody>
+                    <a:bodyPr/>
+                    <a:lstStyle/>
+                    <a:p>
+                      <a:r>
+                        <a:rPr sz="1000">
+                          <a:solidFill>
+                            <a:srgbClr val="1C2433"/>
                           </a:solidFill>
                           <a:latin typeface="Calibri"/>
                         </a:rPr>
-                        <a:t>MAE</a:t>
+                        <a:t>Apresentação da Fase 1 (28 slides)</a:t>
                       </a:r>
                     </a:p>
                   </a:txBody>
                   <a:tcPr>
                     <a:solidFill>
-                      <a:srgbClr val="142B45"/>
+                      <a:srgbClr val="FFFFFF"/>
+                    </a:solidFill>
+                  </a:tcPr>
+                </a:tc>
+                <a:tc>
+                  <a:txBody>
+                    <a:bodyPr/>
+                    <a:lstStyle/>
+                    <a:p>
+                      <a:r>
+                        <a:rPr sz="1000">
+                          <a:solidFill>
+                            <a:srgbClr val="1C2433"/>
+                          </a:solidFill>
+                          <a:latin typeface="Calibri"/>
+                        </a:rPr>
+                        <a:t>H6 declarada, sem dados; Gate 4 em aberto</a:t>
+                      </a:r>
+                    </a:p>
+                  </a:txBody>
+                  <a:tcPr>
+                    <a:solidFill>
+                      <a:srgbClr val="FFFFFF"/>
                     </a:solidFill>
                   </a:tcPr>
                 </a:tc>
               </a:tr>
-              <a:tr h="262128">
-                <a:tc>
-                  <a:txBody>
-                    <a:bodyPr/>
-                    <a:lstStyle/>
-                    <a:p>
-                      <a:r>
-                        <a:rPr sz="900">
+              <a:tr h="441960">
+                <a:tc>
+                  <a:txBody>
+                    <a:bodyPr/>
+                    <a:lstStyle/>
+                    <a:p>
+                      <a:r>
+                        <a:rPr sz="1000">
                           <a:solidFill>
                             <a:srgbClr val="1C2433"/>
                           </a:solidFill>
                           <a:latin typeface="Calibri"/>
                         </a:rPr>
-                        <a:t>explicativo</a:t>
+                        <a:t>16/ago</a:t>
                       </a:r>
                     </a:p>
                   </a:txBody>
                   <a:tcPr>
                     <a:solidFill>
+                      <a:srgbClr val="EEEADE"/>
+                    </a:solidFill>
+                  </a:tcPr>
+                </a:tc>
+                <a:tc>
+                  <a:txBody>
+                    <a:bodyPr/>
+                    <a:lstStyle/>
+                    <a:p>
+                      <a:r>
+                        <a:rPr sz="1000">
+                          <a:solidFill>
+                            <a:srgbClr val="1C2433"/>
+                          </a:solidFill>
+                          <a:latin typeface="Calibri"/>
+                        </a:rPr>
+                        <a:t>Base reextraída, com dados de contrato</a:t>
+                      </a:r>
+                    </a:p>
+                  </a:txBody>
+                  <a:tcPr>
+                    <a:solidFill>
+                      <a:srgbClr val="EEEADE"/>
+                    </a:solidFill>
+                  </a:tcPr>
+                </a:tc>
+                <a:tc>
+                  <a:txBody>
+                    <a:bodyPr/>
+                    <a:lstStyle/>
+                    <a:p>
+                      <a:r>
+                        <a:rPr sz="1000">
+                          <a:solidFill>
+                            <a:srgbClr val="1C2433"/>
+                          </a:solidFill>
+                          <a:latin typeface="Calibri"/>
+                        </a:rPr>
+                        <a:t>25 → 29 colunas · 223.590 → 217.217 OS · 9.859 → 9.585 carretas</a:t>
+                      </a:r>
+                    </a:p>
+                  </a:txBody>
+                  <a:tcPr>
+                    <a:solidFill>
+                      <a:srgbClr val="EEEADE"/>
+                    </a:solidFill>
+                  </a:tcPr>
+                </a:tc>
+              </a:tr>
+              <a:tr h="441960">
+                <a:tc>
+                  <a:txBody>
+                    <a:bodyPr/>
+                    <a:lstStyle/>
+                    <a:p>
+                      <a:r>
+                        <a:rPr sz="1000">
+                          <a:solidFill>
+                            <a:srgbClr val="1C2433"/>
+                          </a:solidFill>
+                          <a:latin typeface="Calibri"/>
+                        </a:rPr>
+                        <a:t>02/set</a:t>
+                      </a:r>
+                    </a:p>
+                  </a:txBody>
+                  <a:tcPr>
+                    <a:solidFill>
                       <a:srgbClr val="FFFFFF"/>
                     </a:solidFill>
                   </a:tcPr>
@@ -38324,13 +38886,13 @@
                     <a:lstStyle/>
                     <a:p>
                       <a:r>
-                        <a:rPr sz="900">
+                        <a:rPr sz="1000">
                           <a:solidFill>
                             <a:srgbClr val="1C2433"/>
                           </a:solidFill>
                           <a:latin typeface="Calibri"/>
                         </a:rPr>
-                        <a:t>random_forest</a:t>
+                        <a:t>Curadoria de variáveis pelo Grupo</a:t>
                       </a:r>
                     </a:p>
                   </a:txBody>
@@ -38346,13 +38908,13 @@
                     <a:lstStyle/>
                     <a:p>
                       <a:r>
-                        <a:rPr sz="900">
+                        <a:rPr sz="1000">
                           <a:solidFill>
                             <a:srgbClr val="1C2433"/>
                           </a:solidFill>
                           <a:latin typeface="Calibri"/>
                         </a:rPr>
-                        <a:t>0.57</a:t>
+                        <a:t>40 variáveis revisadas uma a uma; geografia encerrada (H5)</a:t>
                       </a:r>
                     </a:p>
                   </a:txBody>
@@ -38362,24 +38924,94 @@
                     </a:solidFill>
                   </a:tcPr>
                 </a:tc>
-                <a:tc>
-                  <a:txBody>
-                    <a:bodyPr/>
-                    <a:lstStyle/>
-                    <a:p>
-                      <a:r>
-                        <a:rPr sz="900">
+              </a:tr>
+              <a:tr h="441960">
+                <a:tc>
+                  <a:txBody>
+                    <a:bodyPr/>
+                    <a:lstStyle/>
+                    <a:p>
+                      <a:r>
+                        <a:rPr sz="1000">
                           <a:solidFill>
                             <a:srgbClr val="1C2433"/>
                           </a:solidFill>
                           <a:latin typeface="Calibri"/>
                         </a:rPr>
-                        <a:t>1762.9</a:t>
+                        <a:t>02/set</a:t>
                       </a:r>
                     </a:p>
                   </a:txBody>
                   <a:tcPr>
                     <a:solidFill>
+                      <a:srgbClr val="EEEADE"/>
+                    </a:solidFill>
+                  </a:tcPr>
+                </a:tc>
+                <a:tc>
+                  <a:txBody>
+                    <a:bodyPr/>
+                    <a:lstStyle/>
+                    <a:p>
+                      <a:r>
+                        <a:rPr sz="1000">
+                          <a:solidFill>
+                            <a:srgbClr val="1C2433"/>
+                          </a:solidFill>
+                          <a:latin typeface="Calibri"/>
+                        </a:rPr>
+                        <a:t>População: a frota completa</a:t>
+                      </a:r>
+                    </a:p>
+                  </a:txBody>
+                  <a:tcPr>
+                    <a:solidFill>
+                      <a:srgbClr val="EEEADE"/>
+                    </a:solidFill>
+                  </a:tcPr>
+                </a:tc>
+                <a:tc>
+                  <a:txBody>
+                    <a:bodyPr/>
+                    <a:lstStyle/>
+                    <a:p>
+                      <a:r>
+                        <a:rPr sz="1000">
+                          <a:solidFill>
+                            <a:srgbClr val="1C2433"/>
+                          </a:solidFill>
+                          <a:latin typeface="Calibri"/>
+                        </a:rPr>
+                        <a:t>47.715 carreta-anos; o tipo de contrato passa a ser variável do modelo</a:t>
+                      </a:r>
+                    </a:p>
+                  </a:txBody>
+                  <a:tcPr>
+                    <a:solidFill>
+                      <a:srgbClr val="EEEADE"/>
+                    </a:solidFill>
+                  </a:tcPr>
+                </a:tc>
+              </a:tr>
+              <a:tr h="441960">
+                <a:tc>
+                  <a:txBody>
+                    <a:bodyPr/>
+                    <a:lstStyle/>
+                    <a:p>
+                      <a:r>
+                        <a:rPr sz="1000">
+                          <a:solidFill>
+                            <a:srgbClr val="1C2433"/>
+                          </a:solidFill>
+                          <a:latin typeface="Calibri"/>
+                        </a:rPr>
+                        <a:t>02/set</a:t>
+                      </a:r>
+                    </a:p>
+                  </a:txBody>
+                  <a:tcPr>
+                    <a:solidFill>
                       <a:srgbClr val="FFFFFF"/>
                     </a:solidFill>
                   </a:tcPr>
@@ -38390,13 +39022,13 @@
                     <a:lstStyle/>
                     <a:p>
                       <a:r>
-                        <a:rPr sz="900">
+                        <a:rPr sz="1000">
                           <a:solidFill>
                             <a:srgbClr val="1C2433"/>
                           </a:solidFill>
                           <a:latin typeface="Calibri"/>
                         </a:rPr>
-                        <a:t>890.3</a:t>
+                        <a:t>Alvo decomposto: Y1 e Y2</a:t>
                       </a:r>
                     </a:p>
                   </a:txBody>
@@ -38406,1459 +39038,25 @@
                     </a:solidFill>
                   </a:tcPr>
                 </a:tc>
-              </a:tr>
-              <a:tr h="262128">
-                <a:tc>
-                  <a:txBody>
-                    <a:bodyPr/>
-                    <a:lstStyle/>
-                    <a:p>
-                      <a:r>
-                        <a:rPr sz="900">
+                <a:tc>
+                  <a:txBody>
+                    <a:bodyPr/>
+                    <a:lstStyle/>
+                    <a:p>
+                      <a:r>
+                        <a:rPr sz="1000">
                           <a:solidFill>
                             <a:srgbClr val="1C2433"/>
                           </a:solidFill>
                           <a:latin typeface="Calibri"/>
                         </a:rPr>
-                        <a:t>explicativo</a:t>
+                        <a:t>prever nº de OS e custo médio supera prever o custo direto (0,4418 → 0,4713)</a:t>
                       </a:r>
                     </a:p>
                   </a:txBody>
                   <a:tcPr>
                     <a:solidFill>
-                      <a:srgbClr val="EEEADE"/>
-                    </a:solidFill>
-                  </a:tcPr>
-                </a:tc>
-                <a:tc>
-                  <a:txBody>
-                    <a:bodyPr/>
-                    <a:lstStyle/>
-                    <a:p>
-                      <a:r>
-                        <a:rPr sz="900">
-                          <a:solidFill>
-                            <a:srgbClr val="1C2433"/>
-                          </a:solidFill>
-                          <a:latin typeface="Calibri"/>
-                        </a:rPr>
-                        <a:t>gradient_boosting</a:t>
-                      </a:r>
-                    </a:p>
-                  </a:txBody>
-                  <a:tcPr>
-                    <a:solidFill>
-                      <a:srgbClr val="EEEADE"/>
-                    </a:solidFill>
-                  </a:tcPr>
-                </a:tc>
-                <a:tc>
-                  <a:txBody>
-                    <a:bodyPr/>
-                    <a:lstStyle/>
-                    <a:p>
-                      <a:r>
-                        <a:rPr sz="900">
-                          <a:solidFill>
-                            <a:srgbClr val="1C2433"/>
-                          </a:solidFill>
-                          <a:latin typeface="Calibri"/>
-                        </a:rPr>
-                        <a:t>0.5684</a:t>
-                      </a:r>
-                    </a:p>
-                  </a:txBody>
-                  <a:tcPr>
-                    <a:solidFill>
-                      <a:srgbClr val="EEEADE"/>
-                    </a:solidFill>
-                  </a:tcPr>
-                </a:tc>
-                <a:tc>
-                  <a:txBody>
-                    <a:bodyPr/>
-                    <a:lstStyle/>
-                    <a:p>
-                      <a:r>
-                        <a:rPr sz="900">
-                          <a:solidFill>
-                            <a:srgbClr val="1C2433"/>
-                          </a:solidFill>
-                          <a:latin typeface="Calibri"/>
-                        </a:rPr>
-                        <a:t>1766.2</a:t>
-                      </a:r>
-                    </a:p>
-                  </a:txBody>
-                  <a:tcPr>
-                    <a:solidFill>
-                      <a:srgbClr val="EEEADE"/>
-                    </a:solidFill>
-                  </a:tcPr>
-                </a:tc>
-                <a:tc>
-                  <a:txBody>
-                    <a:bodyPr/>
-                    <a:lstStyle/>
-                    <a:p>
-                      <a:r>
-                        <a:rPr sz="900">
-                          <a:solidFill>
-                            <a:srgbClr val="1C2433"/>
-                          </a:solidFill>
-                          <a:latin typeface="Calibri"/>
-                        </a:rPr>
-                        <a:t>896.6</a:t>
-                      </a:r>
-                    </a:p>
-                  </a:txBody>
-                  <a:tcPr>
-                    <a:solidFill>
-                      <a:srgbClr val="EEEADE"/>
-                    </a:solidFill>
-                  </a:tcPr>
-                </a:tc>
-              </a:tr>
-              <a:tr h="262128">
-                <a:tc>
-                  <a:txBody>
-                    <a:bodyPr/>
-                    <a:lstStyle/>
-                    <a:p>
-                      <a:r>
-                        <a:rPr sz="900">
-                          <a:solidFill>
-                            <a:srgbClr val="1C2433"/>
-                          </a:solidFill>
-                          <a:latin typeface="Calibri"/>
-                        </a:rPr>
-                        <a:t>explicativo</a:t>
-                      </a:r>
-                    </a:p>
-                  </a:txBody>
-                  <a:tcPr>
-                    <a:solidFill>
                       <a:srgbClr val="FFFFFF"/>
-                    </a:solidFill>
-                  </a:tcPr>
-                </a:tc>
-                <a:tc>
-                  <a:txBody>
-                    <a:bodyPr/>
-                    <a:lstStyle/>
-                    <a:p>
-                      <a:r>
-                        <a:rPr sz="900">
-                          <a:solidFill>
-                            <a:srgbClr val="1C2433"/>
-                          </a:solidFill>
-                          <a:latin typeface="Calibri"/>
-                        </a:rPr>
-                        <a:t>knn</a:t>
-                      </a:r>
-                    </a:p>
-                  </a:txBody>
-                  <a:tcPr>
-                    <a:solidFill>
-                      <a:srgbClr val="FFFFFF"/>
-                    </a:solidFill>
-                  </a:tcPr>
-                </a:tc>
-                <a:tc>
-                  <a:txBody>
-                    <a:bodyPr/>
-                    <a:lstStyle/>
-                    <a:p>
-                      <a:r>
-                        <a:rPr sz="900">
-                          <a:solidFill>
-                            <a:srgbClr val="1C2433"/>
-                          </a:solidFill>
-                          <a:latin typeface="Calibri"/>
-                        </a:rPr>
-                        <a:t>0.5201</a:t>
-                      </a:r>
-                    </a:p>
-                  </a:txBody>
-                  <a:tcPr>
-                    <a:solidFill>
-                      <a:srgbClr val="FFFFFF"/>
-                    </a:solidFill>
-                  </a:tcPr>
-                </a:tc>
-                <a:tc>
-                  <a:txBody>
-                    <a:bodyPr/>
-                    <a:lstStyle/>
-                    <a:p>
-                      <a:r>
-                        <a:rPr sz="900">
-                          <a:solidFill>
-                            <a:srgbClr val="1C2433"/>
-                          </a:solidFill>
-                          <a:latin typeface="Calibri"/>
-                        </a:rPr>
-                        <a:t>1862.5</a:t>
-                      </a:r>
-                    </a:p>
-                  </a:txBody>
-                  <a:tcPr>
-                    <a:solidFill>
-                      <a:srgbClr val="FFFFFF"/>
-                    </a:solidFill>
-                  </a:tcPr>
-                </a:tc>
-                <a:tc>
-                  <a:txBody>
-                    <a:bodyPr/>
-                    <a:lstStyle/>
-                    <a:p>
-                      <a:r>
-                        <a:rPr sz="900">
-                          <a:solidFill>
-                            <a:srgbClr val="1C2433"/>
-                          </a:solidFill>
-                          <a:latin typeface="Calibri"/>
-                        </a:rPr>
-                        <a:t>957.3</a:t>
-                      </a:r>
-                    </a:p>
-                  </a:txBody>
-                  <a:tcPr>
-                    <a:solidFill>
-                      <a:srgbClr val="FFFFFF"/>
-                    </a:solidFill>
-                  </a:tcPr>
-                </a:tc>
-              </a:tr>
-              <a:tr h="262128">
-                <a:tc>
-                  <a:txBody>
-                    <a:bodyPr/>
-                    <a:lstStyle/>
-                    <a:p>
-                      <a:r>
-                        <a:rPr sz="900">
-                          <a:solidFill>
-                            <a:srgbClr val="1C2433"/>
-                          </a:solidFill>
-                          <a:latin typeface="Calibri"/>
-                        </a:rPr>
-                        <a:t>explicativo</a:t>
-                      </a:r>
-                    </a:p>
-                  </a:txBody>
-                  <a:tcPr>
-                    <a:solidFill>
-                      <a:srgbClr val="EEEADE"/>
-                    </a:solidFill>
-                  </a:tcPr>
-                </a:tc>
-                <a:tc>
-                  <a:txBody>
-                    <a:bodyPr/>
-                    <a:lstStyle/>
-                    <a:p>
-                      <a:r>
-                        <a:rPr sz="900">
-                          <a:solidFill>
-                            <a:srgbClr val="1C2433"/>
-                          </a:solidFill>
-                          <a:latin typeface="Calibri"/>
-                        </a:rPr>
-                        <a:t>arvore_decisao</a:t>
-                      </a:r>
-                    </a:p>
-                  </a:txBody>
-                  <a:tcPr>
-                    <a:solidFill>
-                      <a:srgbClr val="EEEADE"/>
-                    </a:solidFill>
-                  </a:tcPr>
-                </a:tc>
-                <a:tc>
-                  <a:txBody>
-                    <a:bodyPr/>
-                    <a:lstStyle/>
-                    <a:p>
-                      <a:r>
-                        <a:rPr sz="900">
-                          <a:solidFill>
-                            <a:srgbClr val="1C2433"/>
-                          </a:solidFill>
-                          <a:latin typeface="Calibri"/>
-                        </a:rPr>
-                        <a:t>0.5092</a:t>
-                      </a:r>
-                    </a:p>
-                  </a:txBody>
-                  <a:tcPr>
-                    <a:solidFill>
-                      <a:srgbClr val="EEEADE"/>
-                    </a:solidFill>
-                  </a:tcPr>
-                </a:tc>
-                <a:tc>
-                  <a:txBody>
-                    <a:bodyPr/>
-                    <a:lstStyle/>
-                    <a:p>
-                      <a:r>
-                        <a:rPr sz="900">
-                          <a:solidFill>
-                            <a:srgbClr val="1C2433"/>
-                          </a:solidFill>
-                          <a:latin typeface="Calibri"/>
-                        </a:rPr>
-                        <a:t>1883.5</a:t>
-                      </a:r>
-                    </a:p>
-                  </a:txBody>
-                  <a:tcPr>
-                    <a:solidFill>
-                      <a:srgbClr val="EEEADE"/>
-                    </a:solidFill>
-                  </a:tcPr>
-                </a:tc>
-                <a:tc>
-                  <a:txBody>
-                    <a:bodyPr/>
-                    <a:lstStyle/>
-                    <a:p>
-                      <a:r>
-                        <a:rPr sz="900">
-                          <a:solidFill>
-                            <a:srgbClr val="1C2433"/>
-                          </a:solidFill>
-                          <a:latin typeface="Calibri"/>
-                        </a:rPr>
-                        <a:t>971.3</a:t>
-                      </a:r>
-                    </a:p>
-                  </a:txBody>
-                  <a:tcPr>
-                    <a:solidFill>
-                      <a:srgbClr val="EEEADE"/>
-                    </a:solidFill>
-                  </a:tcPr>
-                </a:tc>
-              </a:tr>
-              <a:tr h="262128">
-                <a:tc>
-                  <a:txBody>
-                    <a:bodyPr/>
-                    <a:lstStyle/>
-                    <a:p>
-                      <a:r>
-                        <a:rPr sz="900">
-                          <a:solidFill>
-                            <a:srgbClr val="1C2433"/>
-                          </a:solidFill>
-                          <a:latin typeface="Calibri"/>
-                        </a:rPr>
-                        <a:t>explicativo</a:t>
-                      </a:r>
-                    </a:p>
-                  </a:txBody>
-                  <a:tcPr>
-                    <a:solidFill>
-                      <a:srgbClr val="FFFFFF"/>
-                    </a:solidFill>
-                  </a:tcPr>
-                </a:tc>
-                <a:tc>
-                  <a:txBody>
-                    <a:bodyPr/>
-                    <a:lstStyle/>
-                    <a:p>
-                      <a:r>
-                        <a:rPr sz="900">
-                          <a:solidFill>
-                            <a:srgbClr val="1C2433"/>
-                          </a:solidFill>
-                          <a:latin typeface="Calibri"/>
-                        </a:rPr>
-                        <a:t>regressao_linear_multipla</a:t>
-                      </a:r>
-                    </a:p>
-                  </a:txBody>
-                  <a:tcPr>
-                    <a:solidFill>
-                      <a:srgbClr val="FFFFFF"/>
-                    </a:solidFill>
-                  </a:tcPr>
-                </a:tc>
-                <a:tc>
-                  <a:txBody>
-                    <a:bodyPr/>
-                    <a:lstStyle/>
-                    <a:p>
-                      <a:r>
-                        <a:rPr sz="900">
-                          <a:solidFill>
-                            <a:srgbClr val="1C2433"/>
-                          </a:solidFill>
-                          <a:latin typeface="Calibri"/>
-                        </a:rPr>
-                        <a:t>-0.215</a:t>
-                      </a:r>
-                    </a:p>
-                  </a:txBody>
-                  <a:tcPr>
-                    <a:solidFill>
-                      <a:srgbClr val="FFFFFF"/>
-                    </a:solidFill>
-                  </a:tcPr>
-                </a:tc>
-                <a:tc>
-                  <a:txBody>
-                    <a:bodyPr/>
-                    <a:lstStyle/>
-                    <a:p>
-                      <a:r>
-                        <a:rPr sz="900">
-                          <a:solidFill>
-                            <a:srgbClr val="1C2433"/>
-                          </a:solidFill>
-                          <a:latin typeface="Calibri"/>
-                        </a:rPr>
-                        <a:t>2963.5</a:t>
-                      </a:r>
-                    </a:p>
-                  </a:txBody>
-                  <a:tcPr>
-                    <a:solidFill>
-                      <a:srgbClr val="FFFFFF"/>
-                    </a:solidFill>
-                  </a:tcPr>
-                </a:tc>
-                <a:tc>
-                  <a:txBody>
-                    <a:bodyPr/>
-                    <a:lstStyle/>
-                    <a:p>
-                      <a:r>
-                        <a:rPr sz="900">
-                          <a:solidFill>
-                            <a:srgbClr val="1C2433"/>
-                          </a:solidFill>
-                          <a:latin typeface="Calibri"/>
-                        </a:rPr>
-                        <a:t>1210.2</a:t>
-                      </a:r>
-                    </a:p>
-                  </a:txBody>
-                  <a:tcPr>
-                    <a:solidFill>
-                      <a:srgbClr val="FFFFFF"/>
-                    </a:solidFill>
-                  </a:tcPr>
-                </a:tc>
-              </a:tr>
-              <a:tr h="262128">
-                <a:tc>
-                  <a:txBody>
-                    <a:bodyPr/>
-                    <a:lstStyle/>
-                    <a:p>
-                      <a:r>
-                        <a:rPr sz="900">
-                          <a:solidFill>
-                            <a:srgbClr val="1C2433"/>
-                          </a:solidFill>
-                          <a:latin typeface="Calibri"/>
-                        </a:rPr>
-                        <a:t>explicativo</a:t>
-                      </a:r>
-                    </a:p>
-                  </a:txBody>
-                  <a:tcPr>
-                    <a:solidFill>
-                      <a:srgbClr val="EEEADE"/>
-                    </a:solidFill>
-                  </a:tcPr>
-                </a:tc>
-                <a:tc>
-                  <a:txBody>
-                    <a:bodyPr/>
-                    <a:lstStyle/>
-                    <a:p>
-                      <a:r>
-                        <a:rPr sz="900">
-                          <a:solidFill>
-                            <a:srgbClr val="1C2433"/>
-                          </a:solidFill>
-                          <a:latin typeface="Calibri"/>
-                        </a:rPr>
-                        <a:t>ridge</a:t>
-                      </a:r>
-                    </a:p>
-                  </a:txBody>
-                  <a:tcPr>
-                    <a:solidFill>
-                      <a:srgbClr val="EEEADE"/>
-                    </a:solidFill>
-                  </a:tcPr>
-                </a:tc>
-                <a:tc>
-                  <a:txBody>
-                    <a:bodyPr/>
-                    <a:lstStyle/>
-                    <a:p>
-                      <a:r>
-                        <a:rPr sz="900">
-                          <a:solidFill>
-                            <a:srgbClr val="1C2433"/>
-                          </a:solidFill>
-                          <a:latin typeface="Calibri"/>
-                        </a:rPr>
-                        <a:t>-0.236</a:t>
-                      </a:r>
-                    </a:p>
-                  </a:txBody>
-                  <a:tcPr>
-                    <a:solidFill>
-                      <a:srgbClr val="EEEADE"/>
-                    </a:solidFill>
-                  </a:tcPr>
-                </a:tc>
-                <a:tc>
-                  <a:txBody>
-                    <a:bodyPr/>
-                    <a:lstStyle/>
-                    <a:p>
-                      <a:r>
-                        <a:rPr sz="900">
-                          <a:solidFill>
-                            <a:srgbClr val="1C2433"/>
-                          </a:solidFill>
-                          <a:latin typeface="Calibri"/>
-                        </a:rPr>
-                        <a:t>2988.9</a:t>
-                      </a:r>
-                    </a:p>
-                  </a:txBody>
-                  <a:tcPr>
-                    <a:solidFill>
-                      <a:srgbClr val="EEEADE"/>
-                    </a:solidFill>
-                  </a:tcPr>
-                </a:tc>
-                <a:tc>
-                  <a:txBody>
-                    <a:bodyPr/>
-                    <a:lstStyle/>
-                    <a:p>
-                      <a:r>
-                        <a:rPr sz="900">
-                          <a:solidFill>
-                            <a:srgbClr val="1C2433"/>
-                          </a:solidFill>
-                          <a:latin typeface="Calibri"/>
-                        </a:rPr>
-                        <a:t>1214.4</a:t>
-                      </a:r>
-                    </a:p>
-                  </a:txBody>
-                  <a:tcPr>
-                    <a:solidFill>
-                      <a:srgbClr val="EEEADE"/>
-                    </a:solidFill>
-                  </a:tcPr>
-                </a:tc>
-              </a:tr>
-              <a:tr h="262128">
-                <a:tc>
-                  <a:txBody>
-                    <a:bodyPr/>
-                    <a:lstStyle/>
-                    <a:p>
-                      <a:r>
-                        <a:rPr sz="900">
-                          <a:solidFill>
-                            <a:srgbClr val="1C2433"/>
-                          </a:solidFill>
-                          <a:latin typeface="Calibri"/>
-                        </a:rPr>
-                        <a:t>explicativo</a:t>
-                      </a:r>
-                    </a:p>
-                  </a:txBody>
-                  <a:tcPr>
-                    <a:solidFill>
-                      <a:srgbClr val="FFFFFF"/>
-                    </a:solidFill>
-                  </a:tcPr>
-                </a:tc>
-                <a:tc>
-                  <a:txBody>
-                    <a:bodyPr/>
-                    <a:lstStyle/>
-                    <a:p>
-                      <a:r>
-                        <a:rPr sz="900">
-                          <a:solidFill>
-                            <a:srgbClr val="1C2433"/>
-                          </a:solidFill>
-                          <a:latin typeface="Calibri"/>
-                        </a:rPr>
-                        <a:t>regressao_polinomial_grau_2</a:t>
-                      </a:r>
-                    </a:p>
-                  </a:txBody>
-                  <a:tcPr>
-                    <a:solidFill>
-                      <a:srgbClr val="FFFFFF"/>
-                    </a:solidFill>
-                  </a:tcPr>
-                </a:tc>
-                <a:tc>
-                  <a:txBody>
-                    <a:bodyPr/>
-                    <a:lstStyle/>
-                    <a:p>
-                      <a:r>
-                        <a:rPr sz="900">
-                          <a:solidFill>
-                            <a:srgbClr val="1C2433"/>
-                          </a:solidFill>
-                          <a:latin typeface="Calibri"/>
-                        </a:rPr>
-                        <a:t>-0.8711</a:t>
-                      </a:r>
-                    </a:p>
-                  </a:txBody>
-                  <a:tcPr>
-                    <a:solidFill>
-                      <a:srgbClr val="FFFFFF"/>
-                    </a:solidFill>
-                  </a:tcPr>
-                </a:tc>
-                <a:tc>
-                  <a:txBody>
-                    <a:bodyPr/>
-                    <a:lstStyle/>
-                    <a:p>
-                      <a:r>
-                        <a:rPr sz="900">
-                          <a:solidFill>
-                            <a:srgbClr val="1C2433"/>
-                          </a:solidFill>
-                          <a:latin typeface="Calibri"/>
-                        </a:rPr>
-                        <a:t>3677.5</a:t>
-                      </a:r>
-                    </a:p>
-                  </a:txBody>
-                  <a:tcPr>
-                    <a:solidFill>
-                      <a:srgbClr val="FFFFFF"/>
-                    </a:solidFill>
-                  </a:tcPr>
-                </a:tc>
-                <a:tc>
-                  <a:txBody>
-                    <a:bodyPr/>
-                    <a:lstStyle/>
-                    <a:p>
-                      <a:r>
-                        <a:rPr sz="900">
-                          <a:solidFill>
-                            <a:srgbClr val="1C2433"/>
-                          </a:solidFill>
-                          <a:latin typeface="Calibri"/>
-                        </a:rPr>
-                        <a:t>1408.5</a:t>
-                      </a:r>
-                    </a:p>
-                  </a:txBody>
-                  <a:tcPr>
-                    <a:solidFill>
-                      <a:srgbClr val="FFFFFF"/>
-                    </a:solidFill>
-                  </a:tcPr>
-                </a:tc>
-              </a:tr>
-              <a:tr h="262128">
-                <a:tc>
-                  <a:txBody>
-                    <a:bodyPr/>
-                    <a:lstStyle/>
-                    <a:p>
-                      <a:r>
-                        <a:rPr sz="900">
-                          <a:solidFill>
-                            <a:srgbClr val="1C2433"/>
-                          </a:solidFill>
-                          <a:latin typeface="Calibri"/>
-                        </a:rPr>
-                        <a:t>preditivo</a:t>
-                      </a:r>
-                    </a:p>
-                  </a:txBody>
-                  <a:tcPr>
-                    <a:solidFill>
-                      <a:srgbClr val="EEEADE"/>
-                    </a:solidFill>
-                  </a:tcPr>
-                </a:tc>
-                <a:tc>
-                  <a:txBody>
-                    <a:bodyPr/>
-                    <a:lstStyle/>
-                    <a:p>
-                      <a:r>
-                        <a:rPr sz="900">
-                          <a:solidFill>
-                            <a:srgbClr val="1C2433"/>
-                          </a:solidFill>
-                          <a:latin typeface="Calibri"/>
-                        </a:rPr>
-                        <a:t>random_forest</a:t>
-                      </a:r>
-                    </a:p>
-                  </a:txBody>
-                  <a:tcPr>
-                    <a:solidFill>
-                      <a:srgbClr val="EEEADE"/>
-                    </a:solidFill>
-                  </a:tcPr>
-                </a:tc>
-                <a:tc>
-                  <a:txBody>
-                    <a:bodyPr/>
-                    <a:lstStyle/>
-                    <a:p>
-                      <a:r>
-                        <a:rPr sz="900">
-                          <a:solidFill>
-                            <a:srgbClr val="1C2433"/>
-                          </a:solidFill>
-                          <a:latin typeface="Calibri"/>
-                        </a:rPr>
-                        <a:t>0.4323</a:t>
-                      </a:r>
-                    </a:p>
-                  </a:txBody>
-                  <a:tcPr>
-                    <a:solidFill>
-                      <a:srgbClr val="EEEADE"/>
-                    </a:solidFill>
-                  </a:tcPr>
-                </a:tc>
-                <a:tc>
-                  <a:txBody>
-                    <a:bodyPr/>
-                    <a:lstStyle/>
-                    <a:p>
-                      <a:r>
-                        <a:rPr sz="900">
-                          <a:solidFill>
-                            <a:srgbClr val="1C2433"/>
-                          </a:solidFill>
-                          <a:latin typeface="Calibri"/>
-                        </a:rPr>
-                        <a:t>2025.7</a:t>
-                      </a:r>
-                    </a:p>
-                  </a:txBody>
-                  <a:tcPr>
-                    <a:solidFill>
-                      <a:srgbClr val="EEEADE"/>
-                    </a:solidFill>
-                  </a:tcPr>
-                </a:tc>
-                <a:tc>
-                  <a:txBody>
-                    <a:bodyPr/>
-                    <a:lstStyle/>
-                    <a:p>
-                      <a:r>
-                        <a:rPr sz="900">
-                          <a:solidFill>
-                            <a:srgbClr val="1C2433"/>
-                          </a:solidFill>
-                          <a:latin typeface="Calibri"/>
-                        </a:rPr>
-                        <a:t>1063.3</a:t>
-                      </a:r>
-                    </a:p>
-                  </a:txBody>
-                  <a:tcPr>
-                    <a:solidFill>
-                      <a:srgbClr val="EEEADE"/>
-                    </a:solidFill>
-                  </a:tcPr>
-                </a:tc>
-              </a:tr>
-              <a:tr h="262128">
-                <a:tc>
-                  <a:txBody>
-                    <a:bodyPr/>
-                    <a:lstStyle/>
-                    <a:p>
-                      <a:r>
-                        <a:rPr sz="900">
-                          <a:solidFill>
-                            <a:srgbClr val="1C2433"/>
-                          </a:solidFill>
-                          <a:latin typeface="Calibri"/>
-                        </a:rPr>
-                        <a:t>preditivo</a:t>
-                      </a:r>
-                    </a:p>
-                  </a:txBody>
-                  <a:tcPr>
-                    <a:solidFill>
-                      <a:srgbClr val="FFFFFF"/>
-                    </a:solidFill>
-                  </a:tcPr>
-                </a:tc>
-                <a:tc>
-                  <a:txBody>
-                    <a:bodyPr/>
-                    <a:lstStyle/>
-                    <a:p>
-                      <a:r>
-                        <a:rPr sz="900">
-                          <a:solidFill>
-                            <a:srgbClr val="1C2433"/>
-                          </a:solidFill>
-                          <a:latin typeface="Calibri"/>
-                        </a:rPr>
-                        <a:t>knn</a:t>
-                      </a:r>
-                    </a:p>
-                  </a:txBody>
-                  <a:tcPr>
-                    <a:solidFill>
-                      <a:srgbClr val="FFFFFF"/>
-                    </a:solidFill>
-                  </a:tcPr>
-                </a:tc>
-                <a:tc>
-                  <a:txBody>
-                    <a:bodyPr/>
-                    <a:lstStyle/>
-                    <a:p>
-                      <a:r>
-                        <a:rPr sz="900">
-                          <a:solidFill>
-                            <a:srgbClr val="1C2433"/>
-                          </a:solidFill>
-                          <a:latin typeface="Calibri"/>
-                        </a:rPr>
-                        <a:t>0.4215</a:t>
-                      </a:r>
-                    </a:p>
-                  </a:txBody>
-                  <a:tcPr>
-                    <a:solidFill>
-                      <a:srgbClr val="FFFFFF"/>
-                    </a:solidFill>
-                  </a:tcPr>
-                </a:tc>
-                <a:tc>
-                  <a:txBody>
-                    <a:bodyPr/>
-                    <a:lstStyle/>
-                    <a:p>
-                      <a:r>
-                        <a:rPr sz="900">
-                          <a:solidFill>
-                            <a:srgbClr val="1C2433"/>
-                          </a:solidFill>
-                          <a:latin typeface="Calibri"/>
-                        </a:rPr>
-                        <a:t>2044.8</a:t>
-                      </a:r>
-                    </a:p>
-                  </a:txBody>
-                  <a:tcPr>
-                    <a:solidFill>
-                      <a:srgbClr val="FFFFFF"/>
-                    </a:solidFill>
-                  </a:tcPr>
-                </a:tc>
-                <a:tc>
-                  <a:txBody>
-                    <a:bodyPr/>
-                    <a:lstStyle/>
-                    <a:p>
-                      <a:r>
-                        <a:rPr sz="900">
-                          <a:solidFill>
-                            <a:srgbClr val="1C2433"/>
-                          </a:solidFill>
-                          <a:latin typeface="Calibri"/>
-                        </a:rPr>
-                        <a:t>1083.5</a:t>
-                      </a:r>
-                    </a:p>
-                  </a:txBody>
-                  <a:tcPr>
-                    <a:solidFill>
-                      <a:srgbClr val="FFFFFF"/>
-                    </a:solidFill>
-                  </a:tcPr>
-                </a:tc>
-              </a:tr>
-              <a:tr h="262128">
-                <a:tc>
-                  <a:txBody>
-                    <a:bodyPr/>
-                    <a:lstStyle/>
-                    <a:p>
-                      <a:r>
-                        <a:rPr sz="900">
-                          <a:solidFill>
-                            <a:srgbClr val="1C2433"/>
-                          </a:solidFill>
-                          <a:latin typeface="Calibri"/>
-                        </a:rPr>
-                        <a:t>preditivo</a:t>
-                      </a:r>
-                    </a:p>
-                  </a:txBody>
-                  <a:tcPr>
-                    <a:solidFill>
-                      <a:srgbClr val="EEEADE"/>
-                    </a:solidFill>
-                  </a:tcPr>
-                </a:tc>
-                <a:tc>
-                  <a:txBody>
-                    <a:bodyPr/>
-                    <a:lstStyle/>
-                    <a:p>
-                      <a:r>
-                        <a:rPr sz="900">
-                          <a:solidFill>
-                            <a:srgbClr val="1C2433"/>
-                          </a:solidFill>
-                          <a:latin typeface="Calibri"/>
-                        </a:rPr>
-                        <a:t>gradient_boosting</a:t>
-                      </a:r>
-                    </a:p>
-                  </a:txBody>
-                  <a:tcPr>
-                    <a:solidFill>
-                      <a:srgbClr val="EEEADE"/>
-                    </a:solidFill>
-                  </a:tcPr>
-                </a:tc>
-                <a:tc>
-                  <a:txBody>
-                    <a:bodyPr/>
-                    <a:lstStyle/>
-                    <a:p>
-                      <a:r>
-                        <a:rPr sz="900">
-                          <a:solidFill>
-                            <a:srgbClr val="1C2433"/>
-                          </a:solidFill>
-                          <a:latin typeface="Calibri"/>
-                        </a:rPr>
-                        <a:t>0.4039</a:t>
-                      </a:r>
-                    </a:p>
-                  </a:txBody>
-                  <a:tcPr>
-                    <a:solidFill>
-                      <a:srgbClr val="EEEADE"/>
-                    </a:solidFill>
-                  </a:tcPr>
-                </a:tc>
-                <a:tc>
-                  <a:txBody>
-                    <a:bodyPr/>
-                    <a:lstStyle/>
-                    <a:p>
-                      <a:r>
-                        <a:rPr sz="900">
-                          <a:solidFill>
-                            <a:srgbClr val="1C2433"/>
-                          </a:solidFill>
-                          <a:latin typeface="Calibri"/>
-                        </a:rPr>
-                        <a:t>2075.7</a:t>
-                      </a:r>
-                    </a:p>
-                  </a:txBody>
-                  <a:tcPr>
-                    <a:solidFill>
-                      <a:srgbClr val="EEEADE"/>
-                    </a:solidFill>
-                  </a:tcPr>
-                </a:tc>
-                <a:tc>
-                  <a:txBody>
-                    <a:bodyPr/>
-                    <a:lstStyle/>
-                    <a:p>
-                      <a:r>
-                        <a:rPr sz="900">
-                          <a:solidFill>
-                            <a:srgbClr val="1C2433"/>
-                          </a:solidFill>
-                          <a:latin typeface="Calibri"/>
-                        </a:rPr>
-                        <a:t>1101.4</a:t>
-                      </a:r>
-                    </a:p>
-                  </a:txBody>
-                  <a:tcPr>
-                    <a:solidFill>
-                      <a:srgbClr val="EEEADE"/>
-                    </a:solidFill>
-                  </a:tcPr>
-                </a:tc>
-              </a:tr>
-              <a:tr h="262128">
-                <a:tc>
-                  <a:txBody>
-                    <a:bodyPr/>
-                    <a:lstStyle/>
-                    <a:p>
-                      <a:r>
-                        <a:rPr sz="900">
-                          <a:solidFill>
-                            <a:srgbClr val="1C2433"/>
-                          </a:solidFill>
-                          <a:latin typeface="Calibri"/>
-                        </a:rPr>
-                        <a:t>preditivo</a:t>
-                      </a:r>
-                    </a:p>
-                  </a:txBody>
-                  <a:tcPr>
-                    <a:solidFill>
-                      <a:srgbClr val="FFFFFF"/>
-                    </a:solidFill>
-                  </a:tcPr>
-                </a:tc>
-                <a:tc>
-                  <a:txBody>
-                    <a:bodyPr/>
-                    <a:lstStyle/>
-                    <a:p>
-                      <a:r>
-                        <a:rPr sz="900">
-                          <a:solidFill>
-                            <a:srgbClr val="1C2433"/>
-                          </a:solidFill>
-                          <a:latin typeface="Calibri"/>
-                        </a:rPr>
-                        <a:t>arvore_decisao</a:t>
-                      </a:r>
-                    </a:p>
-                  </a:txBody>
-                  <a:tcPr>
-                    <a:solidFill>
-                      <a:srgbClr val="FFFFFF"/>
-                    </a:solidFill>
-                  </a:tcPr>
-                </a:tc>
-                <a:tc>
-                  <a:txBody>
-                    <a:bodyPr/>
-                    <a:lstStyle/>
-                    <a:p>
-                      <a:r>
-                        <a:rPr sz="900">
-                          <a:solidFill>
-                            <a:srgbClr val="1C2433"/>
-                          </a:solidFill>
-                          <a:latin typeface="Calibri"/>
-                        </a:rPr>
-                        <a:t>0.3964</a:t>
-                      </a:r>
-                    </a:p>
-                  </a:txBody>
-                  <a:tcPr>
-                    <a:solidFill>
-                      <a:srgbClr val="FFFFFF"/>
-                    </a:solidFill>
-                  </a:tcPr>
-                </a:tc>
-                <a:tc>
-                  <a:txBody>
-                    <a:bodyPr/>
-                    <a:lstStyle/>
-                    <a:p>
-                      <a:r>
-                        <a:rPr sz="900">
-                          <a:solidFill>
-                            <a:srgbClr val="1C2433"/>
-                          </a:solidFill>
-                          <a:latin typeface="Calibri"/>
-                        </a:rPr>
-                        <a:t>2088.7</a:t>
-                      </a:r>
-                    </a:p>
-                  </a:txBody>
-                  <a:tcPr>
-                    <a:solidFill>
-                      <a:srgbClr val="FFFFFF"/>
-                    </a:solidFill>
-                  </a:tcPr>
-                </a:tc>
-                <a:tc>
-                  <a:txBody>
-                    <a:bodyPr/>
-                    <a:lstStyle/>
-                    <a:p>
-                      <a:r>
-                        <a:rPr sz="900">
-                          <a:solidFill>
-                            <a:srgbClr val="1C2433"/>
-                          </a:solidFill>
-                          <a:latin typeface="Calibri"/>
-                        </a:rPr>
-                        <a:t>1111.7</a:t>
-                      </a:r>
-                    </a:p>
-                  </a:txBody>
-                  <a:tcPr>
-                    <a:solidFill>
-                      <a:srgbClr val="FFFFFF"/>
-                    </a:solidFill>
-                  </a:tcPr>
-                </a:tc>
-              </a:tr>
-              <a:tr h="262128">
-                <a:tc>
-                  <a:txBody>
-                    <a:bodyPr/>
-                    <a:lstStyle/>
-                    <a:p>
-                      <a:r>
-                        <a:rPr sz="900">
-                          <a:solidFill>
-                            <a:srgbClr val="1C2433"/>
-                          </a:solidFill>
-                          <a:latin typeface="Calibri"/>
-                        </a:rPr>
-                        <a:t>preditivo</a:t>
-                      </a:r>
-                    </a:p>
-                  </a:txBody>
-                  <a:tcPr>
-                    <a:solidFill>
-                      <a:srgbClr val="EEEADE"/>
-                    </a:solidFill>
-                  </a:tcPr>
-                </a:tc>
-                <a:tc>
-                  <a:txBody>
-                    <a:bodyPr/>
-                    <a:lstStyle/>
-                    <a:p>
-                      <a:r>
-                        <a:rPr sz="900">
-                          <a:solidFill>
-                            <a:srgbClr val="1C2433"/>
-                          </a:solidFill>
-                          <a:latin typeface="Calibri"/>
-                        </a:rPr>
-                        <a:t>regressao_polinomial_grau_2</a:t>
-                      </a:r>
-                    </a:p>
-                  </a:txBody>
-                  <a:tcPr>
-                    <a:solidFill>
-                      <a:srgbClr val="EEEADE"/>
-                    </a:solidFill>
-                  </a:tcPr>
-                </a:tc>
-                <a:tc>
-                  <a:txBody>
-                    <a:bodyPr/>
-                    <a:lstStyle/>
-                    <a:p>
-                      <a:r>
-                        <a:rPr sz="900">
-                          <a:solidFill>
-                            <a:srgbClr val="1C2433"/>
-                          </a:solidFill>
-                          <a:latin typeface="Calibri"/>
-                        </a:rPr>
-                        <a:t>0.1159</a:t>
-                      </a:r>
-                    </a:p>
-                  </a:txBody>
-                  <a:tcPr>
-                    <a:solidFill>
-                      <a:srgbClr val="EEEADE"/>
-                    </a:solidFill>
-                  </a:tcPr>
-                </a:tc>
-                <a:tc>
-                  <a:txBody>
-                    <a:bodyPr/>
-                    <a:lstStyle/>
-                    <a:p>
-                      <a:r>
-                        <a:rPr sz="900">
-                          <a:solidFill>
-                            <a:srgbClr val="1C2433"/>
-                          </a:solidFill>
-                          <a:latin typeface="Calibri"/>
-                        </a:rPr>
-                        <a:t>2527.9</a:t>
-                      </a:r>
-                    </a:p>
-                  </a:txBody>
-                  <a:tcPr>
-                    <a:solidFill>
-                      <a:srgbClr val="EEEADE"/>
-                    </a:solidFill>
-                  </a:tcPr>
-                </a:tc>
-                <a:tc>
-                  <a:txBody>
-                    <a:bodyPr/>
-                    <a:lstStyle/>
-                    <a:p>
-                      <a:r>
-                        <a:rPr sz="900">
-                          <a:solidFill>
-                            <a:srgbClr val="1C2433"/>
-                          </a:solidFill>
-                          <a:latin typeface="Calibri"/>
-                        </a:rPr>
-                        <a:t>1366.9</a:t>
-                      </a:r>
-                    </a:p>
-                  </a:txBody>
-                  <a:tcPr>
-                    <a:solidFill>
-                      <a:srgbClr val="EEEADE"/>
-                    </a:solidFill>
-                  </a:tcPr>
-                </a:tc>
-              </a:tr>
-              <a:tr h="262128">
-                <a:tc>
-                  <a:txBody>
-                    <a:bodyPr/>
-                    <a:lstStyle/>
-                    <a:p>
-                      <a:r>
-                        <a:rPr sz="900">
-                          <a:solidFill>
-                            <a:srgbClr val="1C2433"/>
-                          </a:solidFill>
-                          <a:latin typeface="Calibri"/>
-                        </a:rPr>
-                        <a:t>preditivo</a:t>
-                      </a:r>
-                    </a:p>
-                  </a:txBody>
-                  <a:tcPr>
-                    <a:solidFill>
-                      <a:srgbClr val="FFFFFF"/>
-                    </a:solidFill>
-                  </a:tcPr>
-                </a:tc>
-                <a:tc>
-                  <a:txBody>
-                    <a:bodyPr/>
-                    <a:lstStyle/>
-                    <a:p>
-                      <a:r>
-                        <a:rPr sz="900">
-                          <a:solidFill>
-                            <a:srgbClr val="1C2433"/>
-                          </a:solidFill>
-                          <a:latin typeface="Calibri"/>
-                        </a:rPr>
-                        <a:t>ridge</a:t>
-                      </a:r>
-                    </a:p>
-                  </a:txBody>
-                  <a:tcPr>
-                    <a:solidFill>
-                      <a:srgbClr val="FFFFFF"/>
-                    </a:solidFill>
-                  </a:tcPr>
-                </a:tc>
-                <a:tc>
-                  <a:txBody>
-                    <a:bodyPr/>
-                    <a:lstStyle/>
-                    <a:p>
-                      <a:r>
-                        <a:rPr sz="900">
-                          <a:solidFill>
-                            <a:srgbClr val="1C2433"/>
-                          </a:solidFill>
-                          <a:latin typeface="Calibri"/>
-                        </a:rPr>
-                        <a:t>-0.1288</a:t>
-                      </a:r>
-                    </a:p>
-                  </a:txBody>
-                  <a:tcPr>
-                    <a:solidFill>
-                      <a:srgbClr val="FFFFFF"/>
-                    </a:solidFill>
-                  </a:tcPr>
-                </a:tc>
-                <a:tc>
-                  <a:txBody>
-                    <a:bodyPr/>
-                    <a:lstStyle/>
-                    <a:p>
-                      <a:r>
-                        <a:rPr sz="900">
-                          <a:solidFill>
-                            <a:srgbClr val="1C2433"/>
-                          </a:solidFill>
-                          <a:latin typeface="Calibri"/>
-                        </a:rPr>
-                        <a:t>2856.4</a:t>
-                      </a:r>
-                    </a:p>
-                  </a:txBody>
-                  <a:tcPr>
-                    <a:solidFill>
-                      <a:srgbClr val="FFFFFF"/>
-                    </a:solidFill>
-                  </a:tcPr>
-                </a:tc>
-                <a:tc>
-                  <a:txBody>
-                    <a:bodyPr/>
-                    <a:lstStyle/>
-                    <a:p>
-                      <a:r>
-                        <a:rPr sz="900">
-                          <a:solidFill>
-                            <a:srgbClr val="1C2433"/>
-                          </a:solidFill>
-                          <a:latin typeface="Calibri"/>
-                        </a:rPr>
-                        <a:t>1287.2</a:t>
-                      </a:r>
-                    </a:p>
-                  </a:txBody>
-                  <a:tcPr>
-                    <a:solidFill>
-                      <a:srgbClr val="FFFFFF"/>
-                    </a:solidFill>
-                  </a:tcPr>
-                </a:tc>
-              </a:tr>
-              <a:tr h="262128">
-                <a:tc>
-                  <a:txBody>
-                    <a:bodyPr/>
-                    <a:lstStyle/>
-                    <a:p>
-                      <a:r>
-                        <a:rPr sz="900">
-                          <a:solidFill>
-                            <a:srgbClr val="1C2433"/>
-                          </a:solidFill>
-                          <a:latin typeface="Calibri"/>
-                        </a:rPr>
-                        <a:t>preditivo</a:t>
-                      </a:r>
-                    </a:p>
-                  </a:txBody>
-                  <a:tcPr>
-                    <a:solidFill>
-                      <a:srgbClr val="EEEADE"/>
-                    </a:solidFill>
-                  </a:tcPr>
-                </a:tc>
-                <a:tc>
-                  <a:txBody>
-                    <a:bodyPr/>
-                    <a:lstStyle/>
-                    <a:p>
-                      <a:r>
-                        <a:rPr sz="900">
-                          <a:solidFill>
-                            <a:srgbClr val="1C2433"/>
-                          </a:solidFill>
-                          <a:latin typeface="Calibri"/>
-                        </a:rPr>
-                        <a:t>regressao_linear_multipla</a:t>
-                      </a:r>
-                    </a:p>
-                  </a:txBody>
-                  <a:tcPr>
-                    <a:solidFill>
-                      <a:srgbClr val="EEEADE"/>
-                    </a:solidFill>
-                  </a:tcPr>
-                </a:tc>
-                <a:tc>
-                  <a:txBody>
-                    <a:bodyPr/>
-                    <a:lstStyle/>
-                    <a:p>
-                      <a:r>
-                        <a:rPr sz="900">
-                          <a:solidFill>
-                            <a:srgbClr val="1C2433"/>
-                          </a:solidFill>
-                          <a:latin typeface="Calibri"/>
-                        </a:rPr>
-                        <a:t>-0.1331</a:t>
-                      </a:r>
-                    </a:p>
-                  </a:txBody>
-                  <a:tcPr>
-                    <a:solidFill>
-                      <a:srgbClr val="EEEADE"/>
-                    </a:solidFill>
-                  </a:tcPr>
-                </a:tc>
-                <a:tc>
-                  <a:txBody>
-                    <a:bodyPr/>
-                    <a:lstStyle/>
-                    <a:p>
-                      <a:r>
-                        <a:rPr sz="900">
-                          <a:solidFill>
-                            <a:srgbClr val="1C2433"/>
-                          </a:solidFill>
-                          <a:latin typeface="Calibri"/>
-                        </a:rPr>
-                        <a:t>2861.8</a:t>
-                      </a:r>
-                    </a:p>
-                  </a:txBody>
-                  <a:tcPr>
-                    <a:solidFill>
-                      <a:srgbClr val="EEEADE"/>
-                    </a:solidFill>
-                  </a:tcPr>
-                </a:tc>
-                <a:tc>
-                  <a:txBody>
-                    <a:bodyPr/>
-                    <a:lstStyle/>
-                    <a:p>
-                      <a:r>
-                        <a:rPr sz="900">
-                          <a:solidFill>
-                            <a:srgbClr val="1C2433"/>
-                          </a:solidFill>
-                          <a:latin typeface="Calibri"/>
-                        </a:rPr>
-                        <a:t>1288.2</a:t>
-                      </a:r>
-                    </a:p>
-                  </a:txBody>
-                  <a:tcPr>
-                    <a:solidFill>
-                      <a:srgbClr val="EEEADE"/>
                     </a:solidFill>
                   </a:tcPr>
                 </a:tc>
@@ -39869,60 +39067,14 @@
       </p:graphicFrame>
       <p:sp>
         <p:nvSpPr>
-          <p:cNvPr id="8" name="Rectangle 7"/>
-          <p:cNvSpPr/>
-          <p:nvPr/>
-        </p:nvSpPr>
-        <p:spPr>
-          <a:xfrm>
-            <a:off x="7772400" y="2103120"/>
-            <a:ext cx="3840480" cy="1051560"/>
-          </a:xfrm>
-          <a:prstGeom prst="rect">
-            <a:avLst/>
-          </a:prstGeom>
-          <a:solidFill>
-            <a:srgbClr val="FFFFFF"/>
-          </a:solidFill>
-          <a:ln>
-            <a:solidFill>
-              <a:srgbClr val="142B45"/>
-            </a:solidFill>
-          </a:ln>
-          <a:effectLst/>
-        </p:spPr>
-        <p:style>
-          <a:lnRef idx="1">
-            <a:schemeClr val="accent1"/>
-          </a:lnRef>
-          <a:fillRef idx="3">
-            <a:schemeClr val="accent1"/>
-          </a:fillRef>
-          <a:effectRef idx="2">
-            <a:schemeClr val="accent1"/>
-          </a:effectRef>
-          <a:fontRef idx="minor">
-            <a:schemeClr val="lt1"/>
-          </a:fontRef>
-        </p:style>
-        <p:txBody>
-          <a:bodyPr rtlCol="0" anchor="ctr"/>
-          <a:lstStyle/>
-          <a:p>
-            <a:pPr algn="ctr"/>
-          </a:p>
-        </p:txBody>
-      </p:sp>
-      <p:sp>
-        <p:nvSpPr>
-          <p:cNvPr id="9" name="TextBox 8"/>
+          <p:cNvPr id="8" name="TextBox 7"/>
           <p:cNvSpPr txBox="1"/>
           <p:nvPr/>
         </p:nvSpPr>
         <p:spPr>
           <a:xfrm>
-            <a:off x="7955279" y="2176272"/>
-            <a:ext cx="3474720" cy="411480"/>
+            <a:off x="822960" y="4846320"/>
+            <a:ext cx="10607040" cy="1463040"/>
           </a:xfrm>
           <a:prstGeom prst="rect">
             <a:avLst/>
@@ -39935,201 +39087,19 @@
           </a:bodyPr>
           <a:lstStyle/>
           <a:p>
-            <a:r>
-              <a:rPr sz="2200" b="1">
-                <a:solidFill>
-                  <a:srgbClr val="E8713A"/>
-                </a:solidFill>
-                <a:latin typeface="Calibri"/>
-              </a:rPr>
-              <a:t>0.4323</a:t>
-            </a:r>
-          </a:p>
-        </p:txBody>
-      </p:sp>
-      <p:sp>
-        <p:nvSpPr>
-          <p:cNvPr id="10" name="TextBox 9"/>
-          <p:cNvSpPr txBox="1"/>
-          <p:nvPr/>
-        </p:nvSpPr>
-        <p:spPr>
-          <a:xfrm>
-            <a:off x="7955279" y="2633472"/>
-            <a:ext cx="3474720" cy="274320"/>
-          </a:xfrm>
-          <a:prstGeom prst="rect">
-            <a:avLst/>
-          </a:prstGeom>
-          <a:noFill/>
-        </p:spPr>
-        <p:txBody>
-          <a:bodyPr wrap="square">
-            <a:spAutoFit/>
-          </a:bodyPr>
-          <a:lstStyle/>
-          <a:p>
-            <a:r>
-              <a:rPr sz="1100" b="0">
-                <a:solidFill>
-                  <a:srgbClr val="5B636E"/>
-                </a:solidFill>
-                <a:latin typeface="Calibri"/>
-              </a:rPr>
-              <a:t>melhor preditivo (random_forest)</a:t>
-            </a:r>
-          </a:p>
-        </p:txBody>
-      </p:sp>
-      <p:sp>
-        <p:nvSpPr>
-          <p:cNvPr id="11" name="Rectangle 10"/>
-          <p:cNvSpPr/>
-          <p:nvPr/>
-        </p:nvSpPr>
-        <p:spPr>
-          <a:xfrm>
-            <a:off x="7772400" y="3337560"/>
-            <a:ext cx="3840480" cy="1051560"/>
-          </a:xfrm>
-          <a:prstGeom prst="rect">
-            <a:avLst/>
-          </a:prstGeom>
-          <a:solidFill>
-            <a:srgbClr val="FFFFFF"/>
-          </a:solidFill>
-          <a:ln>
-            <a:solidFill>
-              <a:srgbClr val="142B45"/>
-            </a:solidFill>
-          </a:ln>
-          <a:effectLst/>
-        </p:spPr>
-        <p:style>
-          <a:lnRef idx="1">
-            <a:schemeClr val="accent1"/>
-          </a:lnRef>
-          <a:fillRef idx="3">
-            <a:schemeClr val="accent1"/>
-          </a:fillRef>
-          <a:effectRef idx="2">
-            <a:schemeClr val="accent1"/>
-          </a:effectRef>
-          <a:fontRef idx="minor">
-            <a:schemeClr val="lt1"/>
-          </a:fontRef>
-        </p:style>
-        <p:txBody>
-          <a:bodyPr rtlCol="0" anchor="ctr"/>
-          <a:lstStyle/>
-          <a:p>
-            <a:pPr algn="ctr"/>
-          </a:p>
-        </p:txBody>
-      </p:sp>
-      <p:sp>
-        <p:nvSpPr>
-          <p:cNvPr id="12" name="TextBox 11"/>
-          <p:cNvSpPr txBox="1"/>
-          <p:nvPr/>
-        </p:nvSpPr>
-        <p:spPr>
-          <a:xfrm>
-            <a:off x="7955279" y="3410712"/>
-            <a:ext cx="3474720" cy="411480"/>
-          </a:xfrm>
-          <a:prstGeom prst="rect">
-            <a:avLst/>
-          </a:prstGeom>
-          <a:noFill/>
-        </p:spPr>
-        <p:txBody>
-          <a:bodyPr wrap="square">
-            <a:spAutoFit/>
-          </a:bodyPr>
-          <a:lstStyle/>
-          <a:p>
-            <a:r>
-              <a:rPr sz="2200" b="1">
-                <a:solidFill>
-                  <a:srgbClr val="142B45"/>
-                </a:solidFill>
-                <a:latin typeface="Calibri"/>
-              </a:rPr>
-              <a:t>0.5700</a:t>
-            </a:r>
-          </a:p>
-        </p:txBody>
-      </p:sp>
-      <p:sp>
-        <p:nvSpPr>
-          <p:cNvPr id="13" name="TextBox 12"/>
-          <p:cNvSpPr txBox="1"/>
-          <p:nvPr/>
-        </p:nvSpPr>
-        <p:spPr>
-          <a:xfrm>
-            <a:off x="7955279" y="3867911"/>
-            <a:ext cx="3474720" cy="274320"/>
-          </a:xfrm>
-          <a:prstGeom prst="rect">
-            <a:avLst/>
-          </a:prstGeom>
-          <a:noFill/>
-        </p:spPr>
-        <p:txBody>
-          <a:bodyPr wrap="square">
-            <a:spAutoFit/>
-          </a:bodyPr>
-          <a:lstStyle/>
-          <a:p>
-            <a:r>
-              <a:rPr sz="1100" b="0">
-                <a:solidFill>
-                  <a:srgbClr val="5B636E"/>
-                </a:solidFill>
-                <a:latin typeface="Calibri"/>
-              </a:rPr>
-              <a:t>melhor explicativo (random_forest)</a:t>
-            </a:r>
-          </a:p>
-        </p:txBody>
-      </p:sp>
-      <p:sp>
-        <p:nvSpPr>
-          <p:cNvPr id="14" name="TextBox 13"/>
-          <p:cNvSpPr txBox="1"/>
-          <p:nvPr/>
-        </p:nvSpPr>
-        <p:spPr>
-          <a:xfrm>
-            <a:off x="7772400" y="4617720"/>
-            <a:ext cx="3931920" cy="1554480"/>
-          </a:xfrm>
-          <a:prstGeom prst="rect">
-            <a:avLst/>
-          </a:prstGeom>
-          <a:noFill/>
-        </p:spPr>
-        <p:txBody>
-          <a:bodyPr wrap="square">
-            <a:spAutoFit/>
-          </a:bodyPr>
-          <a:lstStyle/>
-          <a:p>
             <a:pPr>
               <a:spcAft>
                 <a:spcPts val="700"/>
               </a:spcAft>
             </a:pPr>
             <a:r>
-              <a:rPr sz="1200">
+              <a:rPr sz="1400">
                 <a:solidFill>
                   <a:srgbClr val="1C2433"/>
                 </a:solidFill>
                 <a:latin typeface="Calibri"/>
               </a:rPr>
-              <a:t>•  Árvores e ensembles superam os lineares.</a:t>
+              <a:t>•  A fonte permanece ÚNICA: o contrato veio dentro do próprio CSV consolidado, sem join novo.</a:t>
             </a:r>
           </a:p>
           <a:p>
@@ -40139,13 +39109,13 @@
               </a:spcAft>
             </a:pPr>
             <a:r>
-              <a:rPr sz="1200">
+              <a:rPr sz="1400">
                 <a:solidFill>
                   <a:srgbClr val="1C2433"/>
                 </a:solidFill>
                 <a:latin typeface="Calibri"/>
               </a:rPr>
-              <a:t>•  Fatores dominantes: refrigeração, histórico defasado e uso.</a:t>
+              <a:t>•  Todos os slides da apresentação anterior foram mantidos, na mesma ordem — os números é que foram atualizados.</a:t>
             </a:r>
           </a:p>
         </p:txBody>
@@ -40285,7 +39255,7 @@
                 </a:solidFill>
                 <a:latin typeface="Calibri"/>
               </a:rPr>
-              <a:t>ITEM 12 · RESULTADOS PRELIMINARES</a:t>
+              <a:t>ITEM 12 · RESULTADOS FINAIS</a:t>
             </a:r>
           </a:p>
         </p:txBody>
@@ -40319,7 +39289,7 @@
                 </a:solidFill>
                 <a:latin typeface="Calibri"/>
               </a:rPr>
-              <a:t>2ª tentativa — contrato incluído e divisão por refrigeração</a:t>
+              <a:t>Y1 e Y2 no teste de 2025</a:t>
             </a:r>
           </a:p>
         </p:txBody>
@@ -40353,7 +39323,7 @@
                 </a:solidFill>
                 <a:latin typeface="Calibri"/>
               </a:rPr>
-              <a:t>Duas mudanças testadas nesta fase: (a) incluir as variáveis de contrato; (b) treinar um modelo para refrigeradas e outro para secas.</a:t>
+              <a:t>Treino 2020–2024, teste 2025. Só entram variáveis conhecidas no início do ano: atributos da carreta e histórico até o ano anterior.</a:t>
             </a:r>
           </a:p>
         </p:txBody>
@@ -40367,8 +39337,8 @@
           <p:nvPr/>
         </p:nvGraphicFramePr>
         <p:xfrm>
-          <a:off x="640080" y="2057400"/>
-          <a:ext cx="10972800" cy="1371600"/>
+          <a:off x="640080" y="2011680"/>
+          <a:ext cx="6949440" cy="1737360"/>
         </p:xfrm>
         <a:graphic>
           <a:graphicData uri="http://schemas.openxmlformats.org/drawingml/2006/table">
@@ -40377,25 +39347,26 @@
                 <a:tableStyleId>{5C22544A-7EE6-4342-B048-85BDC9FD1C3A}</a:tableStyleId>
               </a:tblPr>
               <a:tblGrid>
-                <a:gridCol w="2743200"/>
-                <a:gridCol w="2743200"/>
-                <a:gridCol w="2743200"/>
-                <a:gridCol w="2743200"/>
+                <a:gridCol w="1389888"/>
+                <a:gridCol w="1389888"/>
+                <a:gridCol w="1389888"/>
+                <a:gridCol w="1389888"/>
+                <a:gridCol w="1389888"/>
               </a:tblGrid>
-              <a:tr h="457200">
-                <a:tc>
-                  <a:txBody>
-                    <a:bodyPr/>
-                    <a:lstStyle/>
-                    <a:p>
-                      <a:r>
-                        <a:rPr sz="1200" b="1">
+              <a:tr h="434340">
+                <a:tc>
+                  <a:txBody>
+                    <a:bodyPr/>
+                    <a:lstStyle/>
+                    <a:p>
+                      <a:r>
+                        <a:rPr sz="1100" b="1">
                           <a:solidFill>
                             <a:srgbClr val="FFFFFF"/>
                           </a:solidFill>
                           <a:latin typeface="Calibri"/>
                         </a:rPr>
-                        <a:t>o que foi testado</a:t>
+                        <a:t>alvo / caminho</a:t>
                       </a:r>
                     </a:p>
                   </a:txBody>
@@ -40411,13 +39382,13 @@
                     <a:lstStyle/>
                     <a:p>
                       <a:r>
-                        <a:rPr sz="1200" b="1">
+                        <a:rPr sz="1100" b="1">
                           <a:solidFill>
                             <a:srgbClr val="FFFFFF"/>
                           </a:solidFill>
                           <a:latin typeface="Calibri"/>
                         </a:rPr>
-                        <a:t>R² preditivo</a:t>
+                        <a:t>modelo</a:t>
                       </a:r>
                     </a:p>
                   </a:txBody>
@@ -40433,13 +39404,13 @@
                     <a:lstStyle/>
                     <a:p>
                       <a:r>
-                        <a:rPr sz="1200" b="1">
+                        <a:rPr sz="1100" b="1">
                           <a:solidFill>
                             <a:srgbClr val="FFFFFF"/>
                           </a:solidFill>
                           <a:latin typeface="Calibri"/>
                         </a:rPr>
-                        <a:t>diferença</a:t>
+                        <a:t>R²</a:t>
                       </a:r>
                     </a:p>
                   </a:txBody>
@@ -40455,13 +39426,13 @@
                     <a:lstStyle/>
                     <a:p>
                       <a:r>
-                        <a:rPr sz="1200" b="1">
+                        <a:rPr sz="1100" b="1">
                           <a:solidFill>
                             <a:srgbClr val="FFFFFF"/>
                           </a:solidFill>
                           <a:latin typeface="Calibri"/>
                         </a:rPr>
-                        <a:t>veredito</a:t>
+                        <a:t>RMSE</a:t>
                       </a:r>
                     </a:p>
                   </a:txBody>
@@ -40471,21 +39442,43 @@
                     </a:solidFill>
                   </a:tcPr>
                 </a:tc>
+                <a:tc>
+                  <a:txBody>
+                    <a:bodyPr/>
+                    <a:lstStyle/>
+                    <a:p>
+                      <a:r>
+                        <a:rPr sz="1100" b="1">
+                          <a:solidFill>
+                            <a:srgbClr val="FFFFFF"/>
+                          </a:solidFill>
+                          <a:latin typeface="Calibri"/>
+                        </a:rPr>
+                        <a:t>MAE</a:t>
+                      </a:r>
+                    </a:p>
+                  </a:txBody>
+                  <a:tcPr>
+                    <a:solidFill>
+                      <a:srgbClr val="142B45"/>
+                    </a:solidFill>
+                  </a:tcPr>
+                </a:tc>
               </a:tr>
-              <a:tr h="457200">
-                <a:tc>
-                  <a:txBody>
-                    <a:bodyPr/>
-                    <a:lstStyle/>
-                    <a:p>
-                      <a:r>
-                        <a:rPr sz="1200">
+              <a:tr h="434340">
+                <a:tc>
+                  <a:txBody>
+                    <a:bodyPr/>
+                    <a:lstStyle/>
+                    <a:p>
+                      <a:r>
+                        <a:rPr sz="1100">
                           <a:solidFill>
                             <a:srgbClr val="1C2433"/>
                           </a:solidFill>
                           <a:latin typeface="Calibri"/>
                         </a:rPr>
-                        <a:t>(a) incluir variáveis de contrato</a:t>
+                        <a:t>Y1 · custo anual — direto</a:t>
                       </a:r>
                     </a:p>
                   </a:txBody>
@@ -40501,13 +39494,13 @@
                     <a:lstStyle/>
                     <a:p>
                       <a:r>
-                        <a:rPr sz="1200">
+                        <a:rPr sz="1100">
                           <a:solidFill>
                             <a:srgbClr val="1C2433"/>
                           </a:solidFill>
                           <a:latin typeface="Calibri"/>
                         </a:rPr>
-                        <a:t>0.4516 → 0.4549</a:t>
+                        <a:t>gradient_boosting</a:t>
                       </a:r>
                     </a:p>
                   </a:txBody>
@@ -40523,13 +39516,13 @@
                     <a:lstStyle/>
                     <a:p>
                       <a:r>
-                        <a:rPr sz="1200">
+                        <a:rPr sz="1100">
                           <a:solidFill>
                             <a:srgbClr val="1C2433"/>
                           </a:solidFill>
                           <a:latin typeface="Calibri"/>
                         </a:rPr>
-                        <a:t>+0.0033</a:t>
+                        <a:t>0,4418</a:t>
                       </a:r>
                     </a:p>
                   </a:txBody>
@@ -40545,13 +39538,13 @@
                     <a:lstStyle/>
                     <a:p>
                       <a:r>
-                        <a:rPr sz="1200">
+                        <a:rPr sz="1100">
                           <a:solidFill>
                             <a:srgbClr val="1C2433"/>
                           </a:solidFill>
                           <a:latin typeface="Calibri"/>
                         </a:rPr>
-                        <a:t>efeito desprezível</a:t>
+                        <a:t>2008,7</a:t>
                       </a:r>
                     </a:p>
                   </a:txBody>
@@ -40561,21 +39554,43 @@
                     </a:solidFill>
                   </a:tcPr>
                 </a:tc>
+                <a:tc>
+                  <a:txBody>
+                    <a:bodyPr/>
+                    <a:lstStyle/>
+                    <a:p>
+                      <a:r>
+                        <a:rPr sz="1100">
+                          <a:solidFill>
+                            <a:srgbClr val="1C2433"/>
+                          </a:solidFill>
+                          <a:latin typeface="Calibri"/>
+                        </a:rPr>
+                        <a:t>1074,3</a:t>
+                      </a:r>
+                    </a:p>
+                  </a:txBody>
+                  <a:tcPr>
+                    <a:solidFill>
+                      <a:srgbClr val="FFFFFF"/>
+                    </a:solidFill>
+                  </a:tcPr>
+                </a:tc>
               </a:tr>
-              <a:tr h="457200">
-                <a:tc>
-                  <a:txBody>
-                    <a:bodyPr/>
-                    <a:lstStyle/>
-                    <a:p>
-                      <a:r>
-                        <a:rPr sz="1200">
+              <a:tr h="434340">
+                <a:tc>
+                  <a:txBody>
+                    <a:bodyPr/>
+                    <a:lstStyle/>
+                    <a:p>
+                      <a:r>
+                        <a:rPr sz="1100">
                           <a:solidFill>
                             <a:srgbClr val="1C2433"/>
                           </a:solidFill>
                           <a:latin typeface="Calibri"/>
                         </a:rPr>
-                        <a:t>(b) dividir por refrigeração (teste 2025)</a:t>
+                        <a:t>Y1 · custo anual — decomposto</a:t>
                       </a:r>
                     </a:p>
                   </a:txBody>
@@ -40591,13 +39606,13 @@
                     <a:lstStyle/>
                     <a:p>
                       <a:r>
-                        <a:rPr sz="1200">
+                        <a:rPr sz="1100">
                           <a:solidFill>
                             <a:srgbClr val="1C2433"/>
                           </a:solidFill>
                           <a:latin typeface="Calibri"/>
                         </a:rPr>
-                        <a:t>0.4549 → 0.4673</a:t>
+                        <a:t>nº de OS × custo médio</a:t>
                       </a:r>
                     </a:p>
                   </a:txBody>
@@ -40613,13 +39628,13 @@
                     <a:lstStyle/>
                     <a:p>
                       <a:r>
-                        <a:rPr sz="1200">
+                        <a:rPr sz="1100">
                           <a:solidFill>
                             <a:srgbClr val="1C2433"/>
                           </a:solidFill>
                           <a:latin typeface="Calibri"/>
                         </a:rPr>
-                        <a:t>+0.0124</a:t>
+                        <a:t>0,4713</a:t>
                       </a:r>
                     </a:p>
                   </a:txBody>
@@ -40635,19 +39650,153 @@
                     <a:lstStyle/>
                     <a:p>
                       <a:r>
-                        <a:rPr sz="1200">
+                        <a:rPr sz="1100">
                           <a:solidFill>
                             <a:srgbClr val="1C2433"/>
                           </a:solidFill>
                           <a:latin typeface="Calibri"/>
                         </a:rPr>
-                        <a:t>promissor — exigiu validação</a:t>
+                        <a:t>1954,9</a:t>
                       </a:r>
                     </a:p>
                   </a:txBody>
                   <a:tcPr>
                     <a:solidFill>
                       <a:srgbClr val="EEEADE"/>
+                    </a:solidFill>
+                  </a:tcPr>
+                </a:tc>
+                <a:tc>
+                  <a:txBody>
+                    <a:bodyPr/>
+                    <a:lstStyle/>
+                    <a:p>
+                      <a:r>
+                        <a:rPr sz="1100">
+                          <a:solidFill>
+                            <a:srgbClr val="1C2433"/>
+                          </a:solidFill>
+                          <a:latin typeface="Calibri"/>
+                        </a:rPr>
+                        <a:t>1059,0</a:t>
+                      </a:r>
+                    </a:p>
+                  </a:txBody>
+                  <a:tcPr>
+                    <a:solidFill>
+                      <a:srgbClr val="EEEADE"/>
+                    </a:solidFill>
+                  </a:tcPr>
+                </a:tc>
+              </a:tr>
+              <a:tr h="434340">
+                <a:tc>
+                  <a:txBody>
+                    <a:bodyPr/>
+                    <a:lstStyle/>
+                    <a:p>
+                      <a:r>
+                        <a:rPr sz="1100">
+                          <a:solidFill>
+                            <a:srgbClr val="1C2433"/>
+                          </a:solidFill>
+                          <a:latin typeface="Calibri"/>
+                        </a:rPr>
+                        <a:t>Y2 · nº de OS no ano</a:t>
+                      </a:r>
+                    </a:p>
+                  </a:txBody>
+                  <a:tcPr>
+                    <a:solidFill>
+                      <a:srgbClr val="FFFFFF"/>
+                    </a:solidFill>
+                  </a:tcPr>
+                </a:tc>
+                <a:tc>
+                  <a:txBody>
+                    <a:bodyPr/>
+                    <a:lstStyle/>
+                    <a:p>
+                      <a:r>
+                        <a:rPr sz="1100">
+                          <a:solidFill>
+                            <a:srgbClr val="1C2433"/>
+                          </a:solidFill>
+                          <a:latin typeface="Calibri"/>
+                        </a:rPr>
+                        <a:t>random_forest</a:t>
+                      </a:r>
+                    </a:p>
+                  </a:txBody>
+                  <a:tcPr>
+                    <a:solidFill>
+                      <a:srgbClr val="FFFFFF"/>
+                    </a:solidFill>
+                  </a:tcPr>
+                </a:tc>
+                <a:tc>
+                  <a:txBody>
+                    <a:bodyPr/>
+                    <a:lstStyle/>
+                    <a:p>
+                      <a:r>
+                        <a:rPr sz="1100">
+                          <a:solidFill>
+                            <a:srgbClr val="1C2433"/>
+                          </a:solidFill>
+                          <a:latin typeface="Calibri"/>
+                        </a:rPr>
+                        <a:t>0,6080</a:t>
+                      </a:r>
+                    </a:p>
+                  </a:txBody>
+                  <a:tcPr>
+                    <a:solidFill>
+                      <a:srgbClr val="FFFFFF"/>
+                    </a:solidFill>
+                  </a:tcPr>
+                </a:tc>
+                <a:tc>
+                  <a:txBody>
+                    <a:bodyPr/>
+                    <a:lstStyle/>
+                    <a:p>
+                      <a:r>
+                        <a:rPr sz="1100">
+                          <a:solidFill>
+                            <a:srgbClr val="1C2433"/>
+                          </a:solidFill>
+                          <a:latin typeface="Calibri"/>
+                        </a:rPr>
+                        <a:t>2,77</a:t>
+                      </a:r>
+                    </a:p>
+                  </a:txBody>
+                  <a:tcPr>
+                    <a:solidFill>
+                      <a:srgbClr val="FFFFFF"/>
+                    </a:solidFill>
+                  </a:tcPr>
+                </a:tc>
+                <a:tc>
+                  <a:txBody>
+                    <a:bodyPr/>
+                    <a:lstStyle/>
+                    <a:p>
+                      <a:r>
+                        <a:rPr sz="1100">
+                          <a:solidFill>
+                            <a:srgbClr val="1C2433"/>
+                          </a:solidFill>
+                          <a:latin typeface="Calibri"/>
+                        </a:rPr>
+                        <a:t>1,89</a:t>
+                      </a:r>
+                    </a:p>
+                  </a:txBody>
+                  <a:tcPr>
+                    <a:solidFill>
+                      <a:srgbClr val="FFFFFF"/>
                     </a:solidFill>
                   </a:tcPr>
                 </a:tc>
@@ -40664,8 +39813,8 @@
         </p:nvSpPr>
         <p:spPr>
           <a:xfrm>
-            <a:off x="822960" y="3749039"/>
-            <a:ext cx="10607040" cy="2377440"/>
+            <a:off x="7772400" y="2057400"/>
+            <a:ext cx="3931920" cy="2651760"/>
           </a:xfrm>
           <a:prstGeom prst="rect">
             <a:avLst/>
@@ -40684,13 +39833,13 @@
               </a:spcAft>
             </a:pPr>
             <a:r>
-              <a:rPr sz="1300">
+              <a:rPr sz="1200">
                 <a:solidFill>
                   <a:srgbClr val="1C2433"/>
                 </a:solidFill>
                 <a:latin typeface="Calibri"/>
               </a:rPr>
-              <a:t>•  As variáveis de contrato quase não acrescentam poder preditivo: +0,0033 de R², contra +0,0193 apenas por restringir a população a MAINT.</a:t>
+              <a:t>•  Y2 é mais previsível que Y1: 0,608 contra 0,442.</a:t>
             </a:r>
           </a:p>
           <a:p>
@@ -40700,13 +39849,13 @@
               </a:spcAft>
             </a:pPr>
             <a:r>
-              <a:rPr sz="1300">
+              <a:rPr sz="1200">
                 <a:solidFill>
                   <a:srgbClr val="1C2433"/>
                 </a:solidFill>
                 <a:latin typeface="Calibri"/>
               </a:rPr>
-              <a:t>•  Como flag_refrigerado é a variável mais importante do modelo (0,169), testamos tratá-la como grupo — a lógica do MERF de Katreddi (2023).</a:t>
+              <a:t>•  Em Y2 a regressão linear chega a R² 0,577 — a 0,031 do Random Forest.</a:t>
             </a:r>
           </a:p>
           <a:p>
@@ -40716,29 +39865,102 @@
               </a:spcAft>
             </a:pPr>
             <a:r>
-              <a:rPr sz="1300">
+              <a:rPr sz="1200">
                 <a:solidFill>
                   <a:srgbClr val="1C2433"/>
                 </a:solidFill>
                 <a:latin typeface="Calibri"/>
               </a:rPr>
-              <a:t>•  Testando só em 2025, dividir parecia vencer com folga (bootstrap de 2.000 reamostragens: 99,6% de probabilidade de ganho).</a:t>
-            </a:r>
-          </a:p>
-          <a:p>
-            <a:pPr>
-              <a:spcAft>
-                <a:spcPts val="700"/>
-              </a:spcAft>
-            </a:pPr>
-            <a:r>
-              <a:rPr sz="1300">
-                <a:solidFill>
-                  <a:srgbClr val="1C2433"/>
-                </a:solidFill>
-                <a:latin typeface="Calibri"/>
-              </a:rPr>
-              <a:t>•  Mas esse bootstrap mede apenas o ruído DENTRO de um ano. A validação em vários anos vem a seguir — e muda a conclusão.</a:t>
+              <a:t>•  Nº de OS é contagem com superdispersão (variância/média = 4,0).</a:t>
+            </a:r>
+          </a:p>
+        </p:txBody>
+      </p:sp>
+      <p:sp>
+        <p:nvSpPr>
+          <p:cNvPr id="9" name="Rectangle 8"/>
+          <p:cNvSpPr/>
+          <p:nvPr/>
+        </p:nvSpPr>
+        <p:spPr>
+          <a:xfrm>
+            <a:off x="640080" y="4892040"/>
+            <a:ext cx="10972800" cy="1508760"/>
+          </a:xfrm>
+          <a:prstGeom prst="rect">
+            <a:avLst/>
+          </a:prstGeom>
+          <a:solidFill>
+            <a:srgbClr val="142B45"/>
+          </a:solidFill>
+          <a:ln>
+            <a:noFill/>
+          </a:ln>
+          <a:effectLst/>
+        </p:spPr>
+        <p:style>
+          <a:lnRef idx="1">
+            <a:schemeClr val="accent1"/>
+          </a:lnRef>
+          <a:fillRef idx="3">
+            <a:schemeClr val="accent1"/>
+          </a:fillRef>
+          <a:effectRef idx="2">
+            <a:schemeClr val="accent1"/>
+          </a:effectRef>
+          <a:fontRef idx="minor">
+            <a:schemeClr val="lt1"/>
+          </a:fontRef>
+        </p:style>
+        <p:txBody>
+          <a:bodyPr rtlCol="0" anchor="ctr"/>
+          <a:lstStyle/>
+          <a:p>
+            <a:pPr algn="ctr"/>
+          </a:p>
+        </p:txBody>
+      </p:sp>
+      <p:sp>
+        <p:nvSpPr>
+          <p:cNvPr id="10" name="TextBox 9"/>
+          <p:cNvSpPr txBox="1"/>
+          <p:nvPr/>
+        </p:nvSpPr>
+        <p:spPr>
+          <a:xfrm>
+            <a:off x="914400" y="5029200"/>
+            <a:ext cx="10424160" cy="1325880"/>
+          </a:xfrm>
+          <a:prstGeom prst="rect">
+            <a:avLst/>
+          </a:prstGeom>
+          <a:noFill/>
+        </p:spPr>
+        <p:txBody>
+          <a:bodyPr wrap="square">
+            <a:spAutoFit/>
+          </a:bodyPr>
+          <a:lstStyle/>
+          <a:p>
+            <a:r>
+              <a:rPr sz="1300" b="1">
+                <a:solidFill>
+                  <a:srgbClr val="FFFFFF"/>
+                </a:solidFill>
+                <a:latin typeface="Calibri"/>
+              </a:rPr>
+              <a:t>DOIS MODELOS ENTREGUES — Y1: custo anual por carreta, R² = 0,4713 pelo caminho decomposto (MAE 1059 CAD/ano).   Y2: nº de OS no ano, R² = 0,6080.</a:t>
+            </a:r>
+          </a:p>
+          <a:p>
+            <a:r>
+              <a:rPr sz="1300" b="1">
+                <a:solidFill>
+                  <a:srgbClr val="FFFFFF"/>
+                </a:solidFill>
+                <a:latin typeface="Calibri"/>
+              </a:rPr>
+              <a:t>O caminho decomposto vence porque o nº de OS é bem previsto. O custo médio por OS é o elo fraco (R² 0,085) — e a próxima frente de trabalho.</a:t>
             </a:r>
           </a:p>
         </p:txBody>
@@ -40878,7 +40100,7 @@
                 </a:solidFill>
                 <a:latin typeface="Calibri"/>
               </a:rPr>
-              <a:t>ITEM 12 · RESULTADOS FINAIS</a:t>
+              <a:t>ITEM 14 · LIMITAÇÕES</a:t>
             </a:r>
           </a:p>
         </p:txBody>
@@ -40912,7 +40134,7 @@
                 </a:solidFill>
                 <a:latin typeface="Calibri"/>
               </a:rPr>
-              <a:t>Qual modelo mantemos</a:t>
+              <a:t>O que mudou nas limitações após a Fase 2</a:t>
             </a:r>
           </a:p>
         </p:txBody>
@@ -40946,7 +40168,7 @@
                 </a:solidFill>
                 <a:latin typeface="Calibri"/>
               </a:rPr>
-              <a:t>O mesmo confronto repetido com três anos de teste, cada um treinado só com os anos anteriores.</a:t>
+              <a:t>As limitações declaradas em agosto continuam válidas, exceto as que esta fase resolveu — e há três novas, criadas pelas próprias escolhas da Fase 2.</a:t>
             </a:r>
           </a:p>
         </p:txBody>
@@ -40960,8 +40182,8 @@
           <p:nvPr/>
         </p:nvGraphicFramePr>
         <p:xfrm>
-          <a:off x="640080" y="1965960"/>
-          <a:ext cx="6766560" cy="2651760"/>
+          <a:off x="640080" y="2011680"/>
+          <a:ext cx="10972800" cy="1554480"/>
         </p:xfrm>
         <a:graphic>
           <a:graphicData uri="http://schemas.openxmlformats.org/drawingml/2006/table">
@@ -40970,26 +40192,23 @@
                 <a:tableStyleId>{5C22544A-7EE6-4342-B048-85BDC9FD1C3A}</a:tableStyleId>
               </a:tblPr>
               <a:tblGrid>
-                <a:gridCol w="1353312"/>
-                <a:gridCol w="1353312"/>
-                <a:gridCol w="1353312"/>
-                <a:gridCol w="1353312"/>
-                <a:gridCol w="1353312"/>
+                <a:gridCol w="5486400"/>
+                <a:gridCol w="5486400"/>
               </a:tblGrid>
-              <a:tr h="378822">
-                <a:tc>
-                  <a:txBody>
-                    <a:bodyPr/>
-                    <a:lstStyle/>
-                    <a:p>
-                      <a:r>
-                        <a:rPr sz="1000" b="1">
+              <a:tr h="388620">
+                <a:tc>
+                  <a:txBody>
+                    <a:bodyPr/>
+                    <a:lstStyle/>
+                    <a:p>
+                      <a:r>
+                        <a:rPr sz="1100" b="1">
                           <a:solidFill>
                             <a:srgbClr val="FFFFFF"/>
                           </a:solidFill>
                           <a:latin typeface="Calibri"/>
                         </a:rPr>
-                        <a:t>ano de teste</a:t>
+                        <a:t>limitação declarada em agosto</a:t>
                       </a:r>
                     </a:p>
                   </a:txBody>
@@ -41005,13 +40224,13 @@
                     <a:lstStyle/>
                     <a:p>
                       <a:r>
-                        <a:rPr sz="1000" b="1">
+                        <a:rPr sz="1100" b="1">
                           <a:solidFill>
                             <a:srgbClr val="FFFFFF"/>
                           </a:solidFill>
                           <a:latin typeface="Calibri"/>
                         </a:rPr>
-                        <a:t>modelo</a:t>
+                        <a:t>situação após a Fase 2</a:t>
                       </a:r>
                     </a:p>
                   </a:txBody>
@@ -41021,87 +40240,113 @@
                     </a:solidFill>
                   </a:tcPr>
                 </a:tc>
-                <a:tc>
-                  <a:txBody>
-                    <a:bodyPr/>
-                    <a:lstStyle/>
-                    <a:p>
-                      <a:r>
-                        <a:rPr sz="1000" b="1">
-                          <a:solidFill>
-                            <a:srgbClr val="FFFFFF"/>
+              </a:tr>
+              <a:tr h="388620">
+                <a:tc>
+                  <a:txBody>
+                    <a:bodyPr/>
+                    <a:lstStyle/>
+                    <a:p>
+                      <a:r>
+                        <a:rPr sz="1100">
+                          <a:solidFill>
+                            <a:srgbClr val="1C2433"/>
                           </a:solidFill>
                           <a:latin typeface="Calibri"/>
                         </a:rPr>
-                        <a:t>único</a:t>
+                        <a:t>Sem dados de contrato — reduz o conjunto explicativo</a:t>
                       </a:r>
                     </a:p>
                   </a:txBody>
                   <a:tcPr>
                     <a:solidFill>
-                      <a:srgbClr val="142B45"/>
-                    </a:solidFill>
-                  </a:tcPr>
-                </a:tc>
-                <a:tc>
-                  <a:txBody>
-                    <a:bodyPr/>
-                    <a:lstStyle/>
-                    <a:p>
-                      <a:r>
-                        <a:rPr sz="1000" b="1">
-                          <a:solidFill>
-                            <a:srgbClr val="FFFFFF"/>
+                      <a:srgbClr val="FFFFFF"/>
+                    </a:solidFill>
+                  </a:tcPr>
+                </a:tc>
+                <a:tc>
+                  <a:txBody>
+                    <a:bodyPr/>
+                    <a:lstStyle/>
+                    <a:p>
+                      <a:r>
+                        <a:rPr sz="1100">
+                          <a:solidFill>
+                            <a:srgbClr val="1C2433"/>
                           </a:solidFill>
                           <a:latin typeface="Calibri"/>
                         </a:rPr>
-                        <a:t>dividido</a:t>
+                        <a:t>RESOLVIDA — contrato incorporado e H6 testada</a:t>
                       </a:r>
                     </a:p>
                   </a:txBody>
                   <a:tcPr>
                     <a:solidFill>
-                      <a:srgbClr val="142B45"/>
-                    </a:solidFill>
-                  </a:tcPr>
-                </a:tc>
-                <a:tc>
-                  <a:txBody>
-                    <a:bodyPr/>
-                    <a:lstStyle/>
-                    <a:p>
-                      <a:r>
-                        <a:rPr sz="1000" b="1">
-                          <a:solidFill>
-                            <a:srgbClr val="FFFFFF"/>
+                      <a:srgbClr val="FFFFFF"/>
+                    </a:solidFill>
+                  </a:tcPr>
+                </a:tc>
+              </a:tr>
+              <a:tr h="388620">
+                <a:tc>
+                  <a:txBody>
+                    <a:bodyPr/>
+                    <a:lstStyle/>
+                    <a:p>
+                      <a:r>
+                        <a:rPr sz="1100">
+                          <a:solidFill>
+                            <a:srgbClr val="1C2433"/>
                           </a:solidFill>
                           <a:latin typeface="Calibri"/>
                         </a:rPr>
-                        <a:t>diferença</a:t>
+                        <a:t>Sem filtro por tipo de manutenção</a:t>
                       </a:r>
                     </a:p>
                   </a:txBody>
                   <a:tcPr>
                     <a:solidFill>
-                      <a:srgbClr val="142B45"/>
+                      <a:srgbClr val="EEEADE"/>
+                    </a:solidFill>
+                  </a:tcPr>
+                </a:tc>
+                <a:tc>
+                  <a:txBody>
+                    <a:bodyPr/>
+                    <a:lstStyle/>
+                    <a:p>
+                      <a:r>
+                        <a:rPr sz="1100">
+                          <a:solidFill>
+                            <a:srgbClr val="1C2433"/>
+                          </a:solidFill>
+                          <a:latin typeface="Calibri"/>
+                        </a:rPr>
+                        <a:t>RESOLVIDA de outro modo — o tipo de manutenção entrou como VARIÁVEL do modelo, em vez de recortar a amostra</a:t>
+                      </a:r>
+                    </a:p>
+                  </a:txBody>
+                  <a:tcPr>
+                    <a:solidFill>
+                      <a:srgbClr val="EEEADE"/>
                     </a:solidFill>
                   </a:tcPr>
                 </a:tc>
               </a:tr>
-              <a:tr h="378822">
-                <a:tc>
-                  <a:txBody>
-                    <a:bodyPr/>
-                    <a:lstStyle/>
-                    <a:p>
-                      <a:r>
-                        <a:rPr sz="1000">
+              <a:tr h="388620">
+                <a:tc>
+                  <a:txBody>
+                    <a:bodyPr/>
+                    <a:lstStyle/>
+                    <a:p>
+                      <a:r>
+                        <a:rPr sz="1100">
                           <a:solidFill>
                             <a:srgbClr val="1C2433"/>
                           </a:solidFill>
                           <a:latin typeface="Calibri"/>
                         </a:rPr>
-                        <a:t>2023</a:t>
+                        <a:t>km derivado do odômetro; província parcial (~54%)</a:t>
                       </a:r>
                     </a:p>
                   </a:txBody>
@@ -41117,645 +40362,19 @@
                     <a:lstStyle/>
                     <a:p>
                       <a:r>
-                        <a:rPr sz="1000">
+                        <a:rPr sz="1100">
                           <a:solidFill>
                             <a:srgbClr val="1C2433"/>
                           </a:solidFill>
                           <a:latin typeface="Calibri"/>
                         </a:rPr>
-                        <a:t>gradient_boosting</a:t>
+                        <a:t>permanece</a:t>
                       </a:r>
                     </a:p>
                   </a:txBody>
                   <a:tcPr>
                     <a:solidFill>
                       <a:srgbClr val="FFFFFF"/>
-                    </a:solidFill>
-                  </a:tcPr>
-                </a:tc>
-                <a:tc>
-                  <a:txBody>
-                    <a:bodyPr/>
-                    <a:lstStyle/>
-                    <a:p>
-                      <a:r>
-                        <a:rPr sz="1000">
-                          <a:solidFill>
-                            <a:srgbClr val="1C2433"/>
-                          </a:solidFill>
-                          <a:latin typeface="Calibri"/>
-                        </a:rPr>
-                        <a:t>0.4941</a:t>
-                      </a:r>
-                    </a:p>
-                  </a:txBody>
-                  <a:tcPr>
-                    <a:solidFill>
-                      <a:srgbClr val="FFFFFF"/>
-                    </a:solidFill>
-                  </a:tcPr>
-                </a:tc>
-                <a:tc>
-                  <a:txBody>
-                    <a:bodyPr/>
-                    <a:lstStyle/>
-                    <a:p>
-                      <a:r>
-                        <a:rPr sz="1000">
-                          <a:solidFill>
-                            <a:srgbClr val="1C2433"/>
-                          </a:solidFill>
-                          <a:latin typeface="Calibri"/>
-                        </a:rPr>
-                        <a:t>0.4748</a:t>
-                      </a:r>
-                    </a:p>
-                  </a:txBody>
-                  <a:tcPr>
-                    <a:solidFill>
-                      <a:srgbClr val="FFFFFF"/>
-                    </a:solidFill>
-                  </a:tcPr>
-                </a:tc>
-                <a:tc>
-                  <a:txBody>
-                    <a:bodyPr/>
-                    <a:lstStyle/>
-                    <a:p>
-                      <a:r>
-                        <a:rPr sz="1000">
-                          <a:solidFill>
-                            <a:srgbClr val="1C2433"/>
-                          </a:solidFill>
-                          <a:latin typeface="Calibri"/>
-                        </a:rPr>
-                        <a:t>-0.0193</a:t>
-                      </a:r>
-                    </a:p>
-                  </a:txBody>
-                  <a:tcPr>
-                    <a:solidFill>
-                      <a:srgbClr val="FFFFFF"/>
-                    </a:solidFill>
-                  </a:tcPr>
-                </a:tc>
-              </a:tr>
-              <a:tr h="378822">
-                <a:tc>
-                  <a:txBody>
-                    <a:bodyPr/>
-                    <a:lstStyle/>
-                    <a:p>
-                      <a:r>
-                        <a:rPr sz="1000">
-                          <a:solidFill>
-                            <a:srgbClr val="1C2433"/>
-                          </a:solidFill>
-                          <a:latin typeface="Calibri"/>
-                        </a:rPr>
-                        <a:t>2023</a:t>
-                      </a:r>
-                    </a:p>
-                  </a:txBody>
-                  <a:tcPr>
-                    <a:solidFill>
-                      <a:srgbClr val="EEEADE"/>
-                    </a:solidFill>
-                  </a:tcPr>
-                </a:tc>
-                <a:tc>
-                  <a:txBody>
-                    <a:bodyPr/>
-                    <a:lstStyle/>
-                    <a:p>
-                      <a:r>
-                        <a:rPr sz="1000">
-                          <a:solidFill>
-                            <a:srgbClr val="1C2433"/>
-                          </a:solidFill>
-                          <a:latin typeface="Calibri"/>
-                        </a:rPr>
-                        <a:t>random_forest</a:t>
-                      </a:r>
-                    </a:p>
-                  </a:txBody>
-                  <a:tcPr>
-                    <a:solidFill>
-                      <a:srgbClr val="EEEADE"/>
-                    </a:solidFill>
-                  </a:tcPr>
-                </a:tc>
-                <a:tc>
-                  <a:txBody>
-                    <a:bodyPr/>
-                    <a:lstStyle/>
-                    <a:p>
-                      <a:r>
-                        <a:rPr sz="1000">
-                          <a:solidFill>
-                            <a:srgbClr val="1C2433"/>
-                          </a:solidFill>
-                          <a:latin typeface="Calibri"/>
-                        </a:rPr>
-                        <a:t>0.4745</a:t>
-                      </a:r>
-                    </a:p>
-                  </a:txBody>
-                  <a:tcPr>
-                    <a:solidFill>
-                      <a:srgbClr val="EEEADE"/>
-                    </a:solidFill>
-                  </a:tcPr>
-                </a:tc>
-                <a:tc>
-                  <a:txBody>
-                    <a:bodyPr/>
-                    <a:lstStyle/>
-                    <a:p>
-                      <a:r>
-                        <a:rPr sz="1000">
-                          <a:solidFill>
-                            <a:srgbClr val="1C2433"/>
-                          </a:solidFill>
-                          <a:latin typeface="Calibri"/>
-                        </a:rPr>
-                        <a:t>0.478</a:t>
-                      </a:r>
-                    </a:p>
-                  </a:txBody>
-                  <a:tcPr>
-                    <a:solidFill>
-                      <a:srgbClr val="EEEADE"/>
-                    </a:solidFill>
-                  </a:tcPr>
-                </a:tc>
-                <a:tc>
-                  <a:txBody>
-                    <a:bodyPr/>
-                    <a:lstStyle/>
-                    <a:p>
-                      <a:r>
-                        <a:rPr sz="1000">
-                          <a:solidFill>
-                            <a:srgbClr val="1C2433"/>
-                          </a:solidFill>
-                          <a:latin typeface="Calibri"/>
-                        </a:rPr>
-                        <a:t>0.0035</a:t>
-                      </a:r>
-                    </a:p>
-                  </a:txBody>
-                  <a:tcPr>
-                    <a:solidFill>
-                      <a:srgbClr val="EEEADE"/>
-                    </a:solidFill>
-                  </a:tcPr>
-                </a:tc>
-              </a:tr>
-              <a:tr h="378822">
-                <a:tc>
-                  <a:txBody>
-                    <a:bodyPr/>
-                    <a:lstStyle/>
-                    <a:p>
-                      <a:r>
-                        <a:rPr sz="1000">
-                          <a:solidFill>
-                            <a:srgbClr val="1C2433"/>
-                          </a:solidFill>
-                          <a:latin typeface="Calibri"/>
-                        </a:rPr>
-                        <a:t>2024</a:t>
-                      </a:r>
-                    </a:p>
-                  </a:txBody>
-                  <a:tcPr>
-                    <a:solidFill>
-                      <a:srgbClr val="FFFFFF"/>
-                    </a:solidFill>
-                  </a:tcPr>
-                </a:tc>
-                <a:tc>
-                  <a:txBody>
-                    <a:bodyPr/>
-                    <a:lstStyle/>
-                    <a:p>
-                      <a:r>
-                        <a:rPr sz="1000">
-                          <a:solidFill>
-                            <a:srgbClr val="1C2433"/>
-                          </a:solidFill>
-                          <a:latin typeface="Calibri"/>
-                        </a:rPr>
-                        <a:t>gradient_boosting</a:t>
-                      </a:r>
-                    </a:p>
-                  </a:txBody>
-                  <a:tcPr>
-                    <a:solidFill>
-                      <a:srgbClr val="FFFFFF"/>
-                    </a:solidFill>
-                  </a:tcPr>
-                </a:tc>
-                <a:tc>
-                  <a:txBody>
-                    <a:bodyPr/>
-                    <a:lstStyle/>
-                    <a:p>
-                      <a:r>
-                        <a:rPr sz="1000">
-                          <a:solidFill>
-                            <a:srgbClr val="1C2433"/>
-                          </a:solidFill>
-                          <a:latin typeface="Calibri"/>
-                        </a:rPr>
-                        <a:t>0.4821</a:t>
-                      </a:r>
-                    </a:p>
-                  </a:txBody>
-                  <a:tcPr>
-                    <a:solidFill>
-                      <a:srgbClr val="FFFFFF"/>
-                    </a:solidFill>
-                  </a:tcPr>
-                </a:tc>
-                <a:tc>
-                  <a:txBody>
-                    <a:bodyPr/>
-                    <a:lstStyle/>
-                    <a:p>
-                      <a:r>
-                        <a:rPr sz="1000">
-                          <a:solidFill>
-                            <a:srgbClr val="1C2433"/>
-                          </a:solidFill>
-                          <a:latin typeface="Calibri"/>
-                        </a:rPr>
-                        <a:t>0.4968</a:t>
-                      </a:r>
-                    </a:p>
-                  </a:txBody>
-                  <a:tcPr>
-                    <a:solidFill>
-                      <a:srgbClr val="FFFFFF"/>
-                    </a:solidFill>
-                  </a:tcPr>
-                </a:tc>
-                <a:tc>
-                  <a:txBody>
-                    <a:bodyPr/>
-                    <a:lstStyle/>
-                    <a:p>
-                      <a:r>
-                        <a:rPr sz="1000">
-                          <a:solidFill>
-                            <a:srgbClr val="1C2433"/>
-                          </a:solidFill>
-                          <a:latin typeface="Calibri"/>
-                        </a:rPr>
-                        <a:t>0.0147</a:t>
-                      </a:r>
-                    </a:p>
-                  </a:txBody>
-                  <a:tcPr>
-                    <a:solidFill>
-                      <a:srgbClr val="FFFFFF"/>
-                    </a:solidFill>
-                  </a:tcPr>
-                </a:tc>
-              </a:tr>
-              <a:tr h="378822">
-                <a:tc>
-                  <a:txBody>
-                    <a:bodyPr/>
-                    <a:lstStyle/>
-                    <a:p>
-                      <a:r>
-                        <a:rPr sz="1000">
-                          <a:solidFill>
-                            <a:srgbClr val="1C2433"/>
-                          </a:solidFill>
-                          <a:latin typeface="Calibri"/>
-                        </a:rPr>
-                        <a:t>2024</a:t>
-                      </a:r>
-                    </a:p>
-                  </a:txBody>
-                  <a:tcPr>
-                    <a:solidFill>
-                      <a:srgbClr val="EEEADE"/>
-                    </a:solidFill>
-                  </a:tcPr>
-                </a:tc>
-                <a:tc>
-                  <a:txBody>
-                    <a:bodyPr/>
-                    <a:lstStyle/>
-                    <a:p>
-                      <a:r>
-                        <a:rPr sz="1000">
-                          <a:solidFill>
-                            <a:srgbClr val="1C2433"/>
-                          </a:solidFill>
-                          <a:latin typeface="Calibri"/>
-                        </a:rPr>
-                        <a:t>random_forest</a:t>
-                      </a:r>
-                    </a:p>
-                  </a:txBody>
-                  <a:tcPr>
-                    <a:solidFill>
-                      <a:srgbClr val="EEEADE"/>
-                    </a:solidFill>
-                  </a:tcPr>
-                </a:tc>
-                <a:tc>
-                  <a:txBody>
-                    <a:bodyPr/>
-                    <a:lstStyle/>
-                    <a:p>
-                      <a:r>
-                        <a:rPr sz="1000">
-                          <a:solidFill>
-                            <a:srgbClr val="1C2433"/>
-                          </a:solidFill>
-                          <a:latin typeface="Calibri"/>
-                        </a:rPr>
-                        <a:t>0.4779</a:t>
-                      </a:r>
-                    </a:p>
-                  </a:txBody>
-                  <a:tcPr>
-                    <a:solidFill>
-                      <a:srgbClr val="EEEADE"/>
-                    </a:solidFill>
-                  </a:tcPr>
-                </a:tc>
-                <a:tc>
-                  <a:txBody>
-                    <a:bodyPr/>
-                    <a:lstStyle/>
-                    <a:p>
-                      <a:r>
-                        <a:rPr sz="1000">
-                          <a:solidFill>
-                            <a:srgbClr val="1C2433"/>
-                          </a:solidFill>
-                          <a:latin typeface="Calibri"/>
-                        </a:rPr>
-                        <a:t>0.4808</a:t>
-                      </a:r>
-                    </a:p>
-                  </a:txBody>
-                  <a:tcPr>
-                    <a:solidFill>
-                      <a:srgbClr val="EEEADE"/>
-                    </a:solidFill>
-                  </a:tcPr>
-                </a:tc>
-                <a:tc>
-                  <a:txBody>
-                    <a:bodyPr/>
-                    <a:lstStyle/>
-                    <a:p>
-                      <a:r>
-                        <a:rPr sz="1000">
-                          <a:solidFill>
-                            <a:srgbClr val="1C2433"/>
-                          </a:solidFill>
-                          <a:latin typeface="Calibri"/>
-                        </a:rPr>
-                        <a:t>0.0029</a:t>
-                      </a:r>
-                    </a:p>
-                  </a:txBody>
-                  <a:tcPr>
-                    <a:solidFill>
-                      <a:srgbClr val="EEEADE"/>
-                    </a:solidFill>
-                  </a:tcPr>
-                </a:tc>
-              </a:tr>
-              <a:tr h="378822">
-                <a:tc>
-                  <a:txBody>
-                    <a:bodyPr/>
-                    <a:lstStyle/>
-                    <a:p>
-                      <a:r>
-                        <a:rPr sz="1000">
-                          <a:solidFill>
-                            <a:srgbClr val="1C2433"/>
-                          </a:solidFill>
-                          <a:latin typeface="Calibri"/>
-                        </a:rPr>
-                        <a:t>2025</a:t>
-                      </a:r>
-                    </a:p>
-                  </a:txBody>
-                  <a:tcPr>
-                    <a:solidFill>
-                      <a:srgbClr val="FFFFFF"/>
-                    </a:solidFill>
-                  </a:tcPr>
-                </a:tc>
-                <a:tc>
-                  <a:txBody>
-                    <a:bodyPr/>
-                    <a:lstStyle/>
-                    <a:p>
-                      <a:r>
-                        <a:rPr sz="1000">
-                          <a:solidFill>
-                            <a:srgbClr val="1C2433"/>
-                          </a:solidFill>
-                          <a:latin typeface="Calibri"/>
-                        </a:rPr>
-                        <a:t>gradient_boosting</a:t>
-                      </a:r>
-                    </a:p>
-                  </a:txBody>
-                  <a:tcPr>
-                    <a:solidFill>
-                      <a:srgbClr val="FFFFFF"/>
-                    </a:solidFill>
-                  </a:tcPr>
-                </a:tc>
-                <a:tc>
-                  <a:txBody>
-                    <a:bodyPr/>
-                    <a:lstStyle/>
-                    <a:p>
-                      <a:r>
-                        <a:rPr sz="1000">
-                          <a:solidFill>
-                            <a:srgbClr val="1C2433"/>
-                          </a:solidFill>
-                          <a:latin typeface="Calibri"/>
-                        </a:rPr>
-                        <a:t>0.4549</a:t>
-                      </a:r>
-                    </a:p>
-                  </a:txBody>
-                  <a:tcPr>
-                    <a:solidFill>
-                      <a:srgbClr val="FFFFFF"/>
-                    </a:solidFill>
-                  </a:tcPr>
-                </a:tc>
-                <a:tc>
-                  <a:txBody>
-                    <a:bodyPr/>
-                    <a:lstStyle/>
-                    <a:p>
-                      <a:r>
-                        <a:rPr sz="1000">
-                          <a:solidFill>
-                            <a:srgbClr val="1C2433"/>
-                          </a:solidFill>
-                          <a:latin typeface="Calibri"/>
-                        </a:rPr>
-                        <a:t>0.4673</a:t>
-                      </a:r>
-                    </a:p>
-                  </a:txBody>
-                  <a:tcPr>
-                    <a:solidFill>
-                      <a:srgbClr val="FFFFFF"/>
-                    </a:solidFill>
-                  </a:tcPr>
-                </a:tc>
-                <a:tc>
-                  <a:txBody>
-                    <a:bodyPr/>
-                    <a:lstStyle/>
-                    <a:p>
-                      <a:r>
-                        <a:rPr sz="1000">
-                          <a:solidFill>
-                            <a:srgbClr val="1C2433"/>
-                          </a:solidFill>
-                          <a:latin typeface="Calibri"/>
-                        </a:rPr>
-                        <a:t>0.0124</a:t>
-                      </a:r>
-                    </a:p>
-                  </a:txBody>
-                  <a:tcPr>
-                    <a:solidFill>
-                      <a:srgbClr val="FFFFFF"/>
-                    </a:solidFill>
-                  </a:tcPr>
-                </a:tc>
-              </a:tr>
-              <a:tr h="378828">
-                <a:tc>
-                  <a:txBody>
-                    <a:bodyPr/>
-                    <a:lstStyle/>
-                    <a:p>
-                      <a:r>
-                        <a:rPr sz="1000">
-                          <a:solidFill>
-                            <a:srgbClr val="1C2433"/>
-                          </a:solidFill>
-                          <a:latin typeface="Calibri"/>
-                        </a:rPr>
-                        <a:t>2025</a:t>
-                      </a:r>
-                    </a:p>
-                  </a:txBody>
-                  <a:tcPr>
-                    <a:solidFill>
-                      <a:srgbClr val="EEEADE"/>
-                    </a:solidFill>
-                  </a:tcPr>
-                </a:tc>
-                <a:tc>
-                  <a:txBody>
-                    <a:bodyPr/>
-                    <a:lstStyle/>
-                    <a:p>
-                      <a:r>
-                        <a:rPr sz="1000">
-                          <a:solidFill>
-                            <a:srgbClr val="1C2433"/>
-                          </a:solidFill>
-                          <a:latin typeface="Calibri"/>
-                        </a:rPr>
-                        <a:t>random_forest</a:t>
-                      </a:r>
-                    </a:p>
-                  </a:txBody>
-                  <a:tcPr>
-                    <a:solidFill>
-                      <a:srgbClr val="EEEADE"/>
-                    </a:solidFill>
-                  </a:tcPr>
-                </a:tc>
-                <a:tc>
-                  <a:txBody>
-                    <a:bodyPr/>
-                    <a:lstStyle/>
-                    <a:p>
-                      <a:r>
-                        <a:rPr sz="1000">
-                          <a:solidFill>
-                            <a:srgbClr val="1C2433"/>
-                          </a:solidFill>
-                          <a:latin typeface="Calibri"/>
-                        </a:rPr>
-                        <a:t>0.4486</a:t>
-                      </a:r>
-                    </a:p>
-                  </a:txBody>
-                  <a:tcPr>
-                    <a:solidFill>
-                      <a:srgbClr val="EEEADE"/>
-                    </a:solidFill>
-                  </a:tcPr>
-                </a:tc>
-                <a:tc>
-                  <a:txBody>
-                    <a:bodyPr/>
-                    <a:lstStyle/>
-                    <a:p>
-                      <a:r>
-                        <a:rPr sz="1000">
-                          <a:solidFill>
-                            <a:srgbClr val="1C2433"/>
-                          </a:solidFill>
-                          <a:latin typeface="Calibri"/>
-                        </a:rPr>
-                        <a:t>0.4652</a:t>
-                      </a:r>
-                    </a:p>
-                  </a:txBody>
-                  <a:tcPr>
-                    <a:solidFill>
-                      <a:srgbClr val="EEEADE"/>
-                    </a:solidFill>
-                  </a:tcPr>
-                </a:tc>
-                <a:tc>
-                  <a:txBody>
-                    <a:bodyPr/>
-                    <a:lstStyle/>
-                    <a:p>
-                      <a:r>
-                        <a:rPr sz="1000">
-                          <a:solidFill>
-                            <a:srgbClr val="1C2433"/>
-                          </a:solidFill>
-                          <a:latin typeface="Calibri"/>
-                        </a:rPr>
-                        <a:t>0.0165</a:t>
-                      </a:r>
-                    </a:p>
-                  </a:txBody>
-                  <a:tcPr>
-                    <a:solidFill>
-                      <a:srgbClr val="EEEADE"/>
                     </a:solidFill>
                   </a:tcPr>
                 </a:tc>
@@ -41772,8 +40391,8 @@
         </p:nvSpPr>
         <p:spPr>
           <a:xfrm>
-            <a:off x="7589520" y="2057400"/>
-            <a:ext cx="4114800" cy="2651760"/>
+            <a:off x="822960" y="3794760"/>
+            <a:ext cx="10607040" cy="365760"/>
           </a:xfrm>
           <a:prstGeom prst="rect">
             <a:avLst/>
@@ -41786,109 +40405,28 @@
           </a:bodyPr>
           <a:lstStyle/>
           <a:p>
-            <a:pPr>
-              <a:spcAft>
-                <a:spcPts val="700"/>
-              </a:spcAft>
-            </a:pPr>
-            <a:r>
-              <a:rPr sz="1200">
-                <a:solidFill>
-                  <a:srgbClr val="1C2433"/>
-                </a:solidFill>
-                <a:latin typeface="Calibri"/>
-              </a:rPr>
-              <a:t>•  No Gradient Boosting o ganho INVERTE de sinal em 2023.</a:t>
-            </a:r>
-          </a:p>
-          <a:p>
-            <a:pPr>
-              <a:spcAft>
-                <a:spcPts val="700"/>
-              </a:spcAft>
-            </a:pPr>
-            <a:r>
-              <a:rPr sz="1200">
-                <a:solidFill>
-                  <a:srgbClr val="1C2433"/>
-                </a:solidFill>
-                <a:latin typeface="Calibri"/>
-              </a:rPr>
-              <a:t>•  No Random Forest é consistente, mas cai para +0,003 em dois dos três anos.</a:t>
-            </a:r>
-          </a:p>
-          <a:p>
-            <a:pPr>
-              <a:spcAft>
-                <a:spcPts val="700"/>
-              </a:spcAft>
-            </a:pPr>
-            <a:r>
-              <a:rPr sz="1200">
-                <a:solidFill>
-                  <a:srgbClr val="1C2433"/>
-                </a:solidFill>
-                <a:latin typeface="Calibri"/>
-              </a:rPr>
-              <a:t>•  A variação entre anos é maior que o ganho medido em 2025.</a:t>
+            <a:r>
+              <a:rPr sz="1400" b="1">
+                <a:solidFill>
+                  <a:srgbClr val="142B45"/>
+                </a:solidFill>
+                <a:latin typeface="Calibri"/>
+              </a:rPr>
+              <a:t>Limitações novas, decorrentes das escolhas desta fase:</a:t>
             </a:r>
           </a:p>
         </p:txBody>
       </p:sp>
       <p:sp>
         <p:nvSpPr>
-          <p:cNvPr id="9" name="Rectangle 8"/>
-          <p:cNvSpPr/>
-          <p:nvPr/>
-        </p:nvSpPr>
-        <p:spPr>
-          <a:xfrm>
-            <a:off x="640080" y="4892040"/>
-            <a:ext cx="10972800" cy="1508760"/>
-          </a:xfrm>
-          <a:prstGeom prst="rect">
-            <a:avLst/>
-          </a:prstGeom>
-          <a:solidFill>
-            <a:srgbClr val="142B45"/>
-          </a:solidFill>
-          <a:ln>
-            <a:noFill/>
-          </a:ln>
-          <a:effectLst/>
-        </p:spPr>
-        <p:style>
-          <a:lnRef idx="1">
-            <a:schemeClr val="accent1"/>
-          </a:lnRef>
-          <a:fillRef idx="3">
-            <a:schemeClr val="accent1"/>
-          </a:fillRef>
-          <a:effectRef idx="2">
-            <a:schemeClr val="accent1"/>
-          </a:effectRef>
-          <a:fontRef idx="minor">
-            <a:schemeClr val="lt1"/>
-          </a:fontRef>
-        </p:style>
-        <p:txBody>
-          <a:bodyPr rtlCol="0" anchor="ctr"/>
-          <a:lstStyle/>
-          <a:p>
-            <a:pPr algn="ctr"/>
-          </a:p>
-        </p:txBody>
-      </p:sp>
-      <p:sp>
-        <p:nvSpPr>
-          <p:cNvPr id="10" name="TextBox 9"/>
+          <p:cNvPr id="9" name="TextBox 8"/>
           <p:cNvSpPr txBox="1"/>
           <p:nvPr/>
         </p:nvSpPr>
         <p:spPr>
           <a:xfrm>
-            <a:off x="914400" y="5029200"/>
-            <a:ext cx="10424160" cy="1325880"/>
+            <a:off x="822960" y="4206240"/>
+            <a:ext cx="10607040" cy="2103120"/>
           </a:xfrm>
           <a:prstGeom prst="rect">
             <a:avLst/>
@@ -41901,36 +40439,83 @@
           </a:bodyPr>
           <a:lstStyle/>
           <a:p>
-            <a:r>
-              <a:rPr sz="1300" b="1">
-                <a:solidFill>
-                  <a:srgbClr val="FFFFFF"/>
-                </a:solidFill>
-                <a:latin typeface="Calibri"/>
-              </a:rPr>
-              <a:t>MANTEMOS O MODELO ÚNICO — gradient_boosting, R² = 0.4549 · RMSE = 2002.4 · MAE = 1092.7 CAD/ano.</a:t>
-            </a:r>
-          </a:p>
-          <a:p>
-            <a:r>
-              <a:rPr sz="1300" b="1">
-                <a:solidFill>
-                  <a:srgbClr val="FFFFFF"/>
-                </a:solidFill>
-                <a:latin typeface="Calibri"/>
-              </a:rPr>
-              <a:t>Dividir por refrigeração não se sustenta fora de 2025, e dobraria o número de modelos a treinar e monitorar.</a:t>
-            </a:r>
-          </a:p>
-          <a:p>
-            <a:r>
-              <a:rPr sz="1300" b="1">
-                <a:solidFill>
-                  <a:srgbClr val="FFFFFF"/>
-                </a:solidFill>
-                <a:latin typeface="Calibri"/>
-              </a:rPr>
-              <a:t>As variáveis de contrato permanecem no modelo: o efeito é pequeno, mas registram o teste de H6 e não custam nada.</a:t>
+            <a:pPr>
+              <a:spcAft>
+                <a:spcPts val="700"/>
+              </a:spcAft>
+            </a:pPr>
+            <a:r>
+              <a:rPr sz="1300">
+                <a:solidFill>
+                  <a:srgbClr val="1C2433"/>
+                </a:solidFill>
+                <a:latin typeface="Calibri"/>
+              </a:rPr>
+              <a:t>•  O custo médio por OS é pouco previsível (R² 0,085): é o fator que limita a precisão do caminho decomposto.</a:t>
+            </a:r>
+          </a:p>
+          <a:p>
+            <a:pPr>
+              <a:spcAft>
+                <a:spcPts val="700"/>
+              </a:spcAft>
+            </a:pPr>
+            <a:r>
+              <a:rPr sz="1300">
+                <a:solidFill>
+                  <a:srgbClr val="1C2433"/>
+                </a:solidFill>
+                <a:latin typeface="Calibri"/>
+              </a:rPr>
+              <a:t>•  NET e MIX somam 2,7% das OS — conclusões sobre esses regimes têm baixa potência estatística.</a:t>
+            </a:r>
+          </a:p>
+          <a:p>
+            <a:pPr>
+              <a:spcAft>
+                <a:spcPts val="700"/>
+              </a:spcAft>
+            </a:pPr>
+            <a:r>
+              <a:rPr sz="1300">
+                <a:solidFill>
+                  <a:srgbClr val="1C2433"/>
+                </a:solidFill>
+                <a:latin typeface="Calibri"/>
+              </a:rPr>
+              <a:t>•  cod_cliente não foi modelado (597 categorias) e franquia_km_mensal_contrato foi descartada (99,8% de zeros).</a:t>
+            </a:r>
+          </a:p>
+          <a:p>
+            <a:pPr>
+              <a:spcAft>
+                <a:spcPts val="700"/>
+              </a:spcAft>
+            </a:pPr>
+            <a:r>
+              <a:rPr sz="1300">
+                <a:solidFill>
+                  <a:srgbClr val="1C2433"/>
+                </a:solidFill>
+                <a:latin typeface="Calibri"/>
+              </a:rPr>
+              <a:t>•  A avaliação usa um ano de teste por vez; a variação entre anos é maior que ganhos medidos dentro de um único ano.</a:t>
+            </a:r>
+          </a:p>
+          <a:p>
+            <a:pPr>
+              <a:spcAft>
+                <a:spcPts val="700"/>
+              </a:spcAft>
+            </a:pPr>
+            <a:r>
+              <a:rPr sz="1300">
+                <a:solidFill>
+                  <a:srgbClr val="1C2433"/>
+                </a:solidFill>
+                <a:latin typeface="Calibri"/>
+              </a:rPr>
+              <a:t>•  Nenhuma previsão de 2026 foi gerada ainda: os números são validação sobre 2025.</a:t>
             </a:r>
           </a:p>
         </p:txBody>
@@ -42070,545 +40655,6 @@
                 </a:solidFill>
                 <a:latin typeface="Calibri"/>
               </a:rPr>
-              <a:t>ITEM 14 · LIMITAÇÕES</a:t>
-            </a:r>
-          </a:p>
-        </p:txBody>
-      </p:sp>
-      <p:sp>
-        <p:nvSpPr>
-          <p:cNvPr id="5" name="TextBox 4"/>
-          <p:cNvSpPr txBox="1"/>
-          <p:nvPr/>
-        </p:nvSpPr>
-        <p:spPr>
-          <a:xfrm>
-            <a:off x="822960" y="786384"/>
-            <a:ext cx="10789920" cy="822960"/>
-          </a:xfrm>
-          <a:prstGeom prst="rect">
-            <a:avLst/>
-          </a:prstGeom>
-          <a:noFill/>
-        </p:spPr>
-        <p:txBody>
-          <a:bodyPr wrap="square">
-            <a:spAutoFit/>
-          </a:bodyPr>
-          <a:lstStyle/>
-          <a:p>
-            <a:r>
-              <a:rPr sz="2700" b="1">
-                <a:solidFill>
-                  <a:srgbClr val="142B45"/>
-                </a:solidFill>
-                <a:latin typeface="Calibri"/>
-              </a:rPr>
-              <a:t>O que mudou nas limitações após a Fase 2</a:t>
-            </a:r>
-          </a:p>
-        </p:txBody>
-      </p:sp>
-      <p:sp>
-        <p:nvSpPr>
-          <p:cNvPr id="6" name="TextBox 5"/>
-          <p:cNvSpPr txBox="1"/>
-          <p:nvPr/>
-        </p:nvSpPr>
-        <p:spPr>
-          <a:xfrm>
-            <a:off x="822960" y="1481328"/>
-            <a:ext cx="10607040" cy="411480"/>
-          </a:xfrm>
-          <a:prstGeom prst="rect">
-            <a:avLst/>
-          </a:prstGeom>
-          <a:noFill/>
-        </p:spPr>
-        <p:txBody>
-          <a:bodyPr wrap="square">
-            <a:spAutoFit/>
-          </a:bodyPr>
-          <a:lstStyle/>
-          <a:p>
-            <a:r>
-              <a:rPr sz="1200" b="0">
-                <a:solidFill>
-                  <a:srgbClr val="5B636E"/>
-                </a:solidFill>
-                <a:latin typeface="Calibri"/>
-              </a:rPr>
-              <a:t>As limitações declaradas em agosto continuam válidas, exceto as que esta fase resolveu — e há três novas, criadas pelas próprias escolhas da Fase 2.</a:t>
-            </a:r>
-          </a:p>
-        </p:txBody>
-      </p:sp>
-      <p:graphicFrame>
-        <p:nvGraphicFramePr>
-          <p:cNvPr id="7" name="Table 6"/>
-          <p:cNvGraphicFramePr>
-            <a:graphicFrameLocks noGrp="1"/>
-          </p:cNvGraphicFramePr>
-          <p:nvPr/>
-        </p:nvGraphicFramePr>
-        <p:xfrm>
-          <a:off x="640080" y="2011680"/>
-          <a:ext cx="10972800" cy="1554480"/>
-        </p:xfrm>
-        <a:graphic>
-          <a:graphicData uri="http://schemas.openxmlformats.org/drawingml/2006/table">
-            <a:tbl>
-              <a:tblPr firstRow="1" bandRow="1">
-                <a:tableStyleId>{5C22544A-7EE6-4342-B048-85BDC9FD1C3A}</a:tableStyleId>
-              </a:tblPr>
-              <a:tblGrid>
-                <a:gridCol w="5486400"/>
-                <a:gridCol w="5486400"/>
-              </a:tblGrid>
-              <a:tr h="388620">
-                <a:tc>
-                  <a:txBody>
-                    <a:bodyPr/>
-                    <a:lstStyle/>
-                    <a:p>
-                      <a:r>
-                        <a:rPr sz="1100" b="1">
-                          <a:solidFill>
-                            <a:srgbClr val="FFFFFF"/>
-                          </a:solidFill>
-                          <a:latin typeface="Calibri"/>
-                        </a:rPr>
-                        <a:t>limitação declarada em agosto</a:t>
-                      </a:r>
-                    </a:p>
-                  </a:txBody>
-                  <a:tcPr>
-                    <a:solidFill>
-                      <a:srgbClr val="142B45"/>
-                    </a:solidFill>
-                  </a:tcPr>
-                </a:tc>
-                <a:tc>
-                  <a:txBody>
-                    <a:bodyPr/>
-                    <a:lstStyle/>
-                    <a:p>
-                      <a:r>
-                        <a:rPr sz="1100" b="1">
-                          <a:solidFill>
-                            <a:srgbClr val="FFFFFF"/>
-                          </a:solidFill>
-                          <a:latin typeface="Calibri"/>
-                        </a:rPr>
-                        <a:t>situação após a Fase 2</a:t>
-                      </a:r>
-                    </a:p>
-                  </a:txBody>
-                  <a:tcPr>
-                    <a:solidFill>
-                      <a:srgbClr val="142B45"/>
-                    </a:solidFill>
-                  </a:tcPr>
-                </a:tc>
-              </a:tr>
-              <a:tr h="388620">
-                <a:tc>
-                  <a:txBody>
-                    <a:bodyPr/>
-                    <a:lstStyle/>
-                    <a:p>
-                      <a:r>
-                        <a:rPr sz="1100">
-                          <a:solidFill>
-                            <a:srgbClr val="1C2433"/>
-                          </a:solidFill>
-                          <a:latin typeface="Calibri"/>
-                        </a:rPr>
-                        <a:t>Sem dados de contrato — reduz o conjunto explicativo</a:t>
-                      </a:r>
-                    </a:p>
-                  </a:txBody>
-                  <a:tcPr>
-                    <a:solidFill>
-                      <a:srgbClr val="FFFFFF"/>
-                    </a:solidFill>
-                  </a:tcPr>
-                </a:tc>
-                <a:tc>
-                  <a:txBody>
-                    <a:bodyPr/>
-                    <a:lstStyle/>
-                    <a:p>
-                      <a:r>
-                        <a:rPr sz="1100">
-                          <a:solidFill>
-                            <a:srgbClr val="1C2433"/>
-                          </a:solidFill>
-                          <a:latin typeface="Calibri"/>
-                        </a:rPr>
-                        <a:t>RESOLVIDA — contrato incorporado e H6 testada</a:t>
-                      </a:r>
-                    </a:p>
-                  </a:txBody>
-                  <a:tcPr>
-                    <a:solidFill>
-                      <a:srgbClr val="FFFFFF"/>
-                    </a:solidFill>
-                  </a:tcPr>
-                </a:tc>
-              </a:tr>
-              <a:tr h="388620">
-                <a:tc>
-                  <a:txBody>
-                    <a:bodyPr/>
-                    <a:lstStyle/>
-                    <a:p>
-                      <a:r>
-                        <a:rPr sz="1100">
-                          <a:solidFill>
-                            <a:srgbClr val="1C2433"/>
-                          </a:solidFill>
-                          <a:latin typeface="Calibri"/>
-                        </a:rPr>
-                        <a:t>Sem filtro por tipo de manutenção</a:t>
-                      </a:r>
-                    </a:p>
-                  </a:txBody>
-                  <a:tcPr>
-                    <a:solidFill>
-                      <a:srgbClr val="EEEADE"/>
-                    </a:solidFill>
-                  </a:tcPr>
-                </a:tc>
-                <a:tc>
-                  <a:txBody>
-                    <a:bodyPr/>
-                    <a:lstStyle/>
-                    <a:p>
-                      <a:r>
-                        <a:rPr sz="1100">
-                          <a:solidFill>
-                            <a:srgbClr val="1C2433"/>
-                          </a:solidFill>
-                          <a:latin typeface="Calibri"/>
-                        </a:rPr>
-                        <a:t>RESOLVIDA — população MAINT retomada, como flag</a:t>
-                      </a:r>
-                    </a:p>
-                  </a:txBody>
-                  <a:tcPr>
-                    <a:solidFill>
-                      <a:srgbClr val="EEEADE"/>
-                    </a:solidFill>
-                  </a:tcPr>
-                </a:tc>
-              </a:tr>
-              <a:tr h="388620">
-                <a:tc>
-                  <a:txBody>
-                    <a:bodyPr/>
-                    <a:lstStyle/>
-                    <a:p>
-                      <a:r>
-                        <a:rPr sz="1100">
-                          <a:solidFill>
-                            <a:srgbClr val="1C2433"/>
-                          </a:solidFill>
-                          <a:latin typeface="Calibri"/>
-                        </a:rPr>
-                        <a:t>km derivado do odômetro; província parcial (~54%)</a:t>
-                      </a:r>
-                    </a:p>
-                  </a:txBody>
-                  <a:tcPr>
-                    <a:solidFill>
-                      <a:srgbClr val="FFFFFF"/>
-                    </a:solidFill>
-                  </a:tcPr>
-                </a:tc>
-                <a:tc>
-                  <a:txBody>
-                    <a:bodyPr/>
-                    <a:lstStyle/>
-                    <a:p>
-                      <a:r>
-                        <a:rPr sz="1100">
-                          <a:solidFill>
-                            <a:srgbClr val="1C2433"/>
-                          </a:solidFill>
-                          <a:latin typeface="Calibri"/>
-                        </a:rPr>
-                        <a:t>permanece</a:t>
-                      </a:r>
-                    </a:p>
-                  </a:txBody>
-                  <a:tcPr>
-                    <a:solidFill>
-                      <a:srgbClr val="FFFFFF"/>
-                    </a:solidFill>
-                  </a:tcPr>
-                </a:tc>
-              </a:tr>
-            </a:tbl>
-          </a:graphicData>
-        </a:graphic>
-      </p:graphicFrame>
-      <p:sp>
-        <p:nvSpPr>
-          <p:cNvPr id="8" name="TextBox 7"/>
-          <p:cNvSpPr txBox="1"/>
-          <p:nvPr/>
-        </p:nvSpPr>
-        <p:spPr>
-          <a:xfrm>
-            <a:off x="822960" y="3794760"/>
-            <a:ext cx="10607040" cy="365760"/>
-          </a:xfrm>
-          <a:prstGeom prst="rect">
-            <a:avLst/>
-          </a:prstGeom>
-          <a:noFill/>
-        </p:spPr>
-        <p:txBody>
-          <a:bodyPr wrap="square">
-            <a:spAutoFit/>
-          </a:bodyPr>
-          <a:lstStyle/>
-          <a:p>
-            <a:r>
-              <a:rPr sz="1400" b="1">
-                <a:solidFill>
-                  <a:srgbClr val="142B45"/>
-                </a:solidFill>
-                <a:latin typeface="Calibri"/>
-              </a:rPr>
-              <a:t>Limitações novas, decorrentes das escolhas desta fase:</a:t>
-            </a:r>
-          </a:p>
-        </p:txBody>
-      </p:sp>
-      <p:sp>
-        <p:nvSpPr>
-          <p:cNvPr id="9" name="TextBox 8"/>
-          <p:cNvSpPr txBox="1"/>
-          <p:nvPr/>
-        </p:nvSpPr>
-        <p:spPr>
-          <a:xfrm>
-            <a:off x="822960" y="4206240"/>
-            <a:ext cx="10607040" cy="2103120"/>
-          </a:xfrm>
-          <a:prstGeom prst="rect">
-            <a:avLst/>
-          </a:prstGeom>
-          <a:noFill/>
-        </p:spPr>
-        <p:txBody>
-          <a:bodyPr wrap="square">
-            <a:spAutoFit/>
-          </a:bodyPr>
-          <a:lstStyle/>
-          <a:p>
-            <a:pPr>
-              <a:spcAft>
-                <a:spcPts val="700"/>
-              </a:spcAft>
-            </a:pPr>
-            <a:r>
-              <a:rPr sz="1300">
-                <a:solidFill>
-                  <a:srgbClr val="1C2433"/>
-                </a:solidFill>
-                <a:latin typeface="Calibri"/>
-              </a:rPr>
-              <a:t>•  A população MAINT é mais homogênea: o ganho de R² do filtro (+0,0193) reflete amostra mais fácil, não previsão melhor.</a:t>
-            </a:r>
-          </a:p>
-          <a:p>
-            <a:pPr>
-              <a:spcAft>
-                <a:spcPts val="700"/>
-              </a:spcAft>
-            </a:pPr>
-            <a:r>
-              <a:rPr sz="1300">
-                <a:solidFill>
-                  <a:srgbClr val="1C2433"/>
-                </a:solidFill>
-                <a:latin typeface="Calibri"/>
-              </a:rPr>
-              <a:t>•  NET e MIX somam 2,7% das OS — conclusões sobre esses regimes têm baixa potência estatística.</a:t>
-            </a:r>
-          </a:p>
-          <a:p>
-            <a:pPr>
-              <a:spcAft>
-                <a:spcPts val="700"/>
-              </a:spcAft>
-            </a:pPr>
-            <a:r>
-              <a:rPr sz="1300">
-                <a:solidFill>
-                  <a:srgbClr val="1C2433"/>
-                </a:solidFill>
-                <a:latin typeface="Calibri"/>
-              </a:rPr>
-              <a:t>•  cod_cliente não foi modelado (597 categorias) e franquia_km_mensal_contrato foi descartada (99,8% de zeros).</a:t>
-            </a:r>
-          </a:p>
-          <a:p>
-            <a:pPr>
-              <a:spcAft>
-                <a:spcPts val="700"/>
-              </a:spcAft>
-            </a:pPr>
-            <a:r>
-              <a:rPr sz="1300">
-                <a:solidFill>
-                  <a:srgbClr val="1C2433"/>
-                </a:solidFill>
-                <a:latin typeface="Calibri"/>
-              </a:rPr>
-              <a:t>•  A avaliação usa um ano de teste por vez; a variação entre anos mostrou-se maior que os ganhos medidos dentro de um ano.</a:t>
-            </a:r>
-          </a:p>
-        </p:txBody>
-      </p:sp>
-    </p:spTree>
-  </p:cSld>
-  <p:clrMapOvr>
-    <a:masterClrMapping/>
-  </p:clrMapOvr>
-</p:sld>
-</file>
-
-<file path=ppt/slides/slide46.xml><?xml version="1.0" encoding="utf-8"?>
-<p:sld xmlns:a="http://schemas.openxmlformats.org/drawingml/2006/main" xmlns:p="http://schemas.openxmlformats.org/presentationml/2006/main" xmlns:r="http://schemas.openxmlformats.org/officeDocument/2006/relationships">
-  <p:cSld>
-    <p:spTree>
-      <p:nvGrpSpPr>
-        <p:cNvPr id="1" name=""/>
-        <p:cNvGrpSpPr/>
-        <p:nvPr/>
-      </p:nvGrpSpPr>
-      <p:grpSpPr/>
-      <p:sp>
-        <p:nvSpPr>
-          <p:cNvPr id="2" name="Rectangle 1"/>
-          <p:cNvSpPr/>
-          <p:nvPr/>
-        </p:nvSpPr>
-        <p:spPr>
-          <a:xfrm>
-            <a:off x="0" y="0"/>
-            <a:ext cx="12192000" cy="6858000"/>
-          </a:xfrm>
-          <a:prstGeom prst="rect">
-            <a:avLst/>
-          </a:prstGeom>
-          <a:solidFill>
-            <a:srgbClr val="F6F1E7"/>
-          </a:solidFill>
-          <a:ln>
-            <a:noFill/>
-          </a:ln>
-          <a:effectLst/>
-        </p:spPr>
-        <p:style>
-          <a:lnRef idx="1">
-            <a:schemeClr val="accent1"/>
-          </a:lnRef>
-          <a:fillRef idx="3">
-            <a:schemeClr val="accent1"/>
-          </a:fillRef>
-          <a:effectRef idx="2">
-            <a:schemeClr val="accent1"/>
-          </a:effectRef>
-          <a:fontRef idx="minor">
-            <a:schemeClr val="lt1"/>
-          </a:fontRef>
-        </p:style>
-        <p:txBody>
-          <a:bodyPr rtlCol="0" anchor="ctr"/>
-          <a:lstStyle/>
-          <a:p>
-            <a:pPr algn="ctr"/>
-          </a:p>
-        </p:txBody>
-      </p:sp>
-      <p:sp>
-        <p:nvSpPr>
-          <p:cNvPr id="3" name="Rectangle 2"/>
-          <p:cNvSpPr/>
-          <p:nvPr/>
-        </p:nvSpPr>
-        <p:spPr>
-          <a:xfrm>
-            <a:off x="548640" y="502920"/>
-            <a:ext cx="146304" cy="822960"/>
-          </a:xfrm>
-          <a:prstGeom prst="rect">
-            <a:avLst/>
-          </a:prstGeom>
-          <a:solidFill>
-            <a:srgbClr val="E8713A"/>
-          </a:solidFill>
-          <a:ln>
-            <a:noFill/>
-          </a:ln>
-          <a:effectLst/>
-        </p:spPr>
-        <p:style>
-          <a:lnRef idx="1">
-            <a:schemeClr val="accent1"/>
-          </a:lnRef>
-          <a:fillRef idx="3">
-            <a:schemeClr val="accent1"/>
-          </a:fillRef>
-          <a:effectRef idx="2">
-            <a:schemeClr val="accent1"/>
-          </a:effectRef>
-          <a:fontRef idx="minor">
-            <a:schemeClr val="lt1"/>
-          </a:fontRef>
-        </p:style>
-        <p:txBody>
-          <a:bodyPr rtlCol="0" anchor="ctr"/>
-          <a:lstStyle/>
-          <a:p>
-            <a:pPr algn="ctr"/>
-          </a:p>
-        </p:txBody>
-      </p:sp>
-      <p:sp>
-        <p:nvSpPr>
-          <p:cNvPr id="4" name="TextBox 3"/>
-          <p:cNvSpPr txBox="1"/>
-          <p:nvPr/>
-        </p:nvSpPr>
-        <p:spPr>
-          <a:xfrm>
-            <a:off x="822960" y="457200"/>
-            <a:ext cx="10789920" cy="365760"/>
-          </a:xfrm>
-          <a:prstGeom prst="rect">
-            <a:avLst/>
-          </a:prstGeom>
-          <a:noFill/>
-        </p:spPr>
-        <p:txBody>
-          <a:bodyPr wrap="square">
-            <a:spAutoFit/>
-          </a:bodyPr>
-          <a:lstStyle/>
-          <a:p>
-            <a:r>
-              <a:rPr sz="1200" b="1">
-                <a:solidFill>
-                  <a:srgbClr val="E8713A"/>
-                </a:solidFill>
-                <a:latin typeface="Calibri"/>
-              </a:rPr>
               <a:t>ITEM 15 · PROJETOS FUTUROS</a:t>
             </a:r>
           </a:p>
@@ -42809,7 +40855,7 @@
                           </a:solidFill>
                           <a:latin typeface="Calibri"/>
                         </a:rPr>
-                        <a:t>Modelagem</a:t>
+                        <a:t>Alvo Y3</a:t>
                       </a:r>
                     </a:p>
                   </a:txBody>
@@ -42831,7 +40877,7 @@
                           </a:solidFill>
                           <a:latin typeface="Calibri"/>
                         </a:rPr>
-                        <a:t>Testar Mixed Effects Random Forest (Katreddi, 2023) como alternativa à divisão manual por grupo, que não se sustentou entre anos</a:t>
+                        <a:t>Melhorar a previsão do custo médio por OS (R² 0,085) — é o gargalo do caminho decomposto e onde há maior folga de ganho</a:t>
                       </a:r>
                     </a:p>
                   </a:txBody>
@@ -42855,7 +40901,7 @@
                           </a:solidFill>
                           <a:latin typeface="Calibri"/>
                         </a:rPr>
-                        <a:t>Avaliação</a:t>
+                        <a:t>Modelagem</a:t>
                       </a:r>
                     </a:p>
                   </a:txBody>
@@ -42877,7 +40923,7 @@
                           </a:solidFill>
                           <a:latin typeface="Calibri"/>
                         </a:rPr>
-                        <a:t>Adotar validação com janelas móveis como padrão — foi ela que evitou adotar um ganho aparente medido em um único ano</a:t>
+                        <a:t>Em Y2, adotar Binomial Negativa: é contagem com superdispersão (variância/média = 4,0), e os coeficientes viram razão de taxa, interpretáveis pelo negócio</a:t>
                       </a:r>
                     </a:p>
                   </a:txBody>
@@ -42901,7 +40947,7 @@
                           </a:solidFill>
                           <a:latin typeface="Calibri"/>
                         </a:rPr>
-                        <a:t>Alvo</a:t>
+                        <a:t>Previsão 2026</a:t>
                       </a:r>
                     </a:p>
                   </a:txBody>
@@ -42923,7 +40969,7 @@
                           </a:solidFill>
                           <a:latin typeface="Calibri"/>
                         </a:rPr>
-                        <a:t>Modelar a cauda de custos extremos: a assimetria de 3,82 é o limite estrutural do R² atual</a:t>
+                        <a:t>Projetar quilometragem e montar a linha de cada carreta para 2026, aplicando o caminho decomposto — etapa ainda não executada</a:t>
                       </a:r>
                     </a:p>
                   </a:txBody>
@@ -43672,7 +41718,7 @@
                             <a:srgbClr val="1C2433"/>
                           </a:solidFill>
                         </a:rPr>
-                        <a:t>Parcial (efeito fraco)</a:t>
+                        <a:t>Não suportada (fora do modelo desde 2026-09-02)</a:t>
                       </a:r>
                     </a:p>
                   </a:txBody>
@@ -43701,7 +41747,7 @@
                             <a:srgbClr val="1C2433"/>
                           </a:solidFill>
                         </a:rPr>
-                        <a:t>H6a</a:t>
+                        <a:t>H6b</a:t>
                       </a:r>
                     </a:p>
                   </a:txBody>
@@ -43723,7 +41769,7 @@
                             <a:srgbClr val="1C2433"/>
                           </a:solidFill>
                         </a:rPr>
-                        <a:t>Duração do contrato influencia o custo anual</a:t>
+                        <a:t>Tipo de manutenção contratual (MAINT/NET/MIX) influencia o custo anual</a:t>
                       </a:r>
                     </a:p>
                   </a:txBody>
@@ -43774,7 +41820,7 @@
                             <a:srgbClr val="1C2433"/>
                           </a:solidFill>
                         </a:rPr>
-                        <a:t>H6b</a:t>
+                        <a:t>H7</a:t>
                       </a:r>
                     </a:p>
                   </a:txBody>
@@ -43796,7 +41842,7 @@
                             <a:srgbClr val="1C2433"/>
                           </a:solidFill>
                         </a:rPr>
-                        <a:t>Tipo de manutenção contratual (MAINT/NET/MIX) influencia o custo anual</a:t>
+                        <a:t>Tempo de contrato até o reparo influencia o custo anual</a:t>
                       </a:r>
                     </a:p>
                   </a:txBody>
